--- a/ProjektovySeminar.pptx
+++ b/ProjektovySeminar.pptx
@@ -5,7 +5,7 @@
     <p:sldMasterId id="2147483672" r:id="rId1"/>
   </p:sldMasterIdLst>
   <p:notesMasterIdLst>
-    <p:notesMasterId r:id="rId17"/>
+    <p:notesMasterId r:id="rId20"/>
   </p:notesMasterIdLst>
   <p:sldIdLst>
     <p:sldId id="256" r:id="rId2"/>
@@ -16,13 +16,16 @@
     <p:sldId id="263" r:id="rId7"/>
     <p:sldId id="261" r:id="rId8"/>
     <p:sldId id="262" r:id="rId9"/>
-    <p:sldId id="264" r:id="rId10"/>
-    <p:sldId id="265" r:id="rId11"/>
-    <p:sldId id="266" r:id="rId12"/>
-    <p:sldId id="267" r:id="rId13"/>
-    <p:sldId id="268" r:id="rId14"/>
-    <p:sldId id="269" r:id="rId15"/>
-    <p:sldId id="270" r:id="rId16"/>
+    <p:sldId id="273" r:id="rId10"/>
+    <p:sldId id="264" r:id="rId11"/>
+    <p:sldId id="265" r:id="rId12"/>
+    <p:sldId id="266" r:id="rId13"/>
+    <p:sldId id="267" r:id="rId14"/>
+    <p:sldId id="271" r:id="rId15"/>
+    <p:sldId id="272" r:id="rId16"/>
+    <p:sldId id="268" r:id="rId17"/>
+    <p:sldId id="269" r:id="rId18"/>
+    <p:sldId id="270" r:id="rId19"/>
   </p:sldIdLst>
   <p:sldSz cx="12192000" cy="6858000"/>
   <p:notesSz cx="6858000" cy="9144000"/>
@@ -121,6 +124,11 @@
       </a:defRPr>
     </a:lvl9pPr>
   </p:defaultTextStyle>
+  <p:extLst>
+    <p:ext uri="{EFAFB233-063F-42B5-8137-9DF3F51BA10A}">
+      <p15:sldGuideLst xmlns:p15="http://schemas.microsoft.com/office/powerpoint/2012/main"/>
+    </p:ext>
+  </p:extLst>
 </p:presentation>
 </file>
 
@@ -3667,7 +3675,7 @@
           <a:p>
             <a:fld id="{90B520EB-4DD3-43FA-AF8C-5E5593FD7DA4}" type="slidenum">
               <a:rPr lang="sk-SK" smtClean="0"/>
-              <a:t>9</a:t>
+              <a:t>10</a:t>
             </a:fld>
             <a:endParaRPr lang="sk-SK"/>
           </a:p>
@@ -3795,7 +3803,7 @@
           <a:p>
             <a:fld id="{90B520EB-4DD3-43FA-AF8C-5E5593FD7DA4}" type="slidenum">
               <a:rPr lang="sk-SK" smtClean="0"/>
-              <a:t>10</a:t>
+              <a:t>11</a:t>
             </a:fld>
             <a:endParaRPr lang="sk-SK"/>
           </a:p>
@@ -3939,7 +3947,7 @@
           <a:p>
             <a:fld id="{90B520EB-4DD3-43FA-AF8C-5E5593FD7DA4}" type="slidenum">
               <a:rPr lang="sk-SK" smtClean="0"/>
-              <a:t>11</a:t>
+              <a:t>12</a:t>
             </a:fld>
             <a:endParaRPr lang="sk-SK"/>
           </a:p>
@@ -4111,7 +4119,7 @@
           <a:p>
             <a:fld id="{90B520EB-4DD3-43FA-AF8C-5E5593FD7DA4}" type="slidenum">
               <a:rPr lang="sk-SK" smtClean="0"/>
-              <a:t>12</a:t>
+              <a:t>13</a:t>
             </a:fld>
             <a:endParaRPr lang="sk-SK"/>
           </a:p>
@@ -7651,6 +7659,2957 @@
       </p:grpSpPr>
       <p:sp>
         <p:nvSpPr>
+          <p:cNvPr id="15" name="Rectangle 14">
+            <a:extLst>
+              <a:ext uri="{FF2B5EF4-FFF2-40B4-BE49-F238E27FC236}">
+                <a16:creationId xmlns:a16="http://schemas.microsoft.com/office/drawing/2014/main" id="{30B3D270-B19D-4DB8-BD3C-3E707485B515}"/>
+              </a:ext>
+              <a:ext uri="{C183D7F6-B498-43B3-948B-1728B52AA6E4}">
+                <adec:decorative xmlns:adec="http://schemas.microsoft.com/office/drawing/2017/decorative" val="1"/>
+              </a:ext>
+            </a:extLst>
+          </p:cNvPr>
+          <p:cNvSpPr>
+            <a:spLocks noGrp="1" noRot="1" noChangeAspect="1" noMove="1" noResize="1" noEditPoints="1" noAdjustHandles="1" noChangeArrowheads="1" noChangeShapeType="1" noTextEdit="1"/>
+          </p:cNvSpPr>
+          <p:nvPr>
+            <p:extLst>
+              <p:ext uri="{386F3935-93C4-4BCD-93E2-E3B085C9AB24}">
+                <p16:designElem xmlns:p16="http://schemas.microsoft.com/office/powerpoint/2015/main" val="1"/>
+              </p:ext>
+            </p:extLst>
+          </p:nvPr>
+        </p:nvSpPr>
+        <p:spPr>
+          <a:xfrm>
+            <a:off x="1" y="0"/>
+            <a:ext cx="4055416" cy="6858000"/>
+          </a:xfrm>
+          <a:prstGeom prst="rect">
+            <a:avLst/>
+          </a:prstGeom>
+          <a:solidFill>
+            <a:schemeClr val="accent1"/>
+          </a:solidFill>
+          <a:ln>
+            <a:noFill/>
+          </a:ln>
+        </p:spPr>
+        <p:style>
+          <a:lnRef idx="0">
+            <a:scrgbClr r="0" g="0" b="0"/>
+          </a:lnRef>
+          <a:fillRef idx="0">
+            <a:scrgbClr r="0" g="0" b="0"/>
+          </a:fillRef>
+          <a:effectRef idx="0">
+            <a:scrgbClr r="0" g="0" b="0"/>
+          </a:effectRef>
+          <a:fontRef idx="minor">
+            <a:schemeClr val="lt1"/>
+          </a:fontRef>
+        </p:style>
+        <p:txBody>
+          <a:bodyPr rtlCol="0" anchor="ctr"/>
+          <a:lstStyle/>
+          <a:p>
+            <a:pPr algn="ctr"/>
+            <a:endParaRPr lang="en-US"/>
+          </a:p>
+        </p:txBody>
+      </p:sp>
+      <p:sp>
+        <p:nvSpPr>
+          <p:cNvPr id="2" name="Nadpis 1">
+            <a:extLst>
+              <a:ext uri="{FF2B5EF4-FFF2-40B4-BE49-F238E27FC236}">
+                <a16:creationId xmlns:a16="http://schemas.microsoft.com/office/drawing/2014/main" id="{7C415DD9-6519-CFF2-BE3D-91D66C88A154}"/>
+              </a:ext>
+            </a:extLst>
+          </p:cNvPr>
+          <p:cNvSpPr>
+            <a:spLocks noGrp="1"/>
+          </p:cNvSpPr>
+          <p:nvPr>
+            <p:ph type="title"/>
+          </p:nvPr>
+        </p:nvSpPr>
+        <p:spPr>
+          <a:xfrm>
+            <a:off x="566058" y="836023"/>
+            <a:ext cx="2718788" cy="5183777"/>
+          </a:xfrm>
+        </p:spPr>
+        <p:txBody>
+          <a:bodyPr anchor="ctr">
+            <a:normAutofit/>
+          </a:bodyPr>
+          <a:lstStyle/>
+          <a:p>
+            <a:r>
+              <a:rPr lang="sk-SK" sz="3600" dirty="0">
+                <a:solidFill>
+                  <a:srgbClr val="FFFFFF"/>
+                </a:solidFill>
+                <a:latin typeface="Arial" panose="020B0604020202020204" pitchFamily="34" charset="0"/>
+                <a:cs typeface="Arial" panose="020B0604020202020204" pitchFamily="34" charset="0"/>
+              </a:rPr>
+              <a:t>Vplyv permutácie textu na pozičné slovné siete</a:t>
+            </a:r>
+          </a:p>
+        </p:txBody>
+      </p:sp>
+      <p:sp>
+        <p:nvSpPr>
+          <p:cNvPr id="17" name="Rectangle 16">
+            <a:extLst>
+              <a:ext uri="{FF2B5EF4-FFF2-40B4-BE49-F238E27FC236}">
+                <a16:creationId xmlns:a16="http://schemas.microsoft.com/office/drawing/2014/main" id="{49BDAF94-B52E-4307-B54C-EF413086FC77}"/>
+              </a:ext>
+              <a:ext uri="{C183D7F6-B498-43B3-948B-1728B52AA6E4}">
+                <adec:decorative xmlns:adec="http://schemas.microsoft.com/office/drawing/2017/decorative" val="1"/>
+              </a:ext>
+            </a:extLst>
+          </p:cNvPr>
+          <p:cNvSpPr>
+            <a:spLocks noGrp="1" noRot="1" noChangeAspect="1" noMove="1" noResize="1" noEditPoints="1" noAdjustHandles="1" noChangeArrowheads="1" noChangeShapeType="1" noTextEdit="1"/>
+          </p:cNvSpPr>
+          <p:nvPr>
+            <p:extLst>
+              <p:ext uri="{386F3935-93C4-4BCD-93E2-E3B085C9AB24}">
+                <p16:designElem xmlns:p16="http://schemas.microsoft.com/office/powerpoint/2015/main" val="1"/>
+              </p:ext>
+            </p:extLst>
+          </p:nvPr>
+        </p:nvSpPr>
+        <p:spPr>
+          <a:xfrm>
+            <a:off x="11292840" y="0"/>
+            <a:ext cx="914400" cy="6858000"/>
+          </a:xfrm>
+          <a:prstGeom prst="rect">
+            <a:avLst/>
+          </a:prstGeom>
+          <a:solidFill>
+            <a:schemeClr val="tx2">
+              <a:lumMod val="75000"/>
+            </a:schemeClr>
+          </a:solidFill>
+          <a:ln>
+            <a:noFill/>
+          </a:ln>
+        </p:spPr>
+        <p:style>
+          <a:lnRef idx="2">
+            <a:schemeClr val="accent1">
+              <a:shade val="50000"/>
+            </a:schemeClr>
+          </a:lnRef>
+          <a:fillRef idx="1">
+            <a:schemeClr val="accent1"/>
+          </a:fillRef>
+          <a:effectRef idx="0">
+            <a:schemeClr val="accent1"/>
+          </a:effectRef>
+          <a:fontRef idx="minor">
+            <a:schemeClr val="lt1"/>
+          </a:fontRef>
+        </p:style>
+        <p:txBody>
+          <a:bodyPr/>
+          <a:lstStyle/>
+          <a:p>
+            <a:endParaRPr lang="sk-SK"/>
+          </a:p>
+        </p:txBody>
+      </p:sp>
+      <p:graphicFrame>
+        <p:nvGraphicFramePr>
+          <p:cNvPr id="4" name="Zástupný objekt pre obsah 3">
+            <a:extLst>
+              <a:ext uri="{FF2B5EF4-FFF2-40B4-BE49-F238E27FC236}">
+                <a16:creationId xmlns:a16="http://schemas.microsoft.com/office/drawing/2014/main" id="{0A3A922A-B8F0-3FBF-5EA0-821A8637E616}"/>
+              </a:ext>
+            </a:extLst>
+          </p:cNvPr>
+          <p:cNvGraphicFramePr>
+            <a:graphicFrameLocks noGrp="1"/>
+          </p:cNvGraphicFramePr>
+          <p:nvPr>
+            <p:ph idx="1"/>
+            <p:extLst>
+              <p:ext uri="{D42A27DB-BD31-4B8C-83A1-F6EECF244321}">
+                <p14:modId xmlns:p14="http://schemas.microsoft.com/office/powerpoint/2010/main" val="4206292045"/>
+              </p:ext>
+            </p:extLst>
+          </p:nvPr>
+        </p:nvGraphicFramePr>
+        <p:xfrm>
+          <a:off x="4801440" y="804672"/>
+          <a:ext cx="5704887" cy="5262069"/>
+        </p:xfrm>
+        <a:graphic>
+          <a:graphicData uri="http://schemas.openxmlformats.org/drawingml/2006/table">
+            <a:tbl>
+              <a:tblPr/>
+              <a:tblGrid>
+                <a:gridCol w="2067292">
+                  <a:extLst>
+                    <a:ext uri="{9D8B030D-6E8A-4147-A177-3AD203B41FA5}">
+                      <a16:colId xmlns:a16="http://schemas.microsoft.com/office/drawing/2014/main" val="1522675971"/>
+                    </a:ext>
+                  </a:extLst>
+                </a:gridCol>
+                <a:gridCol w="948301">
+                  <a:extLst>
+                    <a:ext uri="{9D8B030D-6E8A-4147-A177-3AD203B41FA5}">
+                      <a16:colId xmlns:a16="http://schemas.microsoft.com/office/drawing/2014/main" val="1411456153"/>
+                    </a:ext>
+                  </a:extLst>
+                </a:gridCol>
+                <a:gridCol w="1490312">
+                  <a:extLst>
+                    <a:ext uri="{9D8B030D-6E8A-4147-A177-3AD203B41FA5}">
+                      <a16:colId xmlns:a16="http://schemas.microsoft.com/office/drawing/2014/main" val="3791115676"/>
+                    </a:ext>
+                  </a:extLst>
+                </a:gridCol>
+                <a:gridCol w="1198982">
+                  <a:extLst>
+                    <a:ext uri="{9D8B030D-6E8A-4147-A177-3AD203B41FA5}">
+                      <a16:colId xmlns:a16="http://schemas.microsoft.com/office/drawing/2014/main" val="3788277443"/>
+                    </a:ext>
+                  </a:extLst>
+                </a:gridCol>
+              </a:tblGrid>
+              <a:tr h="276951">
+                <a:tc>
+                  <a:txBody>
+                    <a:bodyPr/>
+                    <a:lstStyle/>
+                    <a:p>
+                      <a:pPr algn="l" fontAlgn="ctr">
+                        <a:buNone/>
+                      </a:pPr>
+                      <a:endParaRPr lang="sk-SK" sz="1200" b="0" i="0" u="none" strike="noStrike" dirty="0">
+                        <a:effectLst/>
+                        <a:latin typeface="Arial" panose="020B0604020202020204" pitchFamily="34" charset="0"/>
+                      </a:endParaRPr>
+                    </a:p>
+                  </a:txBody>
+                  <a:tcPr marL="62943" marR="62943" marT="31472" marB="31472" anchor="ctr">
+                    <a:lnL>
+                      <a:noFill/>
+                    </a:lnL>
+                    <a:lnR>
+                      <a:noFill/>
+                    </a:lnR>
+                    <a:lnT>
+                      <a:noFill/>
+                    </a:lnT>
+                    <a:lnB>
+                      <a:noFill/>
+                    </a:lnB>
+                    <a:noFill/>
+                  </a:tcPr>
+                </a:tc>
+                <a:tc>
+                  <a:txBody>
+                    <a:bodyPr/>
+                    <a:lstStyle/>
+                    <a:p>
+                      <a:pPr algn="r" fontAlgn="ctr">
+                        <a:buNone/>
+                      </a:pPr>
+                      <a:r>
+                        <a:rPr lang="sk-SK" sz="1200" b="0" i="0" u="none" strike="noStrike">
+                          <a:effectLst/>
+                          <a:latin typeface="Arial" panose="020B0604020202020204" pitchFamily="34" charset="0"/>
+                        </a:rPr>
+                        <a:t>No Shuffle</a:t>
+                      </a:r>
+                    </a:p>
+                  </a:txBody>
+                  <a:tcPr marL="62943" marR="62943" marT="31472" marB="31472" anchor="ctr">
+                    <a:lnL>
+                      <a:noFill/>
+                    </a:lnL>
+                    <a:lnR>
+                      <a:noFill/>
+                    </a:lnR>
+                    <a:lnT>
+                      <a:noFill/>
+                    </a:lnT>
+                    <a:lnB>
+                      <a:noFill/>
+                    </a:lnB>
+                    <a:noFill/>
+                  </a:tcPr>
+                </a:tc>
+                <a:tc>
+                  <a:txBody>
+                    <a:bodyPr/>
+                    <a:lstStyle/>
+                    <a:p>
+                      <a:pPr algn="r" fontAlgn="ctr">
+                        <a:buNone/>
+                      </a:pPr>
+                      <a:r>
+                        <a:rPr lang="sk-SK" sz="1200" b="0" i="0" u="none" strike="noStrike">
+                          <a:effectLst/>
+                          <a:latin typeface="Arial" panose="020B0604020202020204" pitchFamily="34" charset="0"/>
+                        </a:rPr>
+                        <a:t>Shuffle Sentences</a:t>
+                      </a:r>
+                    </a:p>
+                  </a:txBody>
+                  <a:tcPr marL="62943" marR="62943" marT="31472" marB="31472" anchor="ctr">
+                    <a:lnL>
+                      <a:noFill/>
+                    </a:lnL>
+                    <a:lnR>
+                      <a:noFill/>
+                    </a:lnR>
+                    <a:lnT>
+                      <a:noFill/>
+                    </a:lnT>
+                    <a:lnB>
+                      <a:noFill/>
+                    </a:lnB>
+                    <a:noFill/>
+                  </a:tcPr>
+                </a:tc>
+                <a:tc>
+                  <a:txBody>
+                    <a:bodyPr/>
+                    <a:lstStyle/>
+                    <a:p>
+                      <a:pPr algn="r" fontAlgn="ctr">
+                        <a:buNone/>
+                      </a:pPr>
+                      <a:r>
+                        <a:rPr lang="sk-SK" sz="1200" b="0" i="0" u="none" strike="noStrike">
+                          <a:effectLst/>
+                          <a:latin typeface="Arial" panose="020B0604020202020204" pitchFamily="34" charset="0"/>
+                        </a:rPr>
+                        <a:t>Shuffle Words</a:t>
+                      </a:r>
+                    </a:p>
+                  </a:txBody>
+                  <a:tcPr marL="62943" marR="62943" marT="31472" marB="31472" anchor="ctr">
+                    <a:lnL>
+                      <a:noFill/>
+                    </a:lnL>
+                    <a:lnR>
+                      <a:noFill/>
+                    </a:lnR>
+                    <a:lnT>
+                      <a:noFill/>
+                    </a:lnT>
+                    <a:lnB>
+                      <a:noFill/>
+                    </a:lnB>
+                    <a:noFill/>
+                  </a:tcPr>
+                </a:tc>
+                <a:extLst>
+                  <a:ext uri="{0D108BD9-81ED-4DB2-BD59-A6C34878D82A}">
+                    <a16:rowId xmlns:a16="http://schemas.microsoft.com/office/drawing/2014/main" val="2692878573"/>
+                  </a:ext>
+                </a:extLst>
+              </a:tr>
+              <a:tr h="276951">
+                <a:tc>
+                  <a:txBody>
+                    <a:bodyPr/>
+                    <a:lstStyle/>
+                    <a:p>
+                      <a:pPr algn="l" fontAlgn="ctr">
+                        <a:buNone/>
+                      </a:pPr>
+                      <a:r>
+                        <a:rPr lang="sk-SK" sz="1200" b="0" i="0" u="none" strike="noStrike">
+                          <a:effectLst/>
+                          <a:latin typeface="Arial" panose="020B0604020202020204" pitchFamily="34" charset="0"/>
+                        </a:rPr>
+                        <a:t>Number of nodes</a:t>
+                      </a:r>
+                    </a:p>
+                  </a:txBody>
+                  <a:tcPr marL="62943" marR="62943" marT="31472" marB="31472" anchor="ctr">
+                    <a:lnL>
+                      <a:noFill/>
+                    </a:lnL>
+                    <a:lnR>
+                      <a:noFill/>
+                    </a:lnR>
+                    <a:lnT>
+                      <a:noFill/>
+                    </a:lnT>
+                    <a:lnB>
+                      <a:noFill/>
+                    </a:lnB>
+                    <a:noFill/>
+                  </a:tcPr>
+                </a:tc>
+                <a:tc>
+                  <a:txBody>
+                    <a:bodyPr/>
+                    <a:lstStyle/>
+                    <a:p>
+                      <a:pPr algn="r" fontAlgn="ctr">
+                        <a:buNone/>
+                      </a:pPr>
+                      <a:r>
+                        <a:rPr lang="sk-SK" sz="1200" b="0" i="0" u="none" strike="noStrike">
+                          <a:effectLst/>
+                          <a:latin typeface="Arial" panose="020B0604020202020204" pitchFamily="34" charset="0"/>
+                        </a:rPr>
+                        <a:t>3230</a:t>
+                      </a:r>
+                    </a:p>
+                  </a:txBody>
+                  <a:tcPr marL="62943" marR="62943" marT="31472" marB="31472" anchor="ctr">
+                    <a:lnL>
+                      <a:noFill/>
+                    </a:lnL>
+                    <a:lnR>
+                      <a:noFill/>
+                    </a:lnR>
+                    <a:lnT>
+                      <a:noFill/>
+                    </a:lnT>
+                    <a:lnB>
+                      <a:noFill/>
+                    </a:lnB>
+                    <a:noFill/>
+                  </a:tcPr>
+                </a:tc>
+                <a:tc>
+                  <a:txBody>
+                    <a:bodyPr/>
+                    <a:lstStyle/>
+                    <a:p>
+                      <a:pPr algn="r" fontAlgn="ctr">
+                        <a:buNone/>
+                      </a:pPr>
+                      <a:r>
+                        <a:rPr lang="sk-SK" sz="1200" b="0" i="0" u="none" strike="noStrike">
+                          <a:effectLst/>
+                          <a:latin typeface="Arial" panose="020B0604020202020204" pitchFamily="34" charset="0"/>
+                        </a:rPr>
+                        <a:t>3230</a:t>
+                      </a:r>
+                    </a:p>
+                  </a:txBody>
+                  <a:tcPr marL="62943" marR="62943" marT="31472" marB="31472" anchor="ctr">
+                    <a:lnL>
+                      <a:noFill/>
+                    </a:lnL>
+                    <a:lnR>
+                      <a:noFill/>
+                    </a:lnR>
+                    <a:lnT>
+                      <a:noFill/>
+                    </a:lnT>
+                    <a:lnB>
+                      <a:noFill/>
+                    </a:lnB>
+                    <a:noFill/>
+                  </a:tcPr>
+                </a:tc>
+                <a:tc>
+                  <a:txBody>
+                    <a:bodyPr/>
+                    <a:lstStyle/>
+                    <a:p>
+                      <a:pPr algn="r" fontAlgn="ctr">
+                        <a:buNone/>
+                      </a:pPr>
+                      <a:r>
+                        <a:rPr lang="sk-SK" sz="1200" b="0" i="0" u="none" strike="noStrike">
+                          <a:effectLst/>
+                          <a:latin typeface="Arial" panose="020B0604020202020204" pitchFamily="34" charset="0"/>
+                        </a:rPr>
+                        <a:t>3230</a:t>
+                      </a:r>
+                    </a:p>
+                  </a:txBody>
+                  <a:tcPr marL="62943" marR="62943" marT="31472" marB="31472" anchor="ctr">
+                    <a:lnL>
+                      <a:noFill/>
+                    </a:lnL>
+                    <a:lnR>
+                      <a:noFill/>
+                    </a:lnR>
+                    <a:lnT>
+                      <a:noFill/>
+                    </a:lnT>
+                    <a:lnB>
+                      <a:noFill/>
+                    </a:lnB>
+                    <a:noFill/>
+                  </a:tcPr>
+                </a:tc>
+                <a:extLst>
+                  <a:ext uri="{0D108BD9-81ED-4DB2-BD59-A6C34878D82A}">
+                    <a16:rowId xmlns:a16="http://schemas.microsoft.com/office/drawing/2014/main" val="648364296"/>
+                  </a:ext>
+                </a:extLst>
+              </a:tr>
+              <a:tr h="276951">
+                <a:tc>
+                  <a:txBody>
+                    <a:bodyPr/>
+                    <a:lstStyle/>
+                    <a:p>
+                      <a:pPr algn="l" fontAlgn="ctr">
+                        <a:buNone/>
+                      </a:pPr>
+                      <a:r>
+                        <a:rPr lang="sk-SK" sz="1200" b="0" i="0" u="none" strike="noStrike">
+                          <a:effectLst/>
+                          <a:latin typeface="Arial" panose="020B0604020202020204" pitchFamily="34" charset="0"/>
+                        </a:rPr>
+                        <a:t>Number of edges</a:t>
+                      </a:r>
+                    </a:p>
+                  </a:txBody>
+                  <a:tcPr marL="62943" marR="62943" marT="31472" marB="31472" anchor="ctr">
+                    <a:lnL>
+                      <a:noFill/>
+                    </a:lnL>
+                    <a:lnR>
+                      <a:noFill/>
+                    </a:lnR>
+                    <a:lnT>
+                      <a:noFill/>
+                    </a:lnT>
+                    <a:lnB>
+                      <a:noFill/>
+                    </a:lnB>
+                    <a:noFill/>
+                  </a:tcPr>
+                </a:tc>
+                <a:tc>
+                  <a:txBody>
+                    <a:bodyPr/>
+                    <a:lstStyle/>
+                    <a:p>
+                      <a:pPr algn="r" fontAlgn="ctr">
+                        <a:buNone/>
+                      </a:pPr>
+                      <a:r>
+                        <a:rPr lang="sk-SK" sz="1200" b="0" i="0" u="none" strike="noStrike">
+                          <a:effectLst/>
+                          <a:latin typeface="Arial" panose="020B0604020202020204" pitchFamily="34" charset="0"/>
+                        </a:rPr>
+                        <a:t>13077</a:t>
+                      </a:r>
+                    </a:p>
+                  </a:txBody>
+                  <a:tcPr marL="62943" marR="62943" marT="31472" marB="31472" anchor="ctr">
+                    <a:lnL>
+                      <a:noFill/>
+                    </a:lnL>
+                    <a:lnR>
+                      <a:noFill/>
+                    </a:lnR>
+                    <a:lnT>
+                      <a:noFill/>
+                    </a:lnT>
+                    <a:lnB>
+                      <a:noFill/>
+                    </a:lnB>
+                    <a:noFill/>
+                  </a:tcPr>
+                </a:tc>
+                <a:tc>
+                  <a:txBody>
+                    <a:bodyPr/>
+                    <a:lstStyle/>
+                    <a:p>
+                      <a:pPr algn="r" fontAlgn="ctr">
+                        <a:buNone/>
+                      </a:pPr>
+                      <a:r>
+                        <a:rPr lang="sk-SK" sz="1200" b="0" i="0" u="none" strike="noStrike">
+                          <a:effectLst/>
+                          <a:latin typeface="Arial" panose="020B0604020202020204" pitchFamily="34" charset="0"/>
+                        </a:rPr>
+                        <a:t>13103</a:t>
+                      </a:r>
+                    </a:p>
+                  </a:txBody>
+                  <a:tcPr marL="62943" marR="62943" marT="31472" marB="31472" anchor="ctr">
+                    <a:lnL>
+                      <a:noFill/>
+                    </a:lnL>
+                    <a:lnR>
+                      <a:noFill/>
+                    </a:lnR>
+                    <a:lnT>
+                      <a:noFill/>
+                    </a:lnT>
+                    <a:lnB>
+                      <a:noFill/>
+                    </a:lnB>
+                    <a:noFill/>
+                  </a:tcPr>
+                </a:tc>
+                <a:tc>
+                  <a:txBody>
+                    <a:bodyPr/>
+                    <a:lstStyle/>
+                    <a:p>
+                      <a:pPr algn="r" fontAlgn="ctr">
+                        <a:buNone/>
+                      </a:pPr>
+                      <a:r>
+                        <a:rPr lang="sk-SK" sz="1200" b="0" i="0" u="none" strike="noStrike">
+                          <a:effectLst/>
+                          <a:latin typeface="Arial" panose="020B0604020202020204" pitchFamily="34" charset="0"/>
+                        </a:rPr>
+                        <a:t>14736</a:t>
+                      </a:r>
+                    </a:p>
+                  </a:txBody>
+                  <a:tcPr marL="62943" marR="62943" marT="31472" marB="31472" anchor="ctr">
+                    <a:lnL>
+                      <a:noFill/>
+                    </a:lnL>
+                    <a:lnR>
+                      <a:noFill/>
+                    </a:lnR>
+                    <a:lnT>
+                      <a:noFill/>
+                    </a:lnT>
+                    <a:lnB>
+                      <a:noFill/>
+                    </a:lnB>
+                    <a:noFill/>
+                  </a:tcPr>
+                </a:tc>
+                <a:extLst>
+                  <a:ext uri="{0D108BD9-81ED-4DB2-BD59-A6C34878D82A}">
+                    <a16:rowId xmlns:a16="http://schemas.microsoft.com/office/drawing/2014/main" val="3863805167"/>
+                  </a:ext>
+                </a:extLst>
+              </a:tr>
+              <a:tr h="276951">
+                <a:tc>
+                  <a:txBody>
+                    <a:bodyPr/>
+                    <a:lstStyle/>
+                    <a:p>
+                      <a:pPr algn="l" fontAlgn="ctr">
+                        <a:buNone/>
+                      </a:pPr>
+                      <a:r>
+                        <a:rPr lang="sk-SK" sz="1200" b="0" i="0" u="none" strike="noStrike">
+                          <a:effectLst/>
+                          <a:latin typeface="Arial" panose="020B0604020202020204" pitchFamily="34" charset="0"/>
+                        </a:rPr>
+                        <a:t>Max degree</a:t>
+                      </a:r>
+                    </a:p>
+                  </a:txBody>
+                  <a:tcPr marL="62943" marR="62943" marT="31472" marB="31472" anchor="ctr">
+                    <a:lnL>
+                      <a:noFill/>
+                    </a:lnL>
+                    <a:lnR>
+                      <a:noFill/>
+                    </a:lnR>
+                    <a:lnT>
+                      <a:noFill/>
+                    </a:lnT>
+                    <a:lnB>
+                      <a:noFill/>
+                    </a:lnB>
+                    <a:noFill/>
+                  </a:tcPr>
+                </a:tc>
+                <a:tc>
+                  <a:txBody>
+                    <a:bodyPr/>
+                    <a:lstStyle/>
+                    <a:p>
+                      <a:pPr algn="r" fontAlgn="ctr">
+                        <a:buNone/>
+                      </a:pPr>
+                      <a:r>
+                        <a:rPr lang="sk-SK" sz="1200" b="0" i="0" u="none" strike="noStrike">
+                          <a:effectLst/>
+                          <a:latin typeface="Arial" panose="020B0604020202020204" pitchFamily="34" charset="0"/>
+                        </a:rPr>
+                        <a:t>845</a:t>
+                      </a:r>
+                    </a:p>
+                  </a:txBody>
+                  <a:tcPr marL="62943" marR="62943" marT="31472" marB="31472" anchor="ctr">
+                    <a:lnL>
+                      <a:noFill/>
+                    </a:lnL>
+                    <a:lnR>
+                      <a:noFill/>
+                    </a:lnR>
+                    <a:lnT>
+                      <a:noFill/>
+                    </a:lnT>
+                    <a:lnB>
+                      <a:noFill/>
+                    </a:lnB>
+                    <a:noFill/>
+                  </a:tcPr>
+                </a:tc>
+                <a:tc>
+                  <a:txBody>
+                    <a:bodyPr/>
+                    <a:lstStyle/>
+                    <a:p>
+                      <a:pPr algn="r" fontAlgn="ctr">
+                        <a:buNone/>
+                      </a:pPr>
+                      <a:r>
+                        <a:rPr lang="sk-SK" sz="1200" b="0" i="0" u="none" strike="noStrike">
+                          <a:effectLst/>
+                          <a:latin typeface="Arial" panose="020B0604020202020204" pitchFamily="34" charset="0"/>
+                        </a:rPr>
+                        <a:t>848</a:t>
+                      </a:r>
+                    </a:p>
+                  </a:txBody>
+                  <a:tcPr marL="62943" marR="62943" marT="31472" marB="31472" anchor="ctr">
+                    <a:lnL>
+                      <a:noFill/>
+                    </a:lnL>
+                    <a:lnR>
+                      <a:noFill/>
+                    </a:lnR>
+                    <a:lnT>
+                      <a:noFill/>
+                    </a:lnT>
+                    <a:lnB>
+                      <a:noFill/>
+                    </a:lnB>
+                    <a:noFill/>
+                  </a:tcPr>
+                </a:tc>
+                <a:tc>
+                  <a:txBody>
+                    <a:bodyPr/>
+                    <a:lstStyle/>
+                    <a:p>
+                      <a:pPr algn="r" fontAlgn="ctr">
+                        <a:buNone/>
+                      </a:pPr>
+                      <a:r>
+                        <a:rPr lang="sk-SK" sz="1200" b="0" i="0" u="none" strike="noStrike">
+                          <a:effectLst/>
+                          <a:latin typeface="Arial" panose="020B0604020202020204" pitchFamily="34" charset="0"/>
+                        </a:rPr>
+                        <a:t>802</a:t>
+                      </a:r>
+                    </a:p>
+                  </a:txBody>
+                  <a:tcPr marL="62943" marR="62943" marT="31472" marB="31472" anchor="ctr">
+                    <a:lnL>
+                      <a:noFill/>
+                    </a:lnL>
+                    <a:lnR>
+                      <a:noFill/>
+                    </a:lnR>
+                    <a:lnT>
+                      <a:noFill/>
+                    </a:lnT>
+                    <a:lnB>
+                      <a:noFill/>
+                    </a:lnB>
+                    <a:noFill/>
+                  </a:tcPr>
+                </a:tc>
+                <a:extLst>
+                  <a:ext uri="{0D108BD9-81ED-4DB2-BD59-A6C34878D82A}">
+                    <a16:rowId xmlns:a16="http://schemas.microsoft.com/office/drawing/2014/main" val="1676405822"/>
+                  </a:ext>
+                </a:extLst>
+              </a:tr>
+              <a:tr h="276951">
+                <a:tc>
+                  <a:txBody>
+                    <a:bodyPr/>
+                    <a:lstStyle/>
+                    <a:p>
+                      <a:pPr algn="l" fontAlgn="ctr">
+                        <a:buNone/>
+                      </a:pPr>
+                      <a:r>
+                        <a:rPr lang="sk-SK" sz="1200" b="0" i="0" u="none" strike="noStrike">
+                          <a:effectLst/>
+                          <a:latin typeface="Arial" panose="020B0604020202020204" pitchFamily="34" charset="0"/>
+                        </a:rPr>
+                        <a:t>Average degree</a:t>
+                      </a:r>
+                    </a:p>
+                  </a:txBody>
+                  <a:tcPr marL="62943" marR="62943" marT="31472" marB="31472" anchor="ctr">
+                    <a:lnL>
+                      <a:noFill/>
+                    </a:lnL>
+                    <a:lnR>
+                      <a:noFill/>
+                    </a:lnR>
+                    <a:lnT>
+                      <a:noFill/>
+                    </a:lnT>
+                    <a:lnB>
+                      <a:noFill/>
+                    </a:lnB>
+                    <a:noFill/>
+                  </a:tcPr>
+                </a:tc>
+                <a:tc>
+                  <a:txBody>
+                    <a:bodyPr/>
+                    <a:lstStyle/>
+                    <a:p>
+                      <a:pPr algn="r" fontAlgn="ctr">
+                        <a:buNone/>
+                      </a:pPr>
+                      <a:r>
+                        <a:rPr lang="sk-SK" sz="1200" b="0" i="0" u="none" strike="noStrike">
+                          <a:effectLst/>
+                          <a:latin typeface="Arial" panose="020B0604020202020204" pitchFamily="34" charset="0"/>
+                        </a:rPr>
+                        <a:t>8.09721</a:t>
+                      </a:r>
+                    </a:p>
+                  </a:txBody>
+                  <a:tcPr marL="62943" marR="62943" marT="31472" marB="31472" anchor="ctr">
+                    <a:lnL>
+                      <a:noFill/>
+                    </a:lnL>
+                    <a:lnR>
+                      <a:noFill/>
+                    </a:lnR>
+                    <a:lnT>
+                      <a:noFill/>
+                    </a:lnT>
+                    <a:lnB>
+                      <a:noFill/>
+                    </a:lnB>
+                    <a:noFill/>
+                  </a:tcPr>
+                </a:tc>
+                <a:tc>
+                  <a:txBody>
+                    <a:bodyPr/>
+                    <a:lstStyle/>
+                    <a:p>
+                      <a:pPr algn="r" fontAlgn="ctr">
+                        <a:buNone/>
+                      </a:pPr>
+                      <a:r>
+                        <a:rPr lang="sk-SK" sz="1200" b="0" i="0" u="none" strike="noStrike">
+                          <a:effectLst/>
+                          <a:latin typeface="Arial" panose="020B0604020202020204" pitchFamily="34" charset="0"/>
+                        </a:rPr>
+                        <a:t>8.11331</a:t>
+                      </a:r>
+                    </a:p>
+                  </a:txBody>
+                  <a:tcPr marL="62943" marR="62943" marT="31472" marB="31472" anchor="ctr">
+                    <a:lnL>
+                      <a:noFill/>
+                    </a:lnL>
+                    <a:lnR>
+                      <a:noFill/>
+                    </a:lnR>
+                    <a:lnT>
+                      <a:noFill/>
+                    </a:lnT>
+                    <a:lnB>
+                      <a:noFill/>
+                    </a:lnB>
+                    <a:noFill/>
+                  </a:tcPr>
+                </a:tc>
+                <a:tc>
+                  <a:txBody>
+                    <a:bodyPr/>
+                    <a:lstStyle/>
+                    <a:p>
+                      <a:pPr algn="r" fontAlgn="ctr">
+                        <a:buNone/>
+                      </a:pPr>
+                      <a:r>
+                        <a:rPr lang="sk-SK" sz="1200" b="0" i="0" u="none" strike="noStrike">
+                          <a:effectLst/>
+                          <a:latin typeface="Arial" panose="020B0604020202020204" pitchFamily="34" charset="0"/>
+                        </a:rPr>
+                        <a:t>9.12446</a:t>
+                      </a:r>
+                    </a:p>
+                  </a:txBody>
+                  <a:tcPr marL="62943" marR="62943" marT="31472" marB="31472" anchor="ctr">
+                    <a:lnL>
+                      <a:noFill/>
+                    </a:lnL>
+                    <a:lnR>
+                      <a:noFill/>
+                    </a:lnR>
+                    <a:lnT>
+                      <a:noFill/>
+                    </a:lnT>
+                    <a:lnB>
+                      <a:noFill/>
+                    </a:lnB>
+                    <a:noFill/>
+                  </a:tcPr>
+                </a:tc>
+                <a:extLst>
+                  <a:ext uri="{0D108BD9-81ED-4DB2-BD59-A6C34878D82A}">
+                    <a16:rowId xmlns:a16="http://schemas.microsoft.com/office/drawing/2014/main" val="1446945445"/>
+                  </a:ext>
+                </a:extLst>
+              </a:tr>
+              <a:tr h="276951">
+                <a:tc>
+                  <a:txBody>
+                    <a:bodyPr/>
+                    <a:lstStyle/>
+                    <a:p>
+                      <a:pPr algn="l" fontAlgn="ctr">
+                        <a:buNone/>
+                      </a:pPr>
+                      <a:r>
+                        <a:rPr lang="sk-SK" sz="1200" b="0" i="0" u="none" strike="noStrike">
+                          <a:effectLst/>
+                          <a:latin typeface="Arial" panose="020B0604020202020204" pitchFamily="34" charset="0"/>
+                        </a:rPr>
+                        <a:t>Network density</a:t>
+                      </a:r>
+                    </a:p>
+                  </a:txBody>
+                  <a:tcPr marL="62943" marR="62943" marT="31472" marB="31472" anchor="ctr">
+                    <a:lnL>
+                      <a:noFill/>
+                    </a:lnL>
+                    <a:lnR>
+                      <a:noFill/>
+                    </a:lnR>
+                    <a:lnT>
+                      <a:noFill/>
+                    </a:lnT>
+                    <a:lnB>
+                      <a:noFill/>
+                    </a:lnB>
+                    <a:noFill/>
+                  </a:tcPr>
+                </a:tc>
+                <a:tc>
+                  <a:txBody>
+                    <a:bodyPr/>
+                    <a:lstStyle/>
+                    <a:p>
+                      <a:pPr algn="r" fontAlgn="ctr">
+                        <a:buNone/>
+                      </a:pPr>
+                      <a:r>
+                        <a:rPr lang="sk-SK" sz="1200" b="0" i="0" u="none" strike="noStrike">
+                          <a:effectLst/>
+                          <a:latin typeface="Arial" panose="020B0604020202020204" pitchFamily="34" charset="0"/>
+                        </a:rPr>
+                        <a:t>0.00251</a:t>
+                      </a:r>
+                    </a:p>
+                  </a:txBody>
+                  <a:tcPr marL="62943" marR="62943" marT="31472" marB="31472" anchor="ctr">
+                    <a:lnL>
+                      <a:noFill/>
+                    </a:lnL>
+                    <a:lnR>
+                      <a:noFill/>
+                    </a:lnR>
+                    <a:lnT>
+                      <a:noFill/>
+                    </a:lnT>
+                    <a:lnB>
+                      <a:noFill/>
+                    </a:lnB>
+                    <a:noFill/>
+                  </a:tcPr>
+                </a:tc>
+                <a:tc>
+                  <a:txBody>
+                    <a:bodyPr/>
+                    <a:lstStyle/>
+                    <a:p>
+                      <a:pPr algn="r" fontAlgn="ctr">
+                        <a:buNone/>
+                      </a:pPr>
+                      <a:r>
+                        <a:rPr lang="sk-SK" sz="1200" b="0" i="0" u="none" strike="noStrike">
+                          <a:effectLst/>
+                          <a:latin typeface="Arial" panose="020B0604020202020204" pitchFamily="34" charset="0"/>
+                        </a:rPr>
+                        <a:t>0.00251</a:t>
+                      </a:r>
+                    </a:p>
+                  </a:txBody>
+                  <a:tcPr marL="62943" marR="62943" marT="31472" marB="31472" anchor="ctr">
+                    <a:lnL>
+                      <a:noFill/>
+                    </a:lnL>
+                    <a:lnR>
+                      <a:noFill/>
+                    </a:lnR>
+                    <a:lnT>
+                      <a:noFill/>
+                    </a:lnT>
+                    <a:lnB>
+                      <a:noFill/>
+                    </a:lnB>
+                    <a:noFill/>
+                  </a:tcPr>
+                </a:tc>
+                <a:tc>
+                  <a:txBody>
+                    <a:bodyPr/>
+                    <a:lstStyle/>
+                    <a:p>
+                      <a:pPr algn="r" fontAlgn="ctr">
+                        <a:buNone/>
+                      </a:pPr>
+                      <a:r>
+                        <a:rPr lang="sk-SK" sz="1200" b="0" i="0" u="none" strike="noStrike">
+                          <a:effectLst/>
+                          <a:latin typeface="Arial" panose="020B0604020202020204" pitchFamily="34" charset="0"/>
+                        </a:rPr>
+                        <a:t>0.00283</a:t>
+                      </a:r>
+                    </a:p>
+                  </a:txBody>
+                  <a:tcPr marL="62943" marR="62943" marT="31472" marB="31472" anchor="ctr">
+                    <a:lnL>
+                      <a:noFill/>
+                    </a:lnL>
+                    <a:lnR>
+                      <a:noFill/>
+                    </a:lnR>
+                    <a:lnT>
+                      <a:noFill/>
+                    </a:lnT>
+                    <a:lnB>
+                      <a:noFill/>
+                    </a:lnB>
+                    <a:noFill/>
+                  </a:tcPr>
+                </a:tc>
+                <a:extLst>
+                  <a:ext uri="{0D108BD9-81ED-4DB2-BD59-A6C34878D82A}">
+                    <a16:rowId xmlns:a16="http://schemas.microsoft.com/office/drawing/2014/main" val="3762362253"/>
+                  </a:ext>
+                </a:extLst>
+              </a:tr>
+              <a:tr h="276951">
+                <a:tc>
+                  <a:txBody>
+                    <a:bodyPr/>
+                    <a:lstStyle/>
+                    <a:p>
+                      <a:pPr algn="l" fontAlgn="ctr">
+                        <a:buNone/>
+                      </a:pPr>
+                      <a:r>
+                        <a:rPr lang="sk-SK" sz="1200" b="0" i="0" u="none" strike="noStrike">
+                          <a:effectLst/>
+                          <a:latin typeface="Arial" panose="020B0604020202020204" pitchFamily="34" charset="0"/>
+                        </a:rPr>
+                        <a:t>Clustering coefficient</a:t>
+                      </a:r>
+                    </a:p>
+                  </a:txBody>
+                  <a:tcPr marL="62943" marR="62943" marT="31472" marB="31472" anchor="ctr">
+                    <a:lnL>
+                      <a:noFill/>
+                    </a:lnL>
+                    <a:lnR>
+                      <a:noFill/>
+                    </a:lnR>
+                    <a:lnT>
+                      <a:noFill/>
+                    </a:lnT>
+                    <a:lnB>
+                      <a:noFill/>
+                    </a:lnB>
+                    <a:noFill/>
+                  </a:tcPr>
+                </a:tc>
+                <a:tc>
+                  <a:txBody>
+                    <a:bodyPr/>
+                    <a:lstStyle/>
+                    <a:p>
+                      <a:pPr algn="r" fontAlgn="ctr">
+                        <a:buNone/>
+                      </a:pPr>
+                      <a:r>
+                        <a:rPr lang="sk-SK" sz="1200" b="0" i="0" u="none" strike="noStrike">
+                          <a:effectLst/>
+                          <a:latin typeface="Arial" panose="020B0604020202020204" pitchFamily="34" charset="0"/>
+                        </a:rPr>
+                        <a:t>0.40852</a:t>
+                      </a:r>
+                    </a:p>
+                  </a:txBody>
+                  <a:tcPr marL="62943" marR="62943" marT="31472" marB="31472" anchor="ctr">
+                    <a:lnL>
+                      <a:noFill/>
+                    </a:lnL>
+                    <a:lnR>
+                      <a:noFill/>
+                    </a:lnR>
+                    <a:lnT>
+                      <a:noFill/>
+                    </a:lnT>
+                    <a:lnB>
+                      <a:noFill/>
+                    </a:lnB>
+                    <a:noFill/>
+                  </a:tcPr>
+                </a:tc>
+                <a:tc>
+                  <a:txBody>
+                    <a:bodyPr/>
+                    <a:lstStyle/>
+                    <a:p>
+                      <a:pPr algn="r" fontAlgn="ctr">
+                        <a:buNone/>
+                      </a:pPr>
+                      <a:r>
+                        <a:rPr lang="sk-SK" sz="1200" b="0" i="0" u="none" strike="noStrike">
+                          <a:effectLst/>
+                          <a:latin typeface="Arial" panose="020B0604020202020204" pitchFamily="34" charset="0"/>
+                        </a:rPr>
+                        <a:t>0.40772</a:t>
+                      </a:r>
+                    </a:p>
+                  </a:txBody>
+                  <a:tcPr marL="62943" marR="62943" marT="31472" marB="31472" anchor="ctr">
+                    <a:lnL>
+                      <a:noFill/>
+                    </a:lnL>
+                    <a:lnR>
+                      <a:noFill/>
+                    </a:lnR>
+                    <a:lnT>
+                      <a:noFill/>
+                    </a:lnT>
+                    <a:lnB>
+                      <a:noFill/>
+                    </a:lnB>
+                    <a:noFill/>
+                  </a:tcPr>
+                </a:tc>
+                <a:tc>
+                  <a:txBody>
+                    <a:bodyPr/>
+                    <a:lstStyle/>
+                    <a:p>
+                      <a:pPr algn="r" fontAlgn="ctr">
+                        <a:buNone/>
+                      </a:pPr>
+                      <a:r>
+                        <a:rPr lang="sk-SK" sz="1200" b="0" i="0" u="none" strike="noStrike">
+                          <a:effectLst/>
+                          <a:latin typeface="Arial" panose="020B0604020202020204" pitchFamily="34" charset="0"/>
+                        </a:rPr>
+                        <a:t>0.39859</a:t>
+                      </a:r>
+                    </a:p>
+                  </a:txBody>
+                  <a:tcPr marL="62943" marR="62943" marT="31472" marB="31472" anchor="ctr">
+                    <a:lnL>
+                      <a:noFill/>
+                    </a:lnL>
+                    <a:lnR>
+                      <a:noFill/>
+                    </a:lnR>
+                    <a:lnT>
+                      <a:noFill/>
+                    </a:lnT>
+                    <a:lnB>
+                      <a:noFill/>
+                    </a:lnB>
+                    <a:noFill/>
+                  </a:tcPr>
+                </a:tc>
+                <a:extLst>
+                  <a:ext uri="{0D108BD9-81ED-4DB2-BD59-A6C34878D82A}">
+                    <a16:rowId xmlns:a16="http://schemas.microsoft.com/office/drawing/2014/main" val="82755411"/>
+                  </a:ext>
+                </a:extLst>
+              </a:tr>
+              <a:tr h="276951">
+                <a:tc>
+                  <a:txBody>
+                    <a:bodyPr/>
+                    <a:lstStyle/>
+                    <a:p>
+                      <a:pPr algn="l" fontAlgn="ctr">
+                        <a:buNone/>
+                      </a:pPr>
+                      <a:r>
+                        <a:rPr lang="sk-SK" sz="1200" b="0" i="0" u="none" strike="noStrike" dirty="0" err="1">
+                          <a:effectLst/>
+                          <a:latin typeface="Arial" panose="020B0604020202020204" pitchFamily="34" charset="0"/>
+                        </a:rPr>
+                        <a:t>Avg</a:t>
+                      </a:r>
+                      <a:r>
+                        <a:rPr lang="sk-SK" sz="1200" b="0" i="0" u="none" strike="noStrike" dirty="0">
+                          <a:effectLst/>
+                          <a:latin typeface="Arial" panose="020B0604020202020204" pitchFamily="34" charset="0"/>
+                        </a:rPr>
+                        <a:t> </a:t>
+                      </a:r>
+                      <a:r>
+                        <a:rPr lang="sk-SK" sz="1200" b="0" i="0" u="none" strike="noStrike" dirty="0" err="1">
+                          <a:effectLst/>
+                          <a:latin typeface="Arial" panose="020B0604020202020204" pitchFamily="34" charset="0"/>
+                        </a:rPr>
+                        <a:t>shortest</a:t>
+                      </a:r>
+                      <a:r>
+                        <a:rPr lang="sk-SK" sz="1200" b="0" i="0" u="none" strike="noStrike" dirty="0">
+                          <a:effectLst/>
+                          <a:latin typeface="Arial" panose="020B0604020202020204" pitchFamily="34" charset="0"/>
+                        </a:rPr>
+                        <a:t> </a:t>
+                      </a:r>
+                      <a:r>
+                        <a:rPr lang="sk-SK" sz="1200" b="0" i="0" u="none" strike="noStrike" dirty="0" err="1">
+                          <a:effectLst/>
+                          <a:latin typeface="Arial" panose="020B0604020202020204" pitchFamily="34" charset="0"/>
+                        </a:rPr>
+                        <a:t>path</a:t>
+                      </a:r>
+                      <a:r>
+                        <a:rPr lang="sk-SK" sz="1200" b="0" i="0" u="none" strike="noStrike" dirty="0">
+                          <a:effectLst/>
+                          <a:latin typeface="Arial" panose="020B0604020202020204" pitchFamily="34" charset="0"/>
+                        </a:rPr>
+                        <a:t> </a:t>
+                      </a:r>
+                      <a:r>
+                        <a:rPr lang="sk-SK" sz="1200" b="0" i="0" u="none" strike="noStrike" dirty="0" err="1">
+                          <a:effectLst/>
+                          <a:latin typeface="Arial" panose="020B0604020202020204" pitchFamily="34" charset="0"/>
+                        </a:rPr>
+                        <a:t>length</a:t>
+                      </a:r>
+                      <a:endParaRPr lang="sk-SK" sz="1200" b="0" i="0" u="none" strike="noStrike" dirty="0">
+                        <a:effectLst/>
+                        <a:latin typeface="Arial" panose="020B0604020202020204" pitchFamily="34" charset="0"/>
+                      </a:endParaRPr>
+                    </a:p>
+                  </a:txBody>
+                  <a:tcPr marL="62943" marR="62943" marT="31472" marB="31472" anchor="ctr">
+                    <a:lnL>
+                      <a:noFill/>
+                    </a:lnL>
+                    <a:lnR>
+                      <a:noFill/>
+                    </a:lnR>
+                    <a:lnT>
+                      <a:noFill/>
+                    </a:lnT>
+                    <a:lnB>
+                      <a:noFill/>
+                    </a:lnB>
+                    <a:noFill/>
+                  </a:tcPr>
+                </a:tc>
+                <a:tc>
+                  <a:txBody>
+                    <a:bodyPr/>
+                    <a:lstStyle/>
+                    <a:p>
+                      <a:pPr algn="r" fontAlgn="ctr">
+                        <a:buNone/>
+                      </a:pPr>
+                      <a:r>
+                        <a:rPr lang="sk-SK" sz="1200" b="0" i="0" u="none" strike="noStrike">
+                          <a:effectLst/>
+                          <a:latin typeface="Arial" panose="020B0604020202020204" pitchFamily="34" charset="0"/>
+                        </a:rPr>
+                        <a:t>2.82903</a:t>
+                      </a:r>
+                    </a:p>
+                  </a:txBody>
+                  <a:tcPr marL="62943" marR="62943" marT="31472" marB="31472" anchor="ctr">
+                    <a:lnL>
+                      <a:noFill/>
+                    </a:lnL>
+                    <a:lnR>
+                      <a:noFill/>
+                    </a:lnR>
+                    <a:lnT>
+                      <a:noFill/>
+                    </a:lnT>
+                    <a:lnB>
+                      <a:noFill/>
+                    </a:lnB>
+                    <a:noFill/>
+                  </a:tcPr>
+                </a:tc>
+                <a:tc>
+                  <a:txBody>
+                    <a:bodyPr/>
+                    <a:lstStyle/>
+                    <a:p>
+                      <a:pPr algn="r" fontAlgn="ctr">
+                        <a:buNone/>
+                      </a:pPr>
+                      <a:r>
+                        <a:rPr lang="sk-SK" sz="1200" b="0" i="0" u="none" strike="noStrike">
+                          <a:effectLst/>
+                          <a:latin typeface="Arial" panose="020B0604020202020204" pitchFamily="34" charset="0"/>
+                        </a:rPr>
+                        <a:t>2.82374</a:t>
+                      </a:r>
+                    </a:p>
+                  </a:txBody>
+                  <a:tcPr marL="62943" marR="62943" marT="31472" marB="31472" anchor="ctr">
+                    <a:lnL>
+                      <a:noFill/>
+                    </a:lnL>
+                    <a:lnR>
+                      <a:noFill/>
+                    </a:lnR>
+                    <a:lnT>
+                      <a:noFill/>
+                    </a:lnT>
+                    <a:lnB>
+                      <a:noFill/>
+                    </a:lnB>
+                    <a:noFill/>
+                  </a:tcPr>
+                </a:tc>
+                <a:tc>
+                  <a:txBody>
+                    <a:bodyPr/>
+                    <a:lstStyle/>
+                    <a:p>
+                      <a:pPr algn="r" fontAlgn="ctr">
+                        <a:buNone/>
+                      </a:pPr>
+                      <a:r>
+                        <a:rPr lang="sk-SK" sz="1200" b="0" i="0" u="none" strike="noStrike">
+                          <a:effectLst/>
+                          <a:latin typeface="Arial" panose="020B0604020202020204" pitchFamily="34" charset="0"/>
+                        </a:rPr>
+                        <a:t>2.88044</a:t>
+                      </a:r>
+                    </a:p>
+                  </a:txBody>
+                  <a:tcPr marL="62943" marR="62943" marT="31472" marB="31472" anchor="ctr">
+                    <a:lnL>
+                      <a:noFill/>
+                    </a:lnL>
+                    <a:lnR>
+                      <a:noFill/>
+                    </a:lnR>
+                    <a:lnT>
+                      <a:noFill/>
+                    </a:lnT>
+                    <a:lnB>
+                      <a:noFill/>
+                    </a:lnB>
+                    <a:noFill/>
+                  </a:tcPr>
+                </a:tc>
+                <a:extLst>
+                  <a:ext uri="{0D108BD9-81ED-4DB2-BD59-A6C34878D82A}">
+                    <a16:rowId xmlns:a16="http://schemas.microsoft.com/office/drawing/2014/main" val="3080671462"/>
+                  </a:ext>
+                </a:extLst>
+              </a:tr>
+              <a:tr h="276951">
+                <a:tc>
+                  <a:txBody>
+                    <a:bodyPr/>
+                    <a:lstStyle/>
+                    <a:p>
+                      <a:pPr algn="l" fontAlgn="ctr">
+                        <a:buNone/>
+                      </a:pPr>
+                      <a:r>
+                        <a:rPr lang="sk-SK" sz="1200" b="0" i="0" u="none" strike="noStrike">
+                          <a:effectLst/>
+                          <a:latin typeface="Arial" panose="020B0604020202020204" pitchFamily="34" charset="0"/>
+                        </a:rPr>
+                        <a:t>Diameter</a:t>
+                      </a:r>
+                    </a:p>
+                  </a:txBody>
+                  <a:tcPr marL="62943" marR="62943" marT="31472" marB="31472" anchor="ctr">
+                    <a:lnL>
+                      <a:noFill/>
+                    </a:lnL>
+                    <a:lnR>
+                      <a:noFill/>
+                    </a:lnR>
+                    <a:lnT>
+                      <a:noFill/>
+                    </a:lnT>
+                    <a:lnB>
+                      <a:noFill/>
+                    </a:lnB>
+                    <a:noFill/>
+                  </a:tcPr>
+                </a:tc>
+                <a:tc>
+                  <a:txBody>
+                    <a:bodyPr/>
+                    <a:lstStyle/>
+                    <a:p>
+                      <a:pPr algn="r" fontAlgn="ctr">
+                        <a:buNone/>
+                      </a:pPr>
+                      <a:r>
+                        <a:rPr lang="sk-SK" sz="1200" b="0" i="0" u="none" strike="noStrike">
+                          <a:effectLst/>
+                          <a:latin typeface="Arial" panose="020B0604020202020204" pitchFamily="34" charset="0"/>
+                        </a:rPr>
+                        <a:t>6</a:t>
+                      </a:r>
+                    </a:p>
+                  </a:txBody>
+                  <a:tcPr marL="62943" marR="62943" marT="31472" marB="31472" anchor="ctr">
+                    <a:lnL>
+                      <a:noFill/>
+                    </a:lnL>
+                    <a:lnR>
+                      <a:noFill/>
+                    </a:lnR>
+                    <a:lnT>
+                      <a:noFill/>
+                    </a:lnT>
+                    <a:lnB>
+                      <a:noFill/>
+                    </a:lnB>
+                    <a:noFill/>
+                  </a:tcPr>
+                </a:tc>
+                <a:tc>
+                  <a:txBody>
+                    <a:bodyPr/>
+                    <a:lstStyle/>
+                    <a:p>
+                      <a:pPr algn="r" fontAlgn="ctr">
+                        <a:buNone/>
+                      </a:pPr>
+                      <a:r>
+                        <a:rPr lang="sk-SK" sz="1200" b="0" i="0" u="none" strike="noStrike">
+                          <a:effectLst/>
+                          <a:latin typeface="Arial" panose="020B0604020202020204" pitchFamily="34" charset="0"/>
+                        </a:rPr>
+                        <a:t>6</a:t>
+                      </a:r>
+                    </a:p>
+                  </a:txBody>
+                  <a:tcPr marL="62943" marR="62943" marT="31472" marB="31472" anchor="ctr">
+                    <a:lnL>
+                      <a:noFill/>
+                    </a:lnL>
+                    <a:lnR>
+                      <a:noFill/>
+                    </a:lnR>
+                    <a:lnT>
+                      <a:noFill/>
+                    </a:lnT>
+                    <a:lnB>
+                      <a:noFill/>
+                    </a:lnB>
+                    <a:noFill/>
+                  </a:tcPr>
+                </a:tc>
+                <a:tc>
+                  <a:txBody>
+                    <a:bodyPr/>
+                    <a:lstStyle/>
+                    <a:p>
+                      <a:pPr algn="r" fontAlgn="ctr">
+                        <a:buNone/>
+                      </a:pPr>
+                      <a:r>
+                        <a:rPr lang="sk-SK" sz="1200" b="0" i="0" u="none" strike="noStrike">
+                          <a:effectLst/>
+                          <a:latin typeface="Arial" panose="020B0604020202020204" pitchFamily="34" charset="0"/>
+                        </a:rPr>
+                        <a:t>6</a:t>
+                      </a:r>
+                    </a:p>
+                  </a:txBody>
+                  <a:tcPr marL="62943" marR="62943" marT="31472" marB="31472" anchor="ctr">
+                    <a:lnL>
+                      <a:noFill/>
+                    </a:lnL>
+                    <a:lnR>
+                      <a:noFill/>
+                    </a:lnR>
+                    <a:lnT>
+                      <a:noFill/>
+                    </a:lnT>
+                    <a:lnB>
+                      <a:noFill/>
+                    </a:lnB>
+                    <a:noFill/>
+                  </a:tcPr>
+                </a:tc>
+                <a:extLst>
+                  <a:ext uri="{0D108BD9-81ED-4DB2-BD59-A6C34878D82A}">
+                    <a16:rowId xmlns:a16="http://schemas.microsoft.com/office/drawing/2014/main" val="3251105919"/>
+                  </a:ext>
+                </a:extLst>
+              </a:tr>
+              <a:tr h="276951">
+                <a:tc>
+                  <a:txBody>
+                    <a:bodyPr/>
+                    <a:lstStyle/>
+                    <a:p>
+                      <a:pPr algn="l" fontAlgn="ctr">
+                        <a:buNone/>
+                      </a:pPr>
+                      <a:r>
+                        <a:rPr lang="sk-SK" sz="1200" b="0" i="0" u="none" strike="noStrike">
+                          <a:effectLst/>
+                          <a:latin typeface="Arial" panose="020B0604020202020204" pitchFamily="34" charset="0"/>
+                        </a:rPr>
+                        <a:t>Number of words</a:t>
+                      </a:r>
+                    </a:p>
+                  </a:txBody>
+                  <a:tcPr marL="62943" marR="62943" marT="31472" marB="31472" anchor="ctr">
+                    <a:lnL>
+                      <a:noFill/>
+                    </a:lnL>
+                    <a:lnR>
+                      <a:noFill/>
+                    </a:lnR>
+                    <a:lnT>
+                      <a:noFill/>
+                    </a:lnT>
+                    <a:lnB>
+                      <a:noFill/>
+                    </a:lnB>
+                    <a:noFill/>
+                  </a:tcPr>
+                </a:tc>
+                <a:tc>
+                  <a:txBody>
+                    <a:bodyPr/>
+                    <a:lstStyle/>
+                    <a:p>
+                      <a:pPr algn="r" fontAlgn="ctr">
+                        <a:buNone/>
+                      </a:pPr>
+                      <a:r>
+                        <a:rPr lang="sk-SK" sz="1200" b="0" i="0" u="none" strike="noStrike">
+                          <a:effectLst/>
+                          <a:latin typeface="Arial" panose="020B0604020202020204" pitchFamily="34" charset="0"/>
+                        </a:rPr>
+                        <a:t>3230</a:t>
+                      </a:r>
+                    </a:p>
+                  </a:txBody>
+                  <a:tcPr marL="62943" marR="62943" marT="31472" marB="31472" anchor="ctr">
+                    <a:lnL>
+                      <a:noFill/>
+                    </a:lnL>
+                    <a:lnR>
+                      <a:noFill/>
+                    </a:lnR>
+                    <a:lnT>
+                      <a:noFill/>
+                    </a:lnT>
+                    <a:lnB>
+                      <a:noFill/>
+                    </a:lnB>
+                    <a:noFill/>
+                  </a:tcPr>
+                </a:tc>
+                <a:tc>
+                  <a:txBody>
+                    <a:bodyPr/>
+                    <a:lstStyle/>
+                    <a:p>
+                      <a:pPr algn="r" fontAlgn="ctr">
+                        <a:buNone/>
+                      </a:pPr>
+                      <a:r>
+                        <a:rPr lang="sk-SK" sz="1200" b="0" i="0" u="none" strike="noStrike">
+                          <a:effectLst/>
+                          <a:latin typeface="Arial" panose="020B0604020202020204" pitchFamily="34" charset="0"/>
+                        </a:rPr>
+                        <a:t>3230</a:t>
+                      </a:r>
+                    </a:p>
+                  </a:txBody>
+                  <a:tcPr marL="62943" marR="62943" marT="31472" marB="31472" anchor="ctr">
+                    <a:lnL>
+                      <a:noFill/>
+                    </a:lnL>
+                    <a:lnR>
+                      <a:noFill/>
+                    </a:lnR>
+                    <a:lnT>
+                      <a:noFill/>
+                    </a:lnT>
+                    <a:lnB>
+                      <a:noFill/>
+                    </a:lnB>
+                    <a:noFill/>
+                  </a:tcPr>
+                </a:tc>
+                <a:tc>
+                  <a:txBody>
+                    <a:bodyPr/>
+                    <a:lstStyle/>
+                    <a:p>
+                      <a:pPr algn="r" fontAlgn="ctr">
+                        <a:buNone/>
+                      </a:pPr>
+                      <a:r>
+                        <a:rPr lang="sk-SK" sz="1200" b="0" i="0" u="none" strike="noStrike">
+                          <a:effectLst/>
+                          <a:latin typeface="Arial" panose="020B0604020202020204" pitchFamily="34" charset="0"/>
+                        </a:rPr>
+                        <a:t>3230</a:t>
+                      </a:r>
+                    </a:p>
+                  </a:txBody>
+                  <a:tcPr marL="62943" marR="62943" marT="31472" marB="31472" anchor="ctr">
+                    <a:lnL>
+                      <a:noFill/>
+                    </a:lnL>
+                    <a:lnR>
+                      <a:noFill/>
+                    </a:lnR>
+                    <a:lnT>
+                      <a:noFill/>
+                    </a:lnT>
+                    <a:lnB>
+                      <a:noFill/>
+                    </a:lnB>
+                    <a:noFill/>
+                  </a:tcPr>
+                </a:tc>
+                <a:extLst>
+                  <a:ext uri="{0D108BD9-81ED-4DB2-BD59-A6C34878D82A}">
+                    <a16:rowId xmlns:a16="http://schemas.microsoft.com/office/drawing/2014/main" val="3296565507"/>
+                  </a:ext>
+                </a:extLst>
+              </a:tr>
+              <a:tr h="276951">
+                <a:tc>
+                  <a:txBody>
+                    <a:bodyPr/>
+                    <a:lstStyle/>
+                    <a:p>
+                      <a:pPr algn="l" fontAlgn="ctr">
+                        <a:buNone/>
+                      </a:pPr>
+                      <a:r>
+                        <a:rPr lang="sk-SK" sz="1200" b="0" i="0" u="none" strike="noStrike">
+                          <a:effectLst/>
+                          <a:latin typeface="Arial" panose="020B0604020202020204" pitchFamily="34" charset="0"/>
+                        </a:rPr>
+                        <a:t>Average word length</a:t>
+                      </a:r>
+                    </a:p>
+                  </a:txBody>
+                  <a:tcPr marL="62943" marR="62943" marT="31472" marB="31472" anchor="ctr">
+                    <a:lnL>
+                      <a:noFill/>
+                    </a:lnL>
+                    <a:lnR>
+                      <a:noFill/>
+                    </a:lnR>
+                    <a:lnT>
+                      <a:noFill/>
+                    </a:lnT>
+                    <a:lnB>
+                      <a:noFill/>
+                    </a:lnB>
+                    <a:noFill/>
+                  </a:tcPr>
+                </a:tc>
+                <a:tc>
+                  <a:txBody>
+                    <a:bodyPr/>
+                    <a:lstStyle/>
+                    <a:p>
+                      <a:pPr algn="r" fontAlgn="ctr">
+                        <a:buNone/>
+                      </a:pPr>
+                      <a:r>
+                        <a:rPr lang="sk-SK" sz="1200" b="0" i="0" u="none" strike="noStrike">
+                          <a:effectLst/>
+                          <a:latin typeface="Arial" panose="020B0604020202020204" pitchFamily="34" charset="0"/>
+                        </a:rPr>
+                        <a:t>6.18762</a:t>
+                      </a:r>
+                    </a:p>
+                  </a:txBody>
+                  <a:tcPr marL="62943" marR="62943" marT="31472" marB="31472" anchor="ctr">
+                    <a:lnL>
+                      <a:noFill/>
+                    </a:lnL>
+                    <a:lnR>
+                      <a:noFill/>
+                    </a:lnR>
+                    <a:lnT>
+                      <a:noFill/>
+                    </a:lnT>
+                    <a:lnB>
+                      <a:noFill/>
+                    </a:lnB>
+                    <a:noFill/>
+                  </a:tcPr>
+                </a:tc>
+                <a:tc>
+                  <a:txBody>
+                    <a:bodyPr/>
+                    <a:lstStyle/>
+                    <a:p>
+                      <a:pPr algn="r" fontAlgn="ctr">
+                        <a:buNone/>
+                      </a:pPr>
+                      <a:r>
+                        <a:rPr lang="sk-SK" sz="1200" b="0" i="0" u="none" strike="noStrike">
+                          <a:effectLst/>
+                          <a:latin typeface="Arial" panose="020B0604020202020204" pitchFamily="34" charset="0"/>
+                        </a:rPr>
+                        <a:t>6.18762</a:t>
+                      </a:r>
+                    </a:p>
+                  </a:txBody>
+                  <a:tcPr marL="62943" marR="62943" marT="31472" marB="31472" anchor="ctr">
+                    <a:lnL>
+                      <a:noFill/>
+                    </a:lnL>
+                    <a:lnR>
+                      <a:noFill/>
+                    </a:lnR>
+                    <a:lnT>
+                      <a:noFill/>
+                    </a:lnT>
+                    <a:lnB>
+                      <a:noFill/>
+                    </a:lnB>
+                    <a:noFill/>
+                  </a:tcPr>
+                </a:tc>
+                <a:tc>
+                  <a:txBody>
+                    <a:bodyPr/>
+                    <a:lstStyle/>
+                    <a:p>
+                      <a:pPr algn="r" fontAlgn="ctr">
+                        <a:buNone/>
+                      </a:pPr>
+                      <a:r>
+                        <a:rPr lang="sk-SK" sz="1200" b="0" i="0" u="none" strike="noStrike">
+                          <a:effectLst/>
+                          <a:latin typeface="Arial" panose="020B0604020202020204" pitchFamily="34" charset="0"/>
+                        </a:rPr>
+                        <a:t>6.18762</a:t>
+                      </a:r>
+                    </a:p>
+                  </a:txBody>
+                  <a:tcPr marL="62943" marR="62943" marT="31472" marB="31472" anchor="ctr">
+                    <a:lnL>
+                      <a:noFill/>
+                    </a:lnL>
+                    <a:lnR>
+                      <a:noFill/>
+                    </a:lnR>
+                    <a:lnT>
+                      <a:noFill/>
+                    </a:lnT>
+                    <a:lnB>
+                      <a:noFill/>
+                    </a:lnB>
+                    <a:noFill/>
+                  </a:tcPr>
+                </a:tc>
+                <a:extLst>
+                  <a:ext uri="{0D108BD9-81ED-4DB2-BD59-A6C34878D82A}">
+                    <a16:rowId xmlns:a16="http://schemas.microsoft.com/office/drawing/2014/main" val="3807933848"/>
+                  </a:ext>
+                </a:extLst>
+              </a:tr>
+              <a:tr h="276951">
+                <a:tc>
+                  <a:txBody>
+                    <a:bodyPr/>
+                    <a:lstStyle/>
+                    <a:p>
+                      <a:pPr algn="l" fontAlgn="ctr">
+                        <a:buNone/>
+                      </a:pPr>
+                      <a:r>
+                        <a:rPr lang="sk-SK" sz="1200" b="0" i="0" u="none" strike="noStrike">
+                          <a:effectLst/>
+                          <a:latin typeface="Arial" panose="020B0604020202020204" pitchFamily="34" charset="0"/>
+                        </a:rPr>
+                        <a:t>Number of sentences</a:t>
+                      </a:r>
+                    </a:p>
+                  </a:txBody>
+                  <a:tcPr marL="62943" marR="62943" marT="31472" marB="31472" anchor="ctr">
+                    <a:lnL>
+                      <a:noFill/>
+                    </a:lnL>
+                    <a:lnR>
+                      <a:noFill/>
+                    </a:lnR>
+                    <a:lnT>
+                      <a:noFill/>
+                    </a:lnT>
+                    <a:lnB>
+                      <a:noFill/>
+                    </a:lnB>
+                    <a:noFill/>
+                  </a:tcPr>
+                </a:tc>
+                <a:tc>
+                  <a:txBody>
+                    <a:bodyPr/>
+                    <a:lstStyle/>
+                    <a:p>
+                      <a:pPr algn="r" fontAlgn="ctr">
+                        <a:buNone/>
+                      </a:pPr>
+                      <a:r>
+                        <a:rPr lang="sk-SK" sz="1200" b="0" i="0" u="none" strike="noStrike">
+                          <a:effectLst/>
+                          <a:latin typeface="Arial" panose="020B0604020202020204" pitchFamily="34" charset="0"/>
+                        </a:rPr>
+                        <a:t>1288</a:t>
+                      </a:r>
+                    </a:p>
+                  </a:txBody>
+                  <a:tcPr marL="62943" marR="62943" marT="31472" marB="31472" anchor="ctr">
+                    <a:lnL>
+                      <a:noFill/>
+                    </a:lnL>
+                    <a:lnR>
+                      <a:noFill/>
+                    </a:lnR>
+                    <a:lnT>
+                      <a:noFill/>
+                    </a:lnT>
+                    <a:lnB>
+                      <a:noFill/>
+                    </a:lnB>
+                    <a:noFill/>
+                  </a:tcPr>
+                </a:tc>
+                <a:tc>
+                  <a:txBody>
+                    <a:bodyPr/>
+                    <a:lstStyle/>
+                    <a:p>
+                      <a:pPr algn="r" fontAlgn="ctr">
+                        <a:buNone/>
+                      </a:pPr>
+                      <a:r>
+                        <a:rPr lang="sk-SK" sz="1200" b="0" i="0" u="none" strike="noStrike">
+                          <a:effectLst/>
+                          <a:latin typeface="Arial" panose="020B0604020202020204" pitchFamily="34" charset="0"/>
+                        </a:rPr>
+                        <a:t>1288</a:t>
+                      </a:r>
+                    </a:p>
+                  </a:txBody>
+                  <a:tcPr marL="62943" marR="62943" marT="31472" marB="31472" anchor="ctr">
+                    <a:lnL>
+                      <a:noFill/>
+                    </a:lnL>
+                    <a:lnR>
+                      <a:noFill/>
+                    </a:lnR>
+                    <a:lnT>
+                      <a:noFill/>
+                    </a:lnT>
+                    <a:lnB>
+                      <a:noFill/>
+                    </a:lnB>
+                    <a:noFill/>
+                  </a:tcPr>
+                </a:tc>
+                <a:tc>
+                  <a:txBody>
+                    <a:bodyPr/>
+                    <a:lstStyle/>
+                    <a:p>
+                      <a:pPr algn="r" fontAlgn="ctr">
+                        <a:buNone/>
+                      </a:pPr>
+                      <a:r>
+                        <a:rPr lang="sk-SK" sz="1200" b="0" i="0" u="none" strike="noStrike">
+                          <a:effectLst/>
+                          <a:latin typeface="Arial" panose="020B0604020202020204" pitchFamily="34" charset="0"/>
+                        </a:rPr>
+                        <a:t>1228</a:t>
+                      </a:r>
+                    </a:p>
+                  </a:txBody>
+                  <a:tcPr marL="62943" marR="62943" marT="31472" marB="31472" anchor="ctr">
+                    <a:lnL>
+                      <a:noFill/>
+                    </a:lnL>
+                    <a:lnR>
+                      <a:noFill/>
+                    </a:lnR>
+                    <a:lnT>
+                      <a:noFill/>
+                    </a:lnT>
+                    <a:lnB>
+                      <a:noFill/>
+                    </a:lnB>
+                    <a:noFill/>
+                  </a:tcPr>
+                </a:tc>
+                <a:extLst>
+                  <a:ext uri="{0D108BD9-81ED-4DB2-BD59-A6C34878D82A}">
+                    <a16:rowId xmlns:a16="http://schemas.microsoft.com/office/drawing/2014/main" val="3215404076"/>
+                  </a:ext>
+                </a:extLst>
+              </a:tr>
+              <a:tr h="276951">
+                <a:tc>
+                  <a:txBody>
+                    <a:bodyPr/>
+                    <a:lstStyle/>
+                    <a:p>
+                      <a:pPr algn="l" fontAlgn="ctr">
+                        <a:buNone/>
+                      </a:pPr>
+                      <a:r>
+                        <a:rPr lang="sk-SK" sz="1200" b="0" i="0" u="none" strike="noStrike">
+                          <a:effectLst/>
+                          <a:latin typeface="Arial" panose="020B0604020202020204" pitchFamily="34" charset="0"/>
+                        </a:rPr>
+                        <a:t>Average sentence length</a:t>
+                      </a:r>
+                    </a:p>
+                  </a:txBody>
+                  <a:tcPr marL="62943" marR="62943" marT="31472" marB="31472" anchor="ctr">
+                    <a:lnL>
+                      <a:noFill/>
+                    </a:lnL>
+                    <a:lnR>
+                      <a:noFill/>
+                    </a:lnR>
+                    <a:lnT>
+                      <a:noFill/>
+                    </a:lnT>
+                    <a:lnB>
+                      <a:noFill/>
+                    </a:lnB>
+                    <a:noFill/>
+                  </a:tcPr>
+                </a:tc>
+                <a:tc>
+                  <a:txBody>
+                    <a:bodyPr/>
+                    <a:lstStyle/>
+                    <a:p>
+                      <a:pPr algn="r" fontAlgn="ctr">
+                        <a:buNone/>
+                      </a:pPr>
+                      <a:r>
+                        <a:rPr lang="sk-SK" sz="1200" b="0" i="0" u="none" strike="noStrike">
+                          <a:effectLst/>
+                          <a:latin typeface="Arial" panose="020B0604020202020204" pitchFamily="34" charset="0"/>
+                        </a:rPr>
+                        <a:t>16.73137</a:t>
+                      </a:r>
+                    </a:p>
+                  </a:txBody>
+                  <a:tcPr marL="62943" marR="62943" marT="31472" marB="31472" anchor="ctr">
+                    <a:lnL>
+                      <a:noFill/>
+                    </a:lnL>
+                    <a:lnR>
+                      <a:noFill/>
+                    </a:lnR>
+                    <a:lnT>
+                      <a:noFill/>
+                    </a:lnT>
+                    <a:lnB>
+                      <a:noFill/>
+                    </a:lnB>
+                    <a:noFill/>
+                  </a:tcPr>
+                </a:tc>
+                <a:tc>
+                  <a:txBody>
+                    <a:bodyPr/>
+                    <a:lstStyle/>
+                    <a:p>
+                      <a:pPr algn="r" fontAlgn="ctr">
+                        <a:buNone/>
+                      </a:pPr>
+                      <a:r>
+                        <a:rPr lang="sk-SK" sz="1200" b="0" i="0" u="none" strike="noStrike">
+                          <a:effectLst/>
+                          <a:latin typeface="Arial" panose="020B0604020202020204" pitchFamily="34" charset="0"/>
+                        </a:rPr>
+                        <a:t>16.73758</a:t>
+                      </a:r>
+                    </a:p>
+                  </a:txBody>
+                  <a:tcPr marL="62943" marR="62943" marT="31472" marB="31472" anchor="ctr">
+                    <a:lnL>
+                      <a:noFill/>
+                    </a:lnL>
+                    <a:lnR>
+                      <a:noFill/>
+                    </a:lnR>
+                    <a:lnT>
+                      <a:noFill/>
+                    </a:lnT>
+                    <a:lnB>
+                      <a:noFill/>
+                    </a:lnB>
+                    <a:noFill/>
+                  </a:tcPr>
+                </a:tc>
+                <a:tc>
+                  <a:txBody>
+                    <a:bodyPr/>
+                    <a:lstStyle/>
+                    <a:p>
+                      <a:pPr algn="r" fontAlgn="ctr">
+                        <a:buNone/>
+                      </a:pPr>
+                      <a:r>
+                        <a:rPr lang="sk-SK" sz="1200" b="0" i="0" u="none" strike="noStrike">
+                          <a:effectLst/>
+                          <a:latin typeface="Arial" panose="020B0604020202020204" pitchFamily="34" charset="0"/>
+                        </a:rPr>
+                        <a:t>17.58795</a:t>
+                      </a:r>
+                    </a:p>
+                  </a:txBody>
+                  <a:tcPr marL="62943" marR="62943" marT="31472" marB="31472" anchor="ctr">
+                    <a:lnL>
+                      <a:noFill/>
+                    </a:lnL>
+                    <a:lnR>
+                      <a:noFill/>
+                    </a:lnR>
+                    <a:lnT>
+                      <a:noFill/>
+                    </a:lnT>
+                    <a:lnB>
+                      <a:noFill/>
+                    </a:lnB>
+                    <a:noFill/>
+                  </a:tcPr>
+                </a:tc>
+                <a:extLst>
+                  <a:ext uri="{0D108BD9-81ED-4DB2-BD59-A6C34878D82A}">
+                    <a16:rowId xmlns:a16="http://schemas.microsoft.com/office/drawing/2014/main" val="326454180"/>
+                  </a:ext>
+                </a:extLst>
+              </a:tr>
+              <a:tr h="276951">
+                <a:tc>
+                  <a:txBody>
+                    <a:bodyPr/>
+                    <a:lstStyle/>
+                    <a:p>
+                      <a:pPr algn="l" fontAlgn="ctr">
+                        <a:buNone/>
+                      </a:pPr>
+                      <a:r>
+                        <a:rPr lang="sk-SK" sz="1200" b="0" i="0" u="none" strike="noStrike">
+                          <a:effectLst/>
+                          <a:latin typeface="Arial" panose="020B0604020202020204" pitchFamily="34" charset="0"/>
+                        </a:rPr>
+                        <a:t>Number of bigrams</a:t>
+                      </a:r>
+                    </a:p>
+                  </a:txBody>
+                  <a:tcPr marL="62943" marR="62943" marT="31472" marB="31472" anchor="ctr">
+                    <a:lnL>
+                      <a:noFill/>
+                    </a:lnL>
+                    <a:lnR>
+                      <a:noFill/>
+                    </a:lnR>
+                    <a:lnT>
+                      <a:noFill/>
+                    </a:lnT>
+                    <a:lnB>
+                      <a:noFill/>
+                    </a:lnB>
+                    <a:noFill/>
+                  </a:tcPr>
+                </a:tc>
+                <a:tc>
+                  <a:txBody>
+                    <a:bodyPr/>
+                    <a:lstStyle/>
+                    <a:p>
+                      <a:pPr algn="r" fontAlgn="ctr">
+                        <a:buNone/>
+                      </a:pPr>
+                      <a:r>
+                        <a:rPr lang="sk-SK" sz="1200" b="0" i="0" u="none" strike="noStrike">
+                          <a:effectLst/>
+                          <a:latin typeface="Arial" panose="020B0604020202020204" pitchFamily="34" charset="0"/>
+                        </a:rPr>
+                        <a:t>13857</a:t>
+                      </a:r>
+                    </a:p>
+                  </a:txBody>
+                  <a:tcPr marL="62943" marR="62943" marT="31472" marB="31472" anchor="ctr">
+                    <a:lnL>
+                      <a:noFill/>
+                    </a:lnL>
+                    <a:lnR>
+                      <a:noFill/>
+                    </a:lnR>
+                    <a:lnT>
+                      <a:noFill/>
+                    </a:lnT>
+                    <a:lnB>
+                      <a:noFill/>
+                    </a:lnB>
+                    <a:noFill/>
+                  </a:tcPr>
+                </a:tc>
+                <a:tc>
+                  <a:txBody>
+                    <a:bodyPr/>
+                    <a:lstStyle/>
+                    <a:p>
+                      <a:pPr algn="r" fontAlgn="ctr">
+                        <a:buNone/>
+                      </a:pPr>
+                      <a:r>
+                        <a:rPr lang="sk-SK" sz="1200" b="0" i="0" u="none" strike="noStrike">
+                          <a:effectLst/>
+                          <a:latin typeface="Arial" panose="020B0604020202020204" pitchFamily="34" charset="0"/>
+                        </a:rPr>
+                        <a:t>13865</a:t>
+                      </a:r>
+                    </a:p>
+                  </a:txBody>
+                  <a:tcPr marL="62943" marR="62943" marT="31472" marB="31472" anchor="ctr">
+                    <a:lnL>
+                      <a:noFill/>
+                    </a:lnL>
+                    <a:lnR>
+                      <a:noFill/>
+                    </a:lnR>
+                    <a:lnT>
+                      <a:noFill/>
+                    </a:lnT>
+                    <a:lnB>
+                      <a:noFill/>
+                    </a:lnB>
+                    <a:noFill/>
+                  </a:tcPr>
+                </a:tc>
+                <a:tc>
+                  <a:txBody>
+                    <a:bodyPr/>
+                    <a:lstStyle/>
+                    <a:p>
+                      <a:pPr algn="r" fontAlgn="ctr">
+                        <a:buNone/>
+                      </a:pPr>
+                      <a:r>
+                        <a:rPr lang="sk-SK" sz="1200" b="0" i="0" u="none" strike="noStrike">
+                          <a:effectLst/>
+                          <a:latin typeface="Arial" panose="020B0604020202020204" pitchFamily="34" charset="0"/>
+                        </a:rPr>
+                        <a:t>16175</a:t>
+                      </a:r>
+                    </a:p>
+                  </a:txBody>
+                  <a:tcPr marL="62943" marR="62943" marT="31472" marB="31472" anchor="ctr">
+                    <a:lnL>
+                      <a:noFill/>
+                    </a:lnL>
+                    <a:lnR>
+                      <a:noFill/>
+                    </a:lnR>
+                    <a:lnT>
+                      <a:noFill/>
+                    </a:lnT>
+                    <a:lnB>
+                      <a:noFill/>
+                    </a:lnB>
+                    <a:noFill/>
+                  </a:tcPr>
+                </a:tc>
+                <a:extLst>
+                  <a:ext uri="{0D108BD9-81ED-4DB2-BD59-A6C34878D82A}">
+                    <a16:rowId xmlns:a16="http://schemas.microsoft.com/office/drawing/2014/main" val="361719652"/>
+                  </a:ext>
+                </a:extLst>
+              </a:tr>
+              <a:tr h="276951">
+                <a:tc>
+                  <a:txBody>
+                    <a:bodyPr/>
+                    <a:lstStyle/>
+                    <a:p>
+                      <a:pPr algn="l" fontAlgn="ctr">
+                        <a:buNone/>
+                      </a:pPr>
+                      <a:r>
+                        <a:rPr lang="sk-SK" sz="1200" b="0" i="0" u="none" strike="noStrike">
+                          <a:effectLst/>
+                          <a:latin typeface="Arial" panose="020B0604020202020204" pitchFamily="34" charset="0"/>
+                        </a:rPr>
+                        <a:t>Max bigram frequency</a:t>
+                      </a:r>
+                    </a:p>
+                  </a:txBody>
+                  <a:tcPr marL="62943" marR="62943" marT="31472" marB="31472" anchor="ctr">
+                    <a:lnL>
+                      <a:noFill/>
+                    </a:lnL>
+                    <a:lnR>
+                      <a:noFill/>
+                    </a:lnR>
+                    <a:lnT>
+                      <a:noFill/>
+                    </a:lnT>
+                    <a:lnB>
+                      <a:noFill/>
+                    </a:lnB>
+                    <a:noFill/>
+                  </a:tcPr>
+                </a:tc>
+                <a:tc>
+                  <a:txBody>
+                    <a:bodyPr/>
+                    <a:lstStyle/>
+                    <a:p>
+                      <a:pPr algn="r" fontAlgn="ctr">
+                        <a:buNone/>
+                      </a:pPr>
+                      <a:r>
+                        <a:rPr lang="sk-SK" sz="1200" b="0" i="0" u="none" strike="noStrike">
+                          <a:effectLst/>
+                          <a:latin typeface="Arial" panose="020B0604020202020204" pitchFamily="34" charset="0"/>
+                        </a:rPr>
+                        <a:t>155</a:t>
+                      </a:r>
+                    </a:p>
+                  </a:txBody>
+                  <a:tcPr marL="62943" marR="62943" marT="31472" marB="31472" anchor="ctr">
+                    <a:lnL>
+                      <a:noFill/>
+                    </a:lnL>
+                    <a:lnR>
+                      <a:noFill/>
+                    </a:lnR>
+                    <a:lnT>
+                      <a:noFill/>
+                    </a:lnT>
+                    <a:lnB>
+                      <a:noFill/>
+                    </a:lnB>
+                    <a:noFill/>
+                  </a:tcPr>
+                </a:tc>
+                <a:tc>
+                  <a:txBody>
+                    <a:bodyPr/>
+                    <a:lstStyle/>
+                    <a:p>
+                      <a:pPr algn="r" fontAlgn="ctr">
+                        <a:buNone/>
+                      </a:pPr>
+                      <a:r>
+                        <a:rPr lang="sk-SK" sz="1200" b="0" i="0" u="none" strike="noStrike">
+                          <a:effectLst/>
+                          <a:latin typeface="Arial" panose="020B0604020202020204" pitchFamily="34" charset="0"/>
+                        </a:rPr>
+                        <a:t>155</a:t>
+                      </a:r>
+                    </a:p>
+                  </a:txBody>
+                  <a:tcPr marL="62943" marR="62943" marT="31472" marB="31472" anchor="ctr">
+                    <a:lnL>
+                      <a:noFill/>
+                    </a:lnL>
+                    <a:lnR>
+                      <a:noFill/>
+                    </a:lnR>
+                    <a:lnT>
+                      <a:noFill/>
+                    </a:lnT>
+                    <a:lnB>
+                      <a:noFill/>
+                    </a:lnB>
+                    <a:noFill/>
+                  </a:tcPr>
+                </a:tc>
+                <a:tc>
+                  <a:txBody>
+                    <a:bodyPr/>
+                    <a:lstStyle/>
+                    <a:p>
+                      <a:pPr algn="r" fontAlgn="ctr">
+                        <a:buNone/>
+                      </a:pPr>
+                      <a:r>
+                        <a:rPr lang="sk-SK" sz="1200" b="0" i="0" u="none" strike="noStrike">
+                          <a:effectLst/>
+                          <a:latin typeface="Arial" panose="020B0604020202020204" pitchFamily="34" charset="0"/>
+                        </a:rPr>
+                        <a:t>58</a:t>
+                      </a:r>
+                    </a:p>
+                  </a:txBody>
+                  <a:tcPr marL="62943" marR="62943" marT="31472" marB="31472" anchor="ctr">
+                    <a:lnL>
+                      <a:noFill/>
+                    </a:lnL>
+                    <a:lnR>
+                      <a:noFill/>
+                    </a:lnR>
+                    <a:lnT>
+                      <a:noFill/>
+                    </a:lnT>
+                    <a:lnB>
+                      <a:noFill/>
+                    </a:lnB>
+                    <a:noFill/>
+                  </a:tcPr>
+                </a:tc>
+                <a:extLst>
+                  <a:ext uri="{0D108BD9-81ED-4DB2-BD59-A6C34878D82A}">
+                    <a16:rowId xmlns:a16="http://schemas.microsoft.com/office/drawing/2014/main" val="2985211117"/>
+                  </a:ext>
+                </a:extLst>
+              </a:tr>
+              <a:tr h="276951">
+                <a:tc>
+                  <a:txBody>
+                    <a:bodyPr/>
+                    <a:lstStyle/>
+                    <a:p>
+                      <a:pPr algn="l" fontAlgn="ctr">
+                        <a:buNone/>
+                      </a:pPr>
+                      <a:r>
+                        <a:rPr lang="sk-SK" sz="1200" b="0" i="0" u="none" strike="noStrike">
+                          <a:effectLst/>
+                          <a:latin typeface="Arial" panose="020B0604020202020204" pitchFamily="34" charset="0"/>
+                        </a:rPr>
+                        <a:t>Average bigram frequency</a:t>
+                      </a:r>
+                    </a:p>
+                  </a:txBody>
+                  <a:tcPr marL="62943" marR="62943" marT="31472" marB="31472" anchor="ctr">
+                    <a:lnL>
+                      <a:noFill/>
+                    </a:lnL>
+                    <a:lnR>
+                      <a:noFill/>
+                    </a:lnR>
+                    <a:lnT>
+                      <a:noFill/>
+                    </a:lnT>
+                    <a:lnB>
+                      <a:noFill/>
+                    </a:lnB>
+                    <a:noFill/>
+                  </a:tcPr>
+                </a:tc>
+                <a:tc>
+                  <a:txBody>
+                    <a:bodyPr/>
+                    <a:lstStyle/>
+                    <a:p>
+                      <a:pPr algn="r" fontAlgn="ctr">
+                        <a:buNone/>
+                      </a:pPr>
+                      <a:r>
+                        <a:rPr lang="sk-SK" sz="1200" b="0" i="0" u="none" strike="noStrike">
+                          <a:effectLst/>
+                          <a:latin typeface="Arial" panose="020B0604020202020204" pitchFamily="34" charset="0"/>
+                        </a:rPr>
+                        <a:t>1.55676</a:t>
+                      </a:r>
+                    </a:p>
+                  </a:txBody>
+                  <a:tcPr marL="62943" marR="62943" marT="31472" marB="31472" anchor="ctr">
+                    <a:lnL>
+                      <a:noFill/>
+                    </a:lnL>
+                    <a:lnR>
+                      <a:noFill/>
+                    </a:lnR>
+                    <a:lnT>
+                      <a:noFill/>
+                    </a:lnT>
+                    <a:lnB>
+                      <a:noFill/>
+                    </a:lnB>
+                    <a:noFill/>
+                  </a:tcPr>
+                </a:tc>
+                <a:tc>
+                  <a:txBody>
+                    <a:bodyPr/>
+                    <a:lstStyle/>
+                    <a:p>
+                      <a:pPr algn="r" fontAlgn="ctr">
+                        <a:buNone/>
+                      </a:pPr>
+                      <a:r>
+                        <a:rPr lang="sk-SK" sz="1200" b="0" i="0" u="none" strike="noStrike">
+                          <a:effectLst/>
+                          <a:latin typeface="Arial" panose="020B0604020202020204" pitchFamily="34" charset="0"/>
+                        </a:rPr>
+                        <a:t>1.55586</a:t>
+                      </a:r>
+                    </a:p>
+                  </a:txBody>
+                  <a:tcPr marL="62943" marR="62943" marT="31472" marB="31472" anchor="ctr">
+                    <a:lnL>
+                      <a:noFill/>
+                    </a:lnL>
+                    <a:lnR>
+                      <a:noFill/>
+                    </a:lnR>
+                    <a:lnT>
+                      <a:noFill/>
+                    </a:lnT>
+                    <a:lnB>
+                      <a:noFill/>
+                    </a:lnB>
+                    <a:noFill/>
+                  </a:tcPr>
+                </a:tc>
+                <a:tc>
+                  <a:txBody>
+                    <a:bodyPr/>
+                    <a:lstStyle/>
+                    <a:p>
+                      <a:pPr algn="r" fontAlgn="ctr">
+                        <a:buNone/>
+                      </a:pPr>
+                      <a:r>
+                        <a:rPr lang="sk-SK" sz="1200" b="0" i="0" u="none" strike="noStrike">
+                          <a:effectLst/>
+                          <a:latin typeface="Arial" panose="020B0604020202020204" pitchFamily="34" charset="0"/>
+                        </a:rPr>
+                        <a:t>1.33366</a:t>
+                      </a:r>
+                    </a:p>
+                  </a:txBody>
+                  <a:tcPr marL="62943" marR="62943" marT="31472" marB="31472" anchor="ctr">
+                    <a:lnL>
+                      <a:noFill/>
+                    </a:lnL>
+                    <a:lnR>
+                      <a:noFill/>
+                    </a:lnR>
+                    <a:lnT>
+                      <a:noFill/>
+                    </a:lnT>
+                    <a:lnB>
+                      <a:noFill/>
+                    </a:lnB>
+                    <a:noFill/>
+                  </a:tcPr>
+                </a:tc>
+                <a:extLst>
+                  <a:ext uri="{0D108BD9-81ED-4DB2-BD59-A6C34878D82A}">
+                    <a16:rowId xmlns:a16="http://schemas.microsoft.com/office/drawing/2014/main" val="2637520913"/>
+                  </a:ext>
+                </a:extLst>
+              </a:tr>
+              <a:tr h="276951">
+                <a:tc>
+                  <a:txBody>
+                    <a:bodyPr/>
+                    <a:lstStyle/>
+                    <a:p>
+                      <a:pPr algn="l" fontAlgn="ctr">
+                        <a:buNone/>
+                      </a:pPr>
+                      <a:r>
+                        <a:rPr lang="sk-SK" sz="1200" b="0" i="0" u="none" strike="noStrike">
+                          <a:effectLst/>
+                          <a:latin typeface="Arial" panose="020B0604020202020204" pitchFamily="34" charset="0"/>
+                        </a:rPr>
+                        <a:t>Number of trigrams</a:t>
+                      </a:r>
+                    </a:p>
+                  </a:txBody>
+                  <a:tcPr marL="62943" marR="62943" marT="31472" marB="31472" anchor="ctr">
+                    <a:lnL>
+                      <a:noFill/>
+                    </a:lnL>
+                    <a:lnR>
+                      <a:noFill/>
+                    </a:lnR>
+                    <a:lnT>
+                      <a:noFill/>
+                    </a:lnT>
+                    <a:lnB>
+                      <a:noFill/>
+                    </a:lnB>
+                    <a:noFill/>
+                  </a:tcPr>
+                </a:tc>
+                <a:tc>
+                  <a:txBody>
+                    <a:bodyPr/>
+                    <a:lstStyle/>
+                    <a:p>
+                      <a:pPr algn="r" fontAlgn="ctr">
+                        <a:buNone/>
+                      </a:pPr>
+                      <a:r>
+                        <a:rPr lang="sk-SK" sz="1200" b="0" i="0" u="none" strike="noStrike">
+                          <a:effectLst/>
+                          <a:latin typeface="Arial" panose="020B0604020202020204" pitchFamily="34" charset="0"/>
+                        </a:rPr>
+                        <a:t>20016</a:t>
+                      </a:r>
+                    </a:p>
+                  </a:txBody>
+                  <a:tcPr marL="62943" marR="62943" marT="31472" marB="31472" anchor="ctr">
+                    <a:lnL>
+                      <a:noFill/>
+                    </a:lnL>
+                    <a:lnR>
+                      <a:noFill/>
+                    </a:lnR>
+                    <a:lnT>
+                      <a:noFill/>
+                    </a:lnT>
+                    <a:lnB>
+                      <a:noFill/>
+                    </a:lnB>
+                    <a:noFill/>
+                  </a:tcPr>
+                </a:tc>
+                <a:tc>
+                  <a:txBody>
+                    <a:bodyPr/>
+                    <a:lstStyle/>
+                    <a:p>
+                      <a:pPr algn="r" fontAlgn="ctr">
+                        <a:buNone/>
+                      </a:pPr>
+                      <a:r>
+                        <a:rPr lang="sk-SK" sz="1200" b="0" i="0" u="none" strike="noStrike">
+                          <a:effectLst/>
+                          <a:latin typeface="Arial" panose="020B0604020202020204" pitchFamily="34" charset="0"/>
+                        </a:rPr>
+                        <a:t>20022</a:t>
+                      </a:r>
+                    </a:p>
+                  </a:txBody>
+                  <a:tcPr marL="62943" marR="62943" marT="31472" marB="31472" anchor="ctr">
+                    <a:lnL>
+                      <a:noFill/>
+                    </a:lnL>
+                    <a:lnR>
+                      <a:noFill/>
+                    </a:lnR>
+                    <a:lnT>
+                      <a:noFill/>
+                    </a:lnT>
+                    <a:lnB>
+                      <a:noFill/>
+                    </a:lnB>
+                    <a:noFill/>
+                  </a:tcPr>
+                </a:tc>
+                <a:tc>
+                  <a:txBody>
+                    <a:bodyPr/>
+                    <a:lstStyle/>
+                    <a:p>
+                      <a:pPr algn="r" fontAlgn="ctr">
+                        <a:buNone/>
+                      </a:pPr>
+                      <a:r>
+                        <a:rPr lang="sk-SK" sz="1200" b="0" i="0" u="none" strike="noStrike">
+                          <a:effectLst/>
+                          <a:latin typeface="Arial" panose="020B0604020202020204" pitchFamily="34" charset="0"/>
+                        </a:rPr>
+                        <a:t>21288</a:t>
+                      </a:r>
+                    </a:p>
+                  </a:txBody>
+                  <a:tcPr marL="62943" marR="62943" marT="31472" marB="31472" anchor="ctr">
+                    <a:lnL>
+                      <a:noFill/>
+                    </a:lnL>
+                    <a:lnR>
+                      <a:noFill/>
+                    </a:lnR>
+                    <a:lnT>
+                      <a:noFill/>
+                    </a:lnT>
+                    <a:lnB>
+                      <a:noFill/>
+                    </a:lnB>
+                    <a:noFill/>
+                  </a:tcPr>
+                </a:tc>
+                <a:extLst>
+                  <a:ext uri="{0D108BD9-81ED-4DB2-BD59-A6C34878D82A}">
+                    <a16:rowId xmlns:a16="http://schemas.microsoft.com/office/drawing/2014/main" val="2871366551"/>
+                  </a:ext>
+                </a:extLst>
+              </a:tr>
+              <a:tr h="276951">
+                <a:tc>
+                  <a:txBody>
+                    <a:bodyPr/>
+                    <a:lstStyle/>
+                    <a:p>
+                      <a:pPr algn="l" fontAlgn="ctr">
+                        <a:buNone/>
+                      </a:pPr>
+                      <a:r>
+                        <a:rPr lang="sk-SK" sz="1200" b="0" i="0" u="none" strike="noStrike">
+                          <a:effectLst/>
+                          <a:latin typeface="Arial" panose="020B0604020202020204" pitchFamily="34" charset="0"/>
+                        </a:rPr>
+                        <a:t>Max trigram frequency</a:t>
+                      </a:r>
+                    </a:p>
+                  </a:txBody>
+                  <a:tcPr marL="62943" marR="62943" marT="31472" marB="31472" anchor="ctr">
+                    <a:lnL>
+                      <a:noFill/>
+                    </a:lnL>
+                    <a:lnR>
+                      <a:noFill/>
+                    </a:lnR>
+                    <a:lnT>
+                      <a:noFill/>
+                    </a:lnT>
+                    <a:lnB>
+                      <a:noFill/>
+                    </a:lnB>
+                    <a:noFill/>
+                  </a:tcPr>
+                </a:tc>
+                <a:tc>
+                  <a:txBody>
+                    <a:bodyPr/>
+                    <a:lstStyle/>
+                    <a:p>
+                      <a:pPr algn="r" fontAlgn="ctr">
+                        <a:buNone/>
+                      </a:pPr>
+                      <a:r>
+                        <a:rPr lang="sk-SK" sz="1200" b="0" i="0" u="none" strike="noStrike">
+                          <a:effectLst/>
+                          <a:latin typeface="Arial" panose="020B0604020202020204" pitchFamily="34" charset="0"/>
+                        </a:rPr>
+                        <a:t>22</a:t>
+                      </a:r>
+                    </a:p>
+                  </a:txBody>
+                  <a:tcPr marL="62943" marR="62943" marT="31472" marB="31472" anchor="ctr">
+                    <a:lnL>
+                      <a:noFill/>
+                    </a:lnL>
+                    <a:lnR>
+                      <a:noFill/>
+                    </a:lnR>
+                    <a:lnT>
+                      <a:noFill/>
+                    </a:lnT>
+                    <a:lnB>
+                      <a:noFill/>
+                    </a:lnB>
+                    <a:noFill/>
+                  </a:tcPr>
+                </a:tc>
+                <a:tc>
+                  <a:txBody>
+                    <a:bodyPr/>
+                    <a:lstStyle/>
+                    <a:p>
+                      <a:pPr algn="r" fontAlgn="ctr">
+                        <a:buNone/>
+                      </a:pPr>
+                      <a:r>
+                        <a:rPr lang="sk-SK" sz="1200" b="0" i="0" u="none" strike="noStrike">
+                          <a:effectLst/>
+                          <a:latin typeface="Arial" panose="020B0604020202020204" pitchFamily="34" charset="0"/>
+                        </a:rPr>
+                        <a:t>22</a:t>
+                      </a:r>
+                    </a:p>
+                  </a:txBody>
+                  <a:tcPr marL="62943" marR="62943" marT="31472" marB="31472" anchor="ctr">
+                    <a:lnL>
+                      <a:noFill/>
+                    </a:lnL>
+                    <a:lnR>
+                      <a:noFill/>
+                    </a:lnR>
+                    <a:lnT>
+                      <a:noFill/>
+                    </a:lnT>
+                    <a:lnB>
+                      <a:noFill/>
+                    </a:lnB>
+                    <a:noFill/>
+                  </a:tcPr>
+                </a:tc>
+                <a:tc>
+                  <a:txBody>
+                    <a:bodyPr/>
+                    <a:lstStyle/>
+                    <a:p>
+                      <a:pPr algn="r" fontAlgn="ctr">
+                        <a:buNone/>
+                      </a:pPr>
+                      <a:r>
+                        <a:rPr lang="sk-SK" sz="1200" b="0" i="0" u="none" strike="noStrike">
+                          <a:effectLst/>
+                          <a:latin typeface="Arial" panose="020B0604020202020204" pitchFamily="34" charset="0"/>
+                        </a:rPr>
+                        <a:t>5</a:t>
+                      </a:r>
+                    </a:p>
+                  </a:txBody>
+                  <a:tcPr marL="62943" marR="62943" marT="31472" marB="31472" anchor="ctr">
+                    <a:lnL>
+                      <a:noFill/>
+                    </a:lnL>
+                    <a:lnR>
+                      <a:noFill/>
+                    </a:lnR>
+                    <a:lnT>
+                      <a:noFill/>
+                    </a:lnT>
+                    <a:lnB>
+                      <a:noFill/>
+                    </a:lnB>
+                    <a:noFill/>
+                  </a:tcPr>
+                </a:tc>
+                <a:extLst>
+                  <a:ext uri="{0D108BD9-81ED-4DB2-BD59-A6C34878D82A}">
+                    <a16:rowId xmlns:a16="http://schemas.microsoft.com/office/drawing/2014/main" val="4141693908"/>
+                  </a:ext>
+                </a:extLst>
+              </a:tr>
+              <a:tr h="276951">
+                <a:tc>
+                  <a:txBody>
+                    <a:bodyPr/>
+                    <a:lstStyle/>
+                    <a:p>
+                      <a:pPr algn="l" fontAlgn="ctr">
+                        <a:buNone/>
+                      </a:pPr>
+                      <a:r>
+                        <a:rPr lang="sk-SK" sz="1200" b="0" i="0" u="none" strike="noStrike">
+                          <a:effectLst/>
+                          <a:latin typeface="Arial" panose="020B0604020202020204" pitchFamily="34" charset="0"/>
+                        </a:rPr>
+                        <a:t>Average trigram frequency</a:t>
+                      </a:r>
+                    </a:p>
+                  </a:txBody>
+                  <a:tcPr marL="62943" marR="62943" marT="31472" marB="31472" anchor="ctr">
+                    <a:lnL>
+                      <a:noFill/>
+                    </a:lnL>
+                    <a:lnR>
+                      <a:noFill/>
+                    </a:lnR>
+                    <a:lnT>
+                      <a:noFill/>
+                    </a:lnT>
+                    <a:lnB>
+                      <a:noFill/>
+                    </a:lnB>
+                    <a:noFill/>
+                  </a:tcPr>
+                </a:tc>
+                <a:tc>
+                  <a:txBody>
+                    <a:bodyPr/>
+                    <a:lstStyle/>
+                    <a:p>
+                      <a:pPr algn="r" fontAlgn="ctr">
+                        <a:buNone/>
+                      </a:pPr>
+                      <a:r>
+                        <a:rPr lang="sk-SK" sz="1200" b="0" i="0" u="none" strike="noStrike">
+                          <a:effectLst/>
+                          <a:latin typeface="Arial" panose="020B0604020202020204" pitchFamily="34" charset="0"/>
+                        </a:rPr>
+                        <a:t>1.07769</a:t>
+                      </a:r>
+                    </a:p>
+                  </a:txBody>
+                  <a:tcPr marL="62943" marR="62943" marT="31472" marB="31472" anchor="ctr">
+                    <a:lnL>
+                      <a:noFill/>
+                    </a:lnL>
+                    <a:lnR>
+                      <a:noFill/>
+                    </a:lnR>
+                    <a:lnT>
+                      <a:noFill/>
+                    </a:lnT>
+                    <a:lnB>
+                      <a:noFill/>
+                    </a:lnB>
+                    <a:noFill/>
+                  </a:tcPr>
+                </a:tc>
+                <a:tc>
+                  <a:txBody>
+                    <a:bodyPr/>
+                    <a:lstStyle/>
+                    <a:p>
+                      <a:pPr algn="r" fontAlgn="ctr">
+                        <a:buNone/>
+                      </a:pPr>
+                      <a:r>
+                        <a:rPr lang="sk-SK" sz="1200" b="0" i="0" u="none" strike="noStrike">
+                          <a:effectLst/>
+                          <a:latin typeface="Arial" panose="020B0604020202020204" pitchFamily="34" charset="0"/>
+                        </a:rPr>
+                        <a:t>1.07736</a:t>
+                      </a:r>
+                    </a:p>
+                  </a:txBody>
+                  <a:tcPr marL="62943" marR="62943" marT="31472" marB="31472" anchor="ctr">
+                    <a:lnL>
+                      <a:noFill/>
+                    </a:lnL>
+                    <a:lnR>
+                      <a:noFill/>
+                    </a:lnR>
+                    <a:lnT>
+                      <a:noFill/>
+                    </a:lnT>
+                    <a:lnB>
+                      <a:noFill/>
+                    </a:lnB>
+                    <a:noFill/>
+                  </a:tcPr>
+                </a:tc>
+                <a:tc>
+                  <a:txBody>
+                    <a:bodyPr/>
+                    <a:lstStyle/>
+                    <a:p>
+                      <a:pPr algn="r" fontAlgn="ctr">
+                        <a:buNone/>
+                      </a:pPr>
+                      <a:r>
+                        <a:rPr lang="sk-SK" sz="1200" b="0" i="0" u="none" strike="noStrike" dirty="0">
+                          <a:effectLst/>
+                          <a:latin typeface="Arial" panose="020B0604020202020204" pitchFamily="34" charset="0"/>
+                        </a:rPr>
+                        <a:t>1.01329</a:t>
+                      </a:r>
+                    </a:p>
+                  </a:txBody>
+                  <a:tcPr marL="62943" marR="62943" marT="31472" marB="31472" anchor="ctr">
+                    <a:lnL>
+                      <a:noFill/>
+                    </a:lnL>
+                    <a:lnR>
+                      <a:noFill/>
+                    </a:lnR>
+                    <a:lnT>
+                      <a:noFill/>
+                    </a:lnT>
+                    <a:lnB>
+                      <a:noFill/>
+                    </a:lnB>
+                    <a:noFill/>
+                  </a:tcPr>
+                </a:tc>
+                <a:extLst>
+                  <a:ext uri="{0D108BD9-81ED-4DB2-BD59-A6C34878D82A}">
+                    <a16:rowId xmlns:a16="http://schemas.microsoft.com/office/drawing/2014/main" val="3000250927"/>
+                  </a:ext>
+                </a:extLst>
+              </a:tr>
+            </a:tbl>
+          </a:graphicData>
+        </a:graphic>
+      </p:graphicFrame>
+    </p:spTree>
+    <p:extLst>
+      <p:ext uri="{BB962C8B-B14F-4D97-AF65-F5344CB8AC3E}">
+        <p14:creationId xmlns:p14="http://schemas.microsoft.com/office/powerpoint/2010/main" val="3452004405"/>
+      </p:ext>
+    </p:extLst>
+  </p:cSld>
+  <p:clrMapOvr>
+    <a:masterClrMapping/>
+  </p:clrMapOvr>
+</p:sld>
+</file>
+
+<file path=ppt/slides/slide11.xml><?xml version="1.0" encoding="utf-8"?>
+<p:sld xmlns:a="http://schemas.openxmlformats.org/drawingml/2006/main" xmlns:r="http://schemas.openxmlformats.org/officeDocument/2006/relationships" xmlns:p="http://schemas.openxmlformats.org/presentationml/2006/main">
+  <p:cSld>
+    <p:bg>
+      <p:bgPr>
+        <a:solidFill>
+          <a:schemeClr val="bg1"/>
+        </a:solidFill>
+        <a:effectLst/>
+      </p:bgPr>
+    </p:bg>
+    <p:spTree>
+      <p:nvGrpSpPr>
+        <p:cNvPr id="1" name=""/>
+        <p:cNvGrpSpPr/>
+        <p:nvPr/>
+      </p:nvGrpSpPr>
+      <p:grpSpPr>
+        <a:xfrm>
+          <a:off x="0" y="0"/>
+          <a:ext cx="0" cy="0"/>
+          <a:chOff x="0" y="0"/>
+          <a:chExt cx="0" cy="0"/>
+        </a:xfrm>
+      </p:grpSpPr>
+      <p:sp>
+        <p:nvSpPr>
           <p:cNvPr id="9" name="Rectangle 8">
             <a:extLst>
               <a:ext uri="{FF2B5EF4-FFF2-40B4-BE49-F238E27FC236}">
@@ -10700,7 +13659,7 @@
 </p:sld>
 </file>
 
-<file path=ppt/slides/slide11.xml><?xml version="1.0" encoding="utf-8"?>
+<file path=ppt/slides/slide12.xml><?xml version="1.0" encoding="utf-8"?>
 <p:sld xmlns:a="http://schemas.openxmlformats.org/drawingml/2006/main" xmlns:r="http://schemas.openxmlformats.org/officeDocument/2006/relationships" xmlns:p="http://schemas.openxmlformats.org/presentationml/2006/main">
   <p:cSld>
     <p:bg>
@@ -12989,7 +15948,7 @@
 </p:sld>
 </file>
 
-<file path=ppt/slides/slide12.xml><?xml version="1.0" encoding="utf-8"?>
+<file path=ppt/slides/slide13.xml><?xml version="1.0" encoding="utf-8"?>
 <p:sld xmlns:a="http://schemas.openxmlformats.org/drawingml/2006/main" xmlns:r="http://schemas.openxmlformats.org/officeDocument/2006/relationships" xmlns:p="http://schemas.openxmlformats.org/presentationml/2006/main">
   <p:cSld>
     <p:bg>
@@ -15402,7 +18361,473 @@
 </p:sld>
 </file>
 
-<file path=ppt/slides/slide13.xml><?xml version="1.0" encoding="utf-8"?>
+<file path=ppt/slides/slide14.xml><?xml version="1.0" encoding="utf-8"?>
+<p:sld xmlns:a="http://schemas.openxmlformats.org/drawingml/2006/main" xmlns:r="http://schemas.openxmlformats.org/officeDocument/2006/relationships" xmlns:p="http://schemas.openxmlformats.org/presentationml/2006/main">
+  <p:cSld>
+    <p:bg>
+      <p:bgPr>
+        <a:solidFill>
+          <a:schemeClr val="bg1">
+            <a:tint val="95000"/>
+            <a:satMod val="170000"/>
+          </a:schemeClr>
+        </a:solidFill>
+        <a:effectLst/>
+      </p:bgPr>
+    </p:bg>
+    <p:spTree>
+      <p:nvGrpSpPr>
+        <p:cNvPr id="1" name=""/>
+        <p:cNvGrpSpPr/>
+        <p:nvPr/>
+      </p:nvGrpSpPr>
+      <p:grpSpPr>
+        <a:xfrm>
+          <a:off x="0" y="0"/>
+          <a:ext cx="0" cy="0"/>
+          <a:chOff x="0" y="0"/>
+          <a:chExt cx="0" cy="0"/>
+        </a:xfrm>
+      </p:grpSpPr>
+      <p:sp useBgFill="1">
+        <p:nvSpPr>
+          <p:cNvPr id="8" name="Rectangle 7">
+            <a:extLst>
+              <a:ext uri="{FF2B5EF4-FFF2-40B4-BE49-F238E27FC236}">
+                <a16:creationId xmlns:a16="http://schemas.microsoft.com/office/drawing/2014/main" id="{5DB0431E-0B04-44A1-9C51-531E28D18A60}"/>
+              </a:ext>
+              <a:ext uri="{C183D7F6-B498-43B3-948B-1728B52AA6E4}">
+                <adec:decorative xmlns:adec="http://schemas.microsoft.com/office/drawing/2017/decorative" val="1"/>
+              </a:ext>
+            </a:extLst>
+          </p:cNvPr>
+          <p:cNvSpPr>
+            <a:spLocks noGrp="1" noRot="1" noChangeAspect="1" noMove="1" noResize="1" noEditPoints="1" noAdjustHandles="1" noChangeArrowheads="1" noChangeShapeType="1" noTextEdit="1"/>
+          </p:cNvSpPr>
+          <p:nvPr>
+            <p:extLst>
+              <p:ext uri="{386F3935-93C4-4BCD-93E2-E3B085C9AB24}">
+                <p16:designElem xmlns:p16="http://schemas.microsoft.com/office/powerpoint/2015/main" val="1"/>
+              </p:ext>
+            </p:extLst>
+          </p:nvPr>
+        </p:nvSpPr>
+        <p:spPr>
+          <a:xfrm>
+            <a:off x="0" y="0"/>
+            <a:ext cx="12192000" cy="6858000"/>
+          </a:xfrm>
+          <a:prstGeom prst="rect">
+            <a:avLst/>
+          </a:prstGeom>
+          <a:ln>
+            <a:noFill/>
+          </a:ln>
+        </p:spPr>
+        <p:style>
+          <a:lnRef idx="2">
+            <a:schemeClr val="accent1">
+              <a:shade val="50000"/>
+            </a:schemeClr>
+          </a:lnRef>
+          <a:fillRef idx="1">
+            <a:schemeClr val="accent1"/>
+          </a:fillRef>
+          <a:effectRef idx="0">
+            <a:schemeClr val="accent1"/>
+          </a:effectRef>
+          <a:fontRef idx="minor">
+            <a:schemeClr val="lt1"/>
+          </a:fontRef>
+        </p:style>
+        <p:txBody>
+          <a:bodyPr rtlCol="0" anchor="ctr"/>
+          <a:lstStyle/>
+          <a:p>
+            <a:pPr algn="ctr"/>
+            <a:endParaRPr lang="en-US"/>
+          </a:p>
+        </p:txBody>
+      </p:sp>
+      <p:sp>
+        <p:nvSpPr>
+          <p:cNvPr id="2" name="Nadpis 1">
+            <a:extLst>
+              <a:ext uri="{FF2B5EF4-FFF2-40B4-BE49-F238E27FC236}">
+                <a16:creationId xmlns:a16="http://schemas.microsoft.com/office/drawing/2014/main" id="{ACC0826E-826D-C367-2F66-29E6BD9174A7}"/>
+              </a:ext>
+            </a:extLst>
+          </p:cNvPr>
+          <p:cNvSpPr>
+            <a:spLocks noGrp="1"/>
+          </p:cNvSpPr>
+          <p:nvPr>
+            <p:ph type="title"/>
+          </p:nvPr>
+        </p:nvSpPr>
+        <p:spPr>
+          <a:xfrm>
+            <a:off x="1261872" y="365760"/>
+            <a:ext cx="9692640" cy="1325562"/>
+          </a:xfrm>
+        </p:spPr>
+        <p:txBody>
+          <a:bodyPr>
+            <a:normAutofit/>
+          </a:bodyPr>
+          <a:lstStyle/>
+          <a:p>
+            <a:r>
+              <a:rPr lang="en-US" dirty="0" err="1"/>
+              <a:t>Modely</a:t>
+            </a:r>
+            <a:endParaRPr lang="sk-SK" dirty="0"/>
+          </a:p>
+        </p:txBody>
+      </p:sp>
+      <p:sp>
+        <p:nvSpPr>
+          <p:cNvPr id="3" name="Zástupný objekt pre obsah 2">
+            <a:extLst>
+              <a:ext uri="{FF2B5EF4-FFF2-40B4-BE49-F238E27FC236}">
+                <a16:creationId xmlns:a16="http://schemas.microsoft.com/office/drawing/2014/main" id="{46CF00A3-6BFB-0ED5-EA46-86B5391252ED}"/>
+              </a:ext>
+            </a:extLst>
+          </p:cNvPr>
+          <p:cNvSpPr>
+            <a:spLocks noGrp="1"/>
+          </p:cNvSpPr>
+          <p:nvPr>
+            <p:ph idx="1"/>
+          </p:nvPr>
+        </p:nvSpPr>
+        <p:spPr>
+          <a:xfrm>
+            <a:off x="1261872" y="1828800"/>
+            <a:ext cx="8595360" cy="4351337"/>
+          </a:xfrm>
+        </p:spPr>
+        <p:txBody>
+          <a:bodyPr>
+            <a:normAutofit/>
+          </a:bodyPr>
+          <a:lstStyle/>
+          <a:p>
+            <a:endParaRPr lang="sk-SK"/>
+          </a:p>
+        </p:txBody>
+      </p:sp>
+      <p:sp>
+        <p:nvSpPr>
+          <p:cNvPr id="10" name="Rectangle 9">
+            <a:extLst>
+              <a:ext uri="{FF2B5EF4-FFF2-40B4-BE49-F238E27FC236}">
+                <a16:creationId xmlns:a16="http://schemas.microsoft.com/office/drawing/2014/main" id="{6B424749-EEE0-49C9-9ABF-97B171A3EA00}"/>
+              </a:ext>
+              <a:ext uri="{C183D7F6-B498-43B3-948B-1728B52AA6E4}">
+                <adec:decorative xmlns:adec="http://schemas.microsoft.com/office/drawing/2017/decorative" val="1"/>
+              </a:ext>
+            </a:extLst>
+          </p:cNvPr>
+          <p:cNvSpPr>
+            <a:spLocks noGrp="1" noRot="1" noChangeAspect="1" noMove="1" noResize="1" noEditPoints="1" noAdjustHandles="1" noChangeArrowheads="1" noChangeShapeType="1" noTextEdit="1"/>
+          </p:cNvSpPr>
+          <p:nvPr>
+            <p:extLst>
+              <p:ext uri="{386F3935-93C4-4BCD-93E2-E3B085C9AB24}">
+                <p16:designElem xmlns:p16="http://schemas.microsoft.com/office/powerpoint/2015/main" val="1"/>
+              </p:ext>
+            </p:extLst>
+          </p:nvPr>
+        </p:nvSpPr>
+        <p:spPr>
+          <a:xfrm>
+            <a:off x="11277600" y="0"/>
+            <a:ext cx="914400" cy="6858000"/>
+          </a:xfrm>
+          <a:prstGeom prst="rect">
+            <a:avLst/>
+          </a:prstGeom>
+          <a:solidFill>
+            <a:schemeClr val="tx2">
+              <a:lumMod val="75000"/>
+            </a:schemeClr>
+          </a:solidFill>
+          <a:ln>
+            <a:noFill/>
+          </a:ln>
+        </p:spPr>
+        <p:style>
+          <a:lnRef idx="2">
+            <a:schemeClr val="accent1">
+              <a:shade val="50000"/>
+            </a:schemeClr>
+          </a:lnRef>
+          <a:fillRef idx="1">
+            <a:schemeClr val="accent1"/>
+          </a:fillRef>
+          <a:effectRef idx="0">
+            <a:schemeClr val="accent1"/>
+          </a:effectRef>
+          <a:fontRef idx="minor">
+            <a:schemeClr val="lt1"/>
+          </a:fontRef>
+        </p:style>
+        <p:txBody>
+          <a:bodyPr/>
+          <a:lstStyle/>
+          <a:p>
+            <a:endParaRPr lang="sk-SK"/>
+          </a:p>
+        </p:txBody>
+      </p:sp>
+    </p:spTree>
+    <p:extLst>
+      <p:ext uri="{BB962C8B-B14F-4D97-AF65-F5344CB8AC3E}">
+        <p14:creationId xmlns:p14="http://schemas.microsoft.com/office/powerpoint/2010/main" val="3330815943"/>
+      </p:ext>
+    </p:extLst>
+  </p:cSld>
+  <p:clrMapOvr>
+    <a:overrideClrMapping bg1="dk1" tx1="lt1" bg2="dk2" tx2="lt2" accent1="accent1" accent2="accent2" accent3="accent3" accent4="accent4" accent5="accent5" accent6="accent6" hlink="hlink" folHlink="folHlink"/>
+  </p:clrMapOvr>
+</p:sld>
+</file>
+
+<file path=ppt/slides/slide15.xml><?xml version="1.0" encoding="utf-8"?>
+<p:sld xmlns:a="http://schemas.openxmlformats.org/drawingml/2006/main" xmlns:r="http://schemas.openxmlformats.org/officeDocument/2006/relationships" xmlns:p="http://schemas.openxmlformats.org/presentationml/2006/main">
+  <p:cSld>
+    <p:bg>
+      <p:bgPr>
+        <a:solidFill>
+          <a:schemeClr val="bg1">
+            <a:tint val="95000"/>
+            <a:satMod val="170000"/>
+          </a:schemeClr>
+        </a:solidFill>
+        <a:effectLst/>
+      </p:bgPr>
+    </p:bg>
+    <p:spTree>
+      <p:nvGrpSpPr>
+        <p:cNvPr id="1" name=""/>
+        <p:cNvGrpSpPr/>
+        <p:nvPr/>
+      </p:nvGrpSpPr>
+      <p:grpSpPr>
+        <a:xfrm>
+          <a:off x="0" y="0"/>
+          <a:ext cx="0" cy="0"/>
+          <a:chOff x="0" y="0"/>
+          <a:chExt cx="0" cy="0"/>
+        </a:xfrm>
+      </p:grpSpPr>
+      <p:sp useBgFill="1">
+        <p:nvSpPr>
+          <p:cNvPr id="8" name="Rectangle 7">
+            <a:extLst>
+              <a:ext uri="{FF2B5EF4-FFF2-40B4-BE49-F238E27FC236}">
+                <a16:creationId xmlns:a16="http://schemas.microsoft.com/office/drawing/2014/main" id="{5DB0431E-0B04-44A1-9C51-531E28D18A60}"/>
+              </a:ext>
+              <a:ext uri="{C183D7F6-B498-43B3-948B-1728B52AA6E4}">
+                <adec:decorative xmlns:adec="http://schemas.microsoft.com/office/drawing/2017/decorative" val="1"/>
+              </a:ext>
+            </a:extLst>
+          </p:cNvPr>
+          <p:cNvSpPr>
+            <a:spLocks noGrp="1" noRot="1" noChangeAspect="1" noMove="1" noResize="1" noEditPoints="1" noAdjustHandles="1" noChangeArrowheads="1" noChangeShapeType="1" noTextEdit="1"/>
+          </p:cNvSpPr>
+          <p:nvPr>
+            <p:extLst>
+              <p:ext uri="{386F3935-93C4-4BCD-93E2-E3B085C9AB24}">
+                <p16:designElem xmlns:p16="http://schemas.microsoft.com/office/powerpoint/2015/main" val="1"/>
+              </p:ext>
+            </p:extLst>
+          </p:nvPr>
+        </p:nvSpPr>
+        <p:spPr>
+          <a:xfrm>
+            <a:off x="0" y="0"/>
+            <a:ext cx="12192000" cy="6858000"/>
+          </a:xfrm>
+          <a:prstGeom prst="rect">
+            <a:avLst/>
+          </a:prstGeom>
+          <a:ln>
+            <a:noFill/>
+          </a:ln>
+        </p:spPr>
+        <p:style>
+          <a:lnRef idx="2">
+            <a:schemeClr val="accent1">
+              <a:shade val="50000"/>
+            </a:schemeClr>
+          </a:lnRef>
+          <a:fillRef idx="1">
+            <a:schemeClr val="accent1"/>
+          </a:fillRef>
+          <a:effectRef idx="0">
+            <a:schemeClr val="accent1"/>
+          </a:effectRef>
+          <a:fontRef idx="minor">
+            <a:schemeClr val="lt1"/>
+          </a:fontRef>
+        </p:style>
+        <p:txBody>
+          <a:bodyPr rtlCol="0" anchor="ctr"/>
+          <a:lstStyle/>
+          <a:p>
+            <a:pPr algn="ctr"/>
+            <a:endParaRPr lang="en-US"/>
+          </a:p>
+        </p:txBody>
+      </p:sp>
+      <p:sp>
+        <p:nvSpPr>
+          <p:cNvPr id="2" name="Nadpis 1">
+            <a:extLst>
+              <a:ext uri="{FF2B5EF4-FFF2-40B4-BE49-F238E27FC236}">
+                <a16:creationId xmlns:a16="http://schemas.microsoft.com/office/drawing/2014/main" id="{5D06E5A4-CA2C-4C05-DE62-344F3E0640DA}"/>
+              </a:ext>
+            </a:extLst>
+          </p:cNvPr>
+          <p:cNvSpPr>
+            <a:spLocks noGrp="1"/>
+          </p:cNvSpPr>
+          <p:nvPr>
+            <p:ph type="title"/>
+          </p:nvPr>
+        </p:nvSpPr>
+        <p:spPr>
+          <a:xfrm>
+            <a:off x="1261872" y="365760"/>
+            <a:ext cx="9692640" cy="1325562"/>
+          </a:xfrm>
+        </p:spPr>
+        <p:txBody>
+          <a:bodyPr>
+            <a:normAutofit/>
+          </a:bodyPr>
+          <a:lstStyle/>
+          <a:p>
+            <a:r>
+              <a:rPr lang="en-US" dirty="0" err="1"/>
+              <a:t>Modely</a:t>
+            </a:r>
+            <a:endParaRPr lang="sk-SK" dirty="0"/>
+          </a:p>
+        </p:txBody>
+      </p:sp>
+      <p:sp>
+        <p:nvSpPr>
+          <p:cNvPr id="3" name="Zástupný objekt pre obsah 2">
+            <a:extLst>
+              <a:ext uri="{FF2B5EF4-FFF2-40B4-BE49-F238E27FC236}">
+                <a16:creationId xmlns:a16="http://schemas.microsoft.com/office/drawing/2014/main" id="{2E9EB7C3-C42A-1F3A-EF52-5BD0463CDBAA}"/>
+              </a:ext>
+            </a:extLst>
+          </p:cNvPr>
+          <p:cNvSpPr>
+            <a:spLocks noGrp="1"/>
+          </p:cNvSpPr>
+          <p:nvPr>
+            <p:ph idx="1"/>
+          </p:nvPr>
+        </p:nvSpPr>
+        <p:spPr>
+          <a:xfrm>
+            <a:off x="1261872" y="1828800"/>
+            <a:ext cx="8595360" cy="4351337"/>
+          </a:xfrm>
+        </p:spPr>
+        <p:txBody>
+          <a:bodyPr>
+            <a:normAutofit/>
+          </a:bodyPr>
+          <a:lstStyle/>
+          <a:p>
+            <a:endParaRPr lang="sk-SK"/>
+          </a:p>
+        </p:txBody>
+      </p:sp>
+      <p:sp>
+        <p:nvSpPr>
+          <p:cNvPr id="10" name="Rectangle 9">
+            <a:extLst>
+              <a:ext uri="{FF2B5EF4-FFF2-40B4-BE49-F238E27FC236}">
+                <a16:creationId xmlns:a16="http://schemas.microsoft.com/office/drawing/2014/main" id="{6B424749-EEE0-49C9-9ABF-97B171A3EA00}"/>
+              </a:ext>
+              <a:ext uri="{C183D7F6-B498-43B3-948B-1728B52AA6E4}">
+                <adec:decorative xmlns:adec="http://schemas.microsoft.com/office/drawing/2017/decorative" val="1"/>
+              </a:ext>
+            </a:extLst>
+          </p:cNvPr>
+          <p:cNvSpPr>
+            <a:spLocks noGrp="1" noRot="1" noChangeAspect="1" noMove="1" noResize="1" noEditPoints="1" noAdjustHandles="1" noChangeArrowheads="1" noChangeShapeType="1" noTextEdit="1"/>
+          </p:cNvSpPr>
+          <p:nvPr>
+            <p:extLst>
+              <p:ext uri="{386F3935-93C4-4BCD-93E2-E3B085C9AB24}">
+                <p16:designElem xmlns:p16="http://schemas.microsoft.com/office/powerpoint/2015/main" val="1"/>
+              </p:ext>
+            </p:extLst>
+          </p:nvPr>
+        </p:nvSpPr>
+        <p:spPr>
+          <a:xfrm>
+            <a:off x="11277600" y="0"/>
+            <a:ext cx="914400" cy="6858000"/>
+          </a:xfrm>
+          <a:prstGeom prst="rect">
+            <a:avLst/>
+          </a:prstGeom>
+          <a:solidFill>
+            <a:schemeClr val="tx2">
+              <a:lumMod val="75000"/>
+            </a:schemeClr>
+          </a:solidFill>
+          <a:ln>
+            <a:noFill/>
+          </a:ln>
+        </p:spPr>
+        <p:style>
+          <a:lnRef idx="2">
+            <a:schemeClr val="accent1">
+              <a:shade val="50000"/>
+            </a:schemeClr>
+          </a:lnRef>
+          <a:fillRef idx="1">
+            <a:schemeClr val="accent1"/>
+          </a:fillRef>
+          <a:effectRef idx="0">
+            <a:schemeClr val="accent1"/>
+          </a:effectRef>
+          <a:fontRef idx="minor">
+            <a:schemeClr val="lt1"/>
+          </a:fontRef>
+        </p:style>
+        <p:txBody>
+          <a:bodyPr/>
+          <a:lstStyle/>
+          <a:p>
+            <a:endParaRPr lang="sk-SK"/>
+          </a:p>
+        </p:txBody>
+      </p:sp>
+    </p:spTree>
+    <p:extLst>
+      <p:ext uri="{BB962C8B-B14F-4D97-AF65-F5344CB8AC3E}">
+        <p14:creationId xmlns:p14="http://schemas.microsoft.com/office/powerpoint/2010/main" val="1572487080"/>
+      </p:ext>
+    </p:extLst>
+  </p:cSld>
+  <p:clrMapOvr>
+    <a:overrideClrMapping bg1="dk1" tx1="lt1" bg2="dk2" tx2="lt2" accent1="accent1" accent2="accent2" accent3="accent3" accent4="accent4" accent5="accent5" accent6="accent6" hlink="hlink" folHlink="folHlink"/>
+  </p:clrMapOvr>
+</p:sld>
+</file>
+
+<file path=ppt/slides/slide16.xml><?xml version="1.0" encoding="utf-8"?>
 <p:sld xmlns:a="http://schemas.openxmlformats.org/drawingml/2006/main" xmlns:r="http://schemas.openxmlformats.org/officeDocument/2006/relationships" xmlns:p="http://schemas.openxmlformats.org/presentationml/2006/main">
   <p:cSld>
     <p:bg>
@@ -15694,7 +19119,7 @@
 </p:sld>
 </file>
 
-<file path=ppt/slides/slide14.xml><?xml version="1.0" encoding="utf-8"?>
+<file path=ppt/slides/slide17.xml><?xml version="1.0" encoding="utf-8"?>
 <p:sld xmlns:a="http://schemas.openxmlformats.org/drawingml/2006/main" xmlns:r="http://schemas.openxmlformats.org/officeDocument/2006/relationships" xmlns:p="http://schemas.openxmlformats.org/presentationml/2006/main">
   <p:cSld>
     <p:bg>
@@ -15998,7 +19423,7 @@
 </p:sld>
 </file>
 
-<file path=ppt/slides/slide15.xml><?xml version="1.0" encoding="utf-8"?>
+<file path=ppt/slides/slide18.xml><?xml version="1.0" encoding="utf-8"?>
 <p:sld xmlns:a="http://schemas.openxmlformats.org/drawingml/2006/main" xmlns:r="http://schemas.openxmlformats.org/officeDocument/2006/relationships" xmlns:p="http://schemas.openxmlformats.org/presentationml/2006/main">
   <p:cSld>
     <p:bg>
@@ -18787,7 +22212,10 @@
     <p:bg>
       <p:bgPr>
         <a:solidFill>
-          <a:schemeClr val="bg1"/>
+          <a:schemeClr val="bg1">
+            <a:tint val="95000"/>
+            <a:satMod val="170000"/>
+          </a:schemeClr>
         </a:solidFill>
         <a:effectLst/>
       </p:bgPr>
@@ -18806,12 +22234,12 @@
           <a:chExt cx="0" cy="0"/>
         </a:xfrm>
       </p:grpSpPr>
-      <p:sp>
+      <p:sp useBgFill="1">
         <p:nvSpPr>
-          <p:cNvPr id="15" name="Rectangle 14">
+          <p:cNvPr id="8" name="Rectangle 7">
             <a:extLst>
               <a:ext uri="{FF2B5EF4-FFF2-40B4-BE49-F238E27FC236}">
-                <a16:creationId xmlns:a16="http://schemas.microsoft.com/office/drawing/2014/main" id="{30B3D270-B19D-4DB8-BD3C-3E707485B515}"/>
+                <a16:creationId xmlns:a16="http://schemas.microsoft.com/office/drawing/2014/main" id="{5DB0431E-0B04-44A1-9C51-531E28D18A60}"/>
               </a:ext>
               <a:ext uri="{C183D7F6-B498-43B3-948B-1728B52AA6E4}">
                 <adec:decorative xmlns:adec="http://schemas.microsoft.com/office/drawing/2017/decorative" val="1"/>
@@ -18831,28 +22259,27 @@
         </p:nvSpPr>
         <p:spPr>
           <a:xfrm>
-            <a:off x="1" y="0"/>
-            <a:ext cx="4055416" cy="6858000"/>
+            <a:off x="0" y="0"/>
+            <a:ext cx="12192000" cy="6858000"/>
           </a:xfrm>
           <a:prstGeom prst="rect">
             <a:avLst/>
           </a:prstGeom>
-          <a:solidFill>
-            <a:schemeClr val="accent1"/>
-          </a:solidFill>
           <a:ln>
             <a:noFill/>
           </a:ln>
         </p:spPr>
         <p:style>
-          <a:lnRef idx="0">
-            <a:scrgbClr r="0" g="0" b="0"/>
+          <a:lnRef idx="2">
+            <a:schemeClr val="accent1">
+              <a:shade val="50000"/>
+            </a:schemeClr>
           </a:lnRef>
-          <a:fillRef idx="0">
-            <a:scrgbClr r="0" g="0" b="0"/>
+          <a:fillRef idx="1">
+            <a:schemeClr val="accent1"/>
           </a:fillRef>
           <a:effectRef idx="0">
-            <a:scrgbClr r="0" g="0" b="0"/>
+            <a:schemeClr val="accent1"/>
           </a:effectRef>
           <a:fontRef idx="minor">
             <a:schemeClr val="lt1"/>
@@ -18872,7 +22299,7 @@
           <p:cNvPr id="2" name="Nadpis 1">
             <a:extLst>
               <a:ext uri="{FF2B5EF4-FFF2-40B4-BE49-F238E27FC236}">
-                <a16:creationId xmlns:a16="http://schemas.microsoft.com/office/drawing/2014/main" id="{7C415DD9-6519-CFF2-BE3D-91D66C88A154}"/>
+                <a16:creationId xmlns:a16="http://schemas.microsoft.com/office/drawing/2014/main" id="{8751EAB9-393C-D10C-1242-AE43CE1D885D}"/>
               </a:ext>
             </a:extLst>
           </p:cNvPr>
@@ -18885,35 +22312,38 @@
         </p:nvSpPr>
         <p:spPr>
           <a:xfrm>
-            <a:off x="566058" y="836023"/>
-            <a:ext cx="2718788" cy="5183777"/>
+            <a:off x="1249680" y="2330791"/>
+            <a:ext cx="9692640" cy="1325562"/>
           </a:xfrm>
         </p:spPr>
         <p:txBody>
-          <a:bodyPr anchor="ctr">
+          <a:bodyPr>
             <a:normAutofit/>
           </a:bodyPr>
           <a:lstStyle/>
           <a:p>
+            <a:pPr algn="ctr"/>
             <a:r>
-              <a:rPr lang="sk-SK" sz="3600" dirty="0">
-                <a:solidFill>
-                  <a:srgbClr val="FFFFFF"/>
-                </a:solidFill>
-                <a:latin typeface="Arial" panose="020B0604020202020204" pitchFamily="34" charset="0"/>
-                <a:cs typeface="Arial" panose="020B0604020202020204" pitchFamily="34" charset="0"/>
-              </a:rPr>
-              <a:t>Vplyv permutácie textu na pozičné slovné siete</a:t>
+              <a:rPr lang="en-US" dirty="0"/>
+              <a:t>Po</a:t>
+            </a:r>
+            <a:r>
+              <a:rPr lang="sk-SK" dirty="0" err="1"/>
+              <a:t>čiatočná</a:t>
+            </a:r>
+            <a:r>
+              <a:rPr lang="sk-SK" dirty="0"/>
+              <a:t> analýza</a:t>
             </a:r>
           </a:p>
         </p:txBody>
       </p:sp>
       <p:sp>
         <p:nvSpPr>
-          <p:cNvPr id="17" name="Rectangle 16">
+          <p:cNvPr id="10" name="Rectangle 9">
             <a:extLst>
               <a:ext uri="{FF2B5EF4-FFF2-40B4-BE49-F238E27FC236}">
-                <a16:creationId xmlns:a16="http://schemas.microsoft.com/office/drawing/2014/main" id="{49BDAF94-B52E-4307-B54C-EF413086FC77}"/>
+                <a16:creationId xmlns:a16="http://schemas.microsoft.com/office/drawing/2014/main" id="{6B424749-EEE0-49C9-9ABF-97B171A3EA00}"/>
               </a:ext>
               <a:ext uri="{C183D7F6-B498-43B3-948B-1728B52AA6E4}">
                 <adec:decorative xmlns:adec="http://schemas.microsoft.com/office/drawing/2017/decorative" val="1"/>
@@ -18933,7 +22363,7 @@
         </p:nvSpPr>
         <p:spPr>
           <a:xfrm>
-            <a:off x="11292840" y="0"/>
+            <a:off x="11277600" y="0"/>
             <a:ext cx="914400" cy="6858000"/>
           </a:xfrm>
           <a:prstGeom prst="rect">
@@ -18972,2762 +22402,15 @@
           </a:p>
         </p:txBody>
       </p:sp>
-      <p:graphicFrame>
-        <p:nvGraphicFramePr>
-          <p:cNvPr id="4" name="Zástupný objekt pre obsah 3">
-            <a:extLst>
-              <a:ext uri="{FF2B5EF4-FFF2-40B4-BE49-F238E27FC236}">
-                <a16:creationId xmlns:a16="http://schemas.microsoft.com/office/drawing/2014/main" id="{0A3A922A-B8F0-3FBF-5EA0-821A8637E616}"/>
-              </a:ext>
-            </a:extLst>
-          </p:cNvPr>
-          <p:cNvGraphicFramePr>
-            <a:graphicFrameLocks noGrp="1"/>
-          </p:cNvGraphicFramePr>
-          <p:nvPr>
-            <p:ph idx="1"/>
-            <p:extLst>
-              <p:ext uri="{D42A27DB-BD31-4B8C-83A1-F6EECF244321}">
-                <p14:modId xmlns:p14="http://schemas.microsoft.com/office/powerpoint/2010/main" val="4206292045"/>
-              </p:ext>
-            </p:extLst>
-          </p:nvPr>
-        </p:nvGraphicFramePr>
-        <p:xfrm>
-          <a:off x="4801440" y="804672"/>
-          <a:ext cx="5704887" cy="5262069"/>
-        </p:xfrm>
-        <a:graphic>
-          <a:graphicData uri="http://schemas.openxmlformats.org/drawingml/2006/table">
-            <a:tbl>
-              <a:tblPr/>
-              <a:tblGrid>
-                <a:gridCol w="2067292">
-                  <a:extLst>
-                    <a:ext uri="{9D8B030D-6E8A-4147-A177-3AD203B41FA5}">
-                      <a16:colId xmlns:a16="http://schemas.microsoft.com/office/drawing/2014/main" val="1522675971"/>
-                    </a:ext>
-                  </a:extLst>
-                </a:gridCol>
-                <a:gridCol w="948301">
-                  <a:extLst>
-                    <a:ext uri="{9D8B030D-6E8A-4147-A177-3AD203B41FA5}">
-                      <a16:colId xmlns:a16="http://schemas.microsoft.com/office/drawing/2014/main" val="1411456153"/>
-                    </a:ext>
-                  </a:extLst>
-                </a:gridCol>
-                <a:gridCol w="1490312">
-                  <a:extLst>
-                    <a:ext uri="{9D8B030D-6E8A-4147-A177-3AD203B41FA5}">
-                      <a16:colId xmlns:a16="http://schemas.microsoft.com/office/drawing/2014/main" val="3791115676"/>
-                    </a:ext>
-                  </a:extLst>
-                </a:gridCol>
-                <a:gridCol w="1198982">
-                  <a:extLst>
-                    <a:ext uri="{9D8B030D-6E8A-4147-A177-3AD203B41FA5}">
-                      <a16:colId xmlns:a16="http://schemas.microsoft.com/office/drawing/2014/main" val="3788277443"/>
-                    </a:ext>
-                  </a:extLst>
-                </a:gridCol>
-              </a:tblGrid>
-              <a:tr h="276951">
-                <a:tc>
-                  <a:txBody>
-                    <a:bodyPr/>
-                    <a:lstStyle/>
-                    <a:p>
-                      <a:pPr algn="l" fontAlgn="ctr">
-                        <a:buNone/>
-                      </a:pPr>
-                      <a:endParaRPr lang="sk-SK" sz="1200" b="0" i="0" u="none" strike="noStrike" dirty="0">
-                        <a:effectLst/>
-                        <a:latin typeface="Arial" panose="020B0604020202020204" pitchFamily="34" charset="0"/>
-                      </a:endParaRPr>
-                    </a:p>
-                  </a:txBody>
-                  <a:tcPr marL="62943" marR="62943" marT="31472" marB="31472" anchor="ctr">
-                    <a:lnL>
-                      <a:noFill/>
-                    </a:lnL>
-                    <a:lnR>
-                      <a:noFill/>
-                    </a:lnR>
-                    <a:lnT>
-                      <a:noFill/>
-                    </a:lnT>
-                    <a:lnB>
-                      <a:noFill/>
-                    </a:lnB>
-                    <a:noFill/>
-                  </a:tcPr>
-                </a:tc>
-                <a:tc>
-                  <a:txBody>
-                    <a:bodyPr/>
-                    <a:lstStyle/>
-                    <a:p>
-                      <a:pPr algn="r" fontAlgn="ctr">
-                        <a:buNone/>
-                      </a:pPr>
-                      <a:r>
-                        <a:rPr lang="sk-SK" sz="1200" b="0" i="0" u="none" strike="noStrike">
-                          <a:effectLst/>
-                          <a:latin typeface="Arial" panose="020B0604020202020204" pitchFamily="34" charset="0"/>
-                        </a:rPr>
-                        <a:t>No Shuffle</a:t>
-                      </a:r>
-                    </a:p>
-                  </a:txBody>
-                  <a:tcPr marL="62943" marR="62943" marT="31472" marB="31472" anchor="ctr">
-                    <a:lnL>
-                      <a:noFill/>
-                    </a:lnL>
-                    <a:lnR>
-                      <a:noFill/>
-                    </a:lnR>
-                    <a:lnT>
-                      <a:noFill/>
-                    </a:lnT>
-                    <a:lnB>
-                      <a:noFill/>
-                    </a:lnB>
-                    <a:noFill/>
-                  </a:tcPr>
-                </a:tc>
-                <a:tc>
-                  <a:txBody>
-                    <a:bodyPr/>
-                    <a:lstStyle/>
-                    <a:p>
-                      <a:pPr algn="r" fontAlgn="ctr">
-                        <a:buNone/>
-                      </a:pPr>
-                      <a:r>
-                        <a:rPr lang="sk-SK" sz="1200" b="0" i="0" u="none" strike="noStrike">
-                          <a:effectLst/>
-                          <a:latin typeface="Arial" panose="020B0604020202020204" pitchFamily="34" charset="0"/>
-                        </a:rPr>
-                        <a:t>Shuffle Sentences</a:t>
-                      </a:r>
-                    </a:p>
-                  </a:txBody>
-                  <a:tcPr marL="62943" marR="62943" marT="31472" marB="31472" anchor="ctr">
-                    <a:lnL>
-                      <a:noFill/>
-                    </a:lnL>
-                    <a:lnR>
-                      <a:noFill/>
-                    </a:lnR>
-                    <a:lnT>
-                      <a:noFill/>
-                    </a:lnT>
-                    <a:lnB>
-                      <a:noFill/>
-                    </a:lnB>
-                    <a:noFill/>
-                  </a:tcPr>
-                </a:tc>
-                <a:tc>
-                  <a:txBody>
-                    <a:bodyPr/>
-                    <a:lstStyle/>
-                    <a:p>
-                      <a:pPr algn="r" fontAlgn="ctr">
-                        <a:buNone/>
-                      </a:pPr>
-                      <a:r>
-                        <a:rPr lang="sk-SK" sz="1200" b="0" i="0" u="none" strike="noStrike">
-                          <a:effectLst/>
-                          <a:latin typeface="Arial" panose="020B0604020202020204" pitchFamily="34" charset="0"/>
-                        </a:rPr>
-                        <a:t>Shuffle Words</a:t>
-                      </a:r>
-                    </a:p>
-                  </a:txBody>
-                  <a:tcPr marL="62943" marR="62943" marT="31472" marB="31472" anchor="ctr">
-                    <a:lnL>
-                      <a:noFill/>
-                    </a:lnL>
-                    <a:lnR>
-                      <a:noFill/>
-                    </a:lnR>
-                    <a:lnT>
-                      <a:noFill/>
-                    </a:lnT>
-                    <a:lnB>
-                      <a:noFill/>
-                    </a:lnB>
-                    <a:noFill/>
-                  </a:tcPr>
-                </a:tc>
-                <a:extLst>
-                  <a:ext uri="{0D108BD9-81ED-4DB2-BD59-A6C34878D82A}">
-                    <a16:rowId xmlns:a16="http://schemas.microsoft.com/office/drawing/2014/main" val="2692878573"/>
-                  </a:ext>
-                </a:extLst>
-              </a:tr>
-              <a:tr h="276951">
-                <a:tc>
-                  <a:txBody>
-                    <a:bodyPr/>
-                    <a:lstStyle/>
-                    <a:p>
-                      <a:pPr algn="l" fontAlgn="ctr">
-                        <a:buNone/>
-                      </a:pPr>
-                      <a:r>
-                        <a:rPr lang="sk-SK" sz="1200" b="0" i="0" u="none" strike="noStrike">
-                          <a:effectLst/>
-                          <a:latin typeface="Arial" panose="020B0604020202020204" pitchFamily="34" charset="0"/>
-                        </a:rPr>
-                        <a:t>Number of nodes</a:t>
-                      </a:r>
-                    </a:p>
-                  </a:txBody>
-                  <a:tcPr marL="62943" marR="62943" marT="31472" marB="31472" anchor="ctr">
-                    <a:lnL>
-                      <a:noFill/>
-                    </a:lnL>
-                    <a:lnR>
-                      <a:noFill/>
-                    </a:lnR>
-                    <a:lnT>
-                      <a:noFill/>
-                    </a:lnT>
-                    <a:lnB>
-                      <a:noFill/>
-                    </a:lnB>
-                    <a:noFill/>
-                  </a:tcPr>
-                </a:tc>
-                <a:tc>
-                  <a:txBody>
-                    <a:bodyPr/>
-                    <a:lstStyle/>
-                    <a:p>
-                      <a:pPr algn="r" fontAlgn="ctr">
-                        <a:buNone/>
-                      </a:pPr>
-                      <a:r>
-                        <a:rPr lang="sk-SK" sz="1200" b="0" i="0" u="none" strike="noStrike">
-                          <a:effectLst/>
-                          <a:latin typeface="Arial" panose="020B0604020202020204" pitchFamily="34" charset="0"/>
-                        </a:rPr>
-                        <a:t>3230</a:t>
-                      </a:r>
-                    </a:p>
-                  </a:txBody>
-                  <a:tcPr marL="62943" marR="62943" marT="31472" marB="31472" anchor="ctr">
-                    <a:lnL>
-                      <a:noFill/>
-                    </a:lnL>
-                    <a:lnR>
-                      <a:noFill/>
-                    </a:lnR>
-                    <a:lnT>
-                      <a:noFill/>
-                    </a:lnT>
-                    <a:lnB>
-                      <a:noFill/>
-                    </a:lnB>
-                    <a:noFill/>
-                  </a:tcPr>
-                </a:tc>
-                <a:tc>
-                  <a:txBody>
-                    <a:bodyPr/>
-                    <a:lstStyle/>
-                    <a:p>
-                      <a:pPr algn="r" fontAlgn="ctr">
-                        <a:buNone/>
-                      </a:pPr>
-                      <a:r>
-                        <a:rPr lang="sk-SK" sz="1200" b="0" i="0" u="none" strike="noStrike">
-                          <a:effectLst/>
-                          <a:latin typeface="Arial" panose="020B0604020202020204" pitchFamily="34" charset="0"/>
-                        </a:rPr>
-                        <a:t>3230</a:t>
-                      </a:r>
-                    </a:p>
-                  </a:txBody>
-                  <a:tcPr marL="62943" marR="62943" marT="31472" marB="31472" anchor="ctr">
-                    <a:lnL>
-                      <a:noFill/>
-                    </a:lnL>
-                    <a:lnR>
-                      <a:noFill/>
-                    </a:lnR>
-                    <a:lnT>
-                      <a:noFill/>
-                    </a:lnT>
-                    <a:lnB>
-                      <a:noFill/>
-                    </a:lnB>
-                    <a:noFill/>
-                  </a:tcPr>
-                </a:tc>
-                <a:tc>
-                  <a:txBody>
-                    <a:bodyPr/>
-                    <a:lstStyle/>
-                    <a:p>
-                      <a:pPr algn="r" fontAlgn="ctr">
-                        <a:buNone/>
-                      </a:pPr>
-                      <a:r>
-                        <a:rPr lang="sk-SK" sz="1200" b="0" i="0" u="none" strike="noStrike">
-                          <a:effectLst/>
-                          <a:latin typeface="Arial" panose="020B0604020202020204" pitchFamily="34" charset="0"/>
-                        </a:rPr>
-                        <a:t>3230</a:t>
-                      </a:r>
-                    </a:p>
-                  </a:txBody>
-                  <a:tcPr marL="62943" marR="62943" marT="31472" marB="31472" anchor="ctr">
-                    <a:lnL>
-                      <a:noFill/>
-                    </a:lnL>
-                    <a:lnR>
-                      <a:noFill/>
-                    </a:lnR>
-                    <a:lnT>
-                      <a:noFill/>
-                    </a:lnT>
-                    <a:lnB>
-                      <a:noFill/>
-                    </a:lnB>
-                    <a:noFill/>
-                  </a:tcPr>
-                </a:tc>
-                <a:extLst>
-                  <a:ext uri="{0D108BD9-81ED-4DB2-BD59-A6C34878D82A}">
-                    <a16:rowId xmlns:a16="http://schemas.microsoft.com/office/drawing/2014/main" val="648364296"/>
-                  </a:ext>
-                </a:extLst>
-              </a:tr>
-              <a:tr h="276951">
-                <a:tc>
-                  <a:txBody>
-                    <a:bodyPr/>
-                    <a:lstStyle/>
-                    <a:p>
-                      <a:pPr algn="l" fontAlgn="ctr">
-                        <a:buNone/>
-                      </a:pPr>
-                      <a:r>
-                        <a:rPr lang="sk-SK" sz="1200" b="0" i="0" u="none" strike="noStrike">
-                          <a:effectLst/>
-                          <a:latin typeface="Arial" panose="020B0604020202020204" pitchFamily="34" charset="0"/>
-                        </a:rPr>
-                        <a:t>Number of edges</a:t>
-                      </a:r>
-                    </a:p>
-                  </a:txBody>
-                  <a:tcPr marL="62943" marR="62943" marT="31472" marB="31472" anchor="ctr">
-                    <a:lnL>
-                      <a:noFill/>
-                    </a:lnL>
-                    <a:lnR>
-                      <a:noFill/>
-                    </a:lnR>
-                    <a:lnT>
-                      <a:noFill/>
-                    </a:lnT>
-                    <a:lnB>
-                      <a:noFill/>
-                    </a:lnB>
-                    <a:noFill/>
-                  </a:tcPr>
-                </a:tc>
-                <a:tc>
-                  <a:txBody>
-                    <a:bodyPr/>
-                    <a:lstStyle/>
-                    <a:p>
-                      <a:pPr algn="r" fontAlgn="ctr">
-                        <a:buNone/>
-                      </a:pPr>
-                      <a:r>
-                        <a:rPr lang="sk-SK" sz="1200" b="0" i="0" u="none" strike="noStrike">
-                          <a:effectLst/>
-                          <a:latin typeface="Arial" panose="020B0604020202020204" pitchFamily="34" charset="0"/>
-                        </a:rPr>
-                        <a:t>13077</a:t>
-                      </a:r>
-                    </a:p>
-                  </a:txBody>
-                  <a:tcPr marL="62943" marR="62943" marT="31472" marB="31472" anchor="ctr">
-                    <a:lnL>
-                      <a:noFill/>
-                    </a:lnL>
-                    <a:lnR>
-                      <a:noFill/>
-                    </a:lnR>
-                    <a:lnT>
-                      <a:noFill/>
-                    </a:lnT>
-                    <a:lnB>
-                      <a:noFill/>
-                    </a:lnB>
-                    <a:noFill/>
-                  </a:tcPr>
-                </a:tc>
-                <a:tc>
-                  <a:txBody>
-                    <a:bodyPr/>
-                    <a:lstStyle/>
-                    <a:p>
-                      <a:pPr algn="r" fontAlgn="ctr">
-                        <a:buNone/>
-                      </a:pPr>
-                      <a:r>
-                        <a:rPr lang="sk-SK" sz="1200" b="0" i="0" u="none" strike="noStrike">
-                          <a:effectLst/>
-                          <a:latin typeface="Arial" panose="020B0604020202020204" pitchFamily="34" charset="0"/>
-                        </a:rPr>
-                        <a:t>13103</a:t>
-                      </a:r>
-                    </a:p>
-                  </a:txBody>
-                  <a:tcPr marL="62943" marR="62943" marT="31472" marB="31472" anchor="ctr">
-                    <a:lnL>
-                      <a:noFill/>
-                    </a:lnL>
-                    <a:lnR>
-                      <a:noFill/>
-                    </a:lnR>
-                    <a:lnT>
-                      <a:noFill/>
-                    </a:lnT>
-                    <a:lnB>
-                      <a:noFill/>
-                    </a:lnB>
-                    <a:noFill/>
-                  </a:tcPr>
-                </a:tc>
-                <a:tc>
-                  <a:txBody>
-                    <a:bodyPr/>
-                    <a:lstStyle/>
-                    <a:p>
-                      <a:pPr algn="r" fontAlgn="ctr">
-                        <a:buNone/>
-                      </a:pPr>
-                      <a:r>
-                        <a:rPr lang="sk-SK" sz="1200" b="0" i="0" u="none" strike="noStrike">
-                          <a:effectLst/>
-                          <a:latin typeface="Arial" panose="020B0604020202020204" pitchFamily="34" charset="0"/>
-                        </a:rPr>
-                        <a:t>14736</a:t>
-                      </a:r>
-                    </a:p>
-                  </a:txBody>
-                  <a:tcPr marL="62943" marR="62943" marT="31472" marB="31472" anchor="ctr">
-                    <a:lnL>
-                      <a:noFill/>
-                    </a:lnL>
-                    <a:lnR>
-                      <a:noFill/>
-                    </a:lnR>
-                    <a:lnT>
-                      <a:noFill/>
-                    </a:lnT>
-                    <a:lnB>
-                      <a:noFill/>
-                    </a:lnB>
-                    <a:noFill/>
-                  </a:tcPr>
-                </a:tc>
-                <a:extLst>
-                  <a:ext uri="{0D108BD9-81ED-4DB2-BD59-A6C34878D82A}">
-                    <a16:rowId xmlns:a16="http://schemas.microsoft.com/office/drawing/2014/main" val="3863805167"/>
-                  </a:ext>
-                </a:extLst>
-              </a:tr>
-              <a:tr h="276951">
-                <a:tc>
-                  <a:txBody>
-                    <a:bodyPr/>
-                    <a:lstStyle/>
-                    <a:p>
-                      <a:pPr algn="l" fontAlgn="ctr">
-                        <a:buNone/>
-                      </a:pPr>
-                      <a:r>
-                        <a:rPr lang="sk-SK" sz="1200" b="0" i="0" u="none" strike="noStrike">
-                          <a:effectLst/>
-                          <a:latin typeface="Arial" panose="020B0604020202020204" pitchFamily="34" charset="0"/>
-                        </a:rPr>
-                        <a:t>Max degree</a:t>
-                      </a:r>
-                    </a:p>
-                  </a:txBody>
-                  <a:tcPr marL="62943" marR="62943" marT="31472" marB="31472" anchor="ctr">
-                    <a:lnL>
-                      <a:noFill/>
-                    </a:lnL>
-                    <a:lnR>
-                      <a:noFill/>
-                    </a:lnR>
-                    <a:lnT>
-                      <a:noFill/>
-                    </a:lnT>
-                    <a:lnB>
-                      <a:noFill/>
-                    </a:lnB>
-                    <a:noFill/>
-                  </a:tcPr>
-                </a:tc>
-                <a:tc>
-                  <a:txBody>
-                    <a:bodyPr/>
-                    <a:lstStyle/>
-                    <a:p>
-                      <a:pPr algn="r" fontAlgn="ctr">
-                        <a:buNone/>
-                      </a:pPr>
-                      <a:r>
-                        <a:rPr lang="sk-SK" sz="1200" b="0" i="0" u="none" strike="noStrike">
-                          <a:effectLst/>
-                          <a:latin typeface="Arial" panose="020B0604020202020204" pitchFamily="34" charset="0"/>
-                        </a:rPr>
-                        <a:t>845</a:t>
-                      </a:r>
-                    </a:p>
-                  </a:txBody>
-                  <a:tcPr marL="62943" marR="62943" marT="31472" marB="31472" anchor="ctr">
-                    <a:lnL>
-                      <a:noFill/>
-                    </a:lnL>
-                    <a:lnR>
-                      <a:noFill/>
-                    </a:lnR>
-                    <a:lnT>
-                      <a:noFill/>
-                    </a:lnT>
-                    <a:lnB>
-                      <a:noFill/>
-                    </a:lnB>
-                    <a:noFill/>
-                  </a:tcPr>
-                </a:tc>
-                <a:tc>
-                  <a:txBody>
-                    <a:bodyPr/>
-                    <a:lstStyle/>
-                    <a:p>
-                      <a:pPr algn="r" fontAlgn="ctr">
-                        <a:buNone/>
-                      </a:pPr>
-                      <a:r>
-                        <a:rPr lang="sk-SK" sz="1200" b="0" i="0" u="none" strike="noStrike">
-                          <a:effectLst/>
-                          <a:latin typeface="Arial" panose="020B0604020202020204" pitchFamily="34" charset="0"/>
-                        </a:rPr>
-                        <a:t>848</a:t>
-                      </a:r>
-                    </a:p>
-                  </a:txBody>
-                  <a:tcPr marL="62943" marR="62943" marT="31472" marB="31472" anchor="ctr">
-                    <a:lnL>
-                      <a:noFill/>
-                    </a:lnL>
-                    <a:lnR>
-                      <a:noFill/>
-                    </a:lnR>
-                    <a:lnT>
-                      <a:noFill/>
-                    </a:lnT>
-                    <a:lnB>
-                      <a:noFill/>
-                    </a:lnB>
-                    <a:noFill/>
-                  </a:tcPr>
-                </a:tc>
-                <a:tc>
-                  <a:txBody>
-                    <a:bodyPr/>
-                    <a:lstStyle/>
-                    <a:p>
-                      <a:pPr algn="r" fontAlgn="ctr">
-                        <a:buNone/>
-                      </a:pPr>
-                      <a:r>
-                        <a:rPr lang="sk-SK" sz="1200" b="0" i="0" u="none" strike="noStrike">
-                          <a:effectLst/>
-                          <a:latin typeface="Arial" panose="020B0604020202020204" pitchFamily="34" charset="0"/>
-                        </a:rPr>
-                        <a:t>802</a:t>
-                      </a:r>
-                    </a:p>
-                  </a:txBody>
-                  <a:tcPr marL="62943" marR="62943" marT="31472" marB="31472" anchor="ctr">
-                    <a:lnL>
-                      <a:noFill/>
-                    </a:lnL>
-                    <a:lnR>
-                      <a:noFill/>
-                    </a:lnR>
-                    <a:lnT>
-                      <a:noFill/>
-                    </a:lnT>
-                    <a:lnB>
-                      <a:noFill/>
-                    </a:lnB>
-                    <a:noFill/>
-                  </a:tcPr>
-                </a:tc>
-                <a:extLst>
-                  <a:ext uri="{0D108BD9-81ED-4DB2-BD59-A6C34878D82A}">
-                    <a16:rowId xmlns:a16="http://schemas.microsoft.com/office/drawing/2014/main" val="1676405822"/>
-                  </a:ext>
-                </a:extLst>
-              </a:tr>
-              <a:tr h="276951">
-                <a:tc>
-                  <a:txBody>
-                    <a:bodyPr/>
-                    <a:lstStyle/>
-                    <a:p>
-                      <a:pPr algn="l" fontAlgn="ctr">
-                        <a:buNone/>
-                      </a:pPr>
-                      <a:r>
-                        <a:rPr lang="sk-SK" sz="1200" b="0" i="0" u="none" strike="noStrike">
-                          <a:effectLst/>
-                          <a:latin typeface="Arial" panose="020B0604020202020204" pitchFamily="34" charset="0"/>
-                        </a:rPr>
-                        <a:t>Average degree</a:t>
-                      </a:r>
-                    </a:p>
-                  </a:txBody>
-                  <a:tcPr marL="62943" marR="62943" marT="31472" marB="31472" anchor="ctr">
-                    <a:lnL>
-                      <a:noFill/>
-                    </a:lnL>
-                    <a:lnR>
-                      <a:noFill/>
-                    </a:lnR>
-                    <a:lnT>
-                      <a:noFill/>
-                    </a:lnT>
-                    <a:lnB>
-                      <a:noFill/>
-                    </a:lnB>
-                    <a:noFill/>
-                  </a:tcPr>
-                </a:tc>
-                <a:tc>
-                  <a:txBody>
-                    <a:bodyPr/>
-                    <a:lstStyle/>
-                    <a:p>
-                      <a:pPr algn="r" fontAlgn="ctr">
-                        <a:buNone/>
-                      </a:pPr>
-                      <a:r>
-                        <a:rPr lang="sk-SK" sz="1200" b="0" i="0" u="none" strike="noStrike">
-                          <a:effectLst/>
-                          <a:latin typeface="Arial" panose="020B0604020202020204" pitchFamily="34" charset="0"/>
-                        </a:rPr>
-                        <a:t>8.09721</a:t>
-                      </a:r>
-                    </a:p>
-                  </a:txBody>
-                  <a:tcPr marL="62943" marR="62943" marT="31472" marB="31472" anchor="ctr">
-                    <a:lnL>
-                      <a:noFill/>
-                    </a:lnL>
-                    <a:lnR>
-                      <a:noFill/>
-                    </a:lnR>
-                    <a:lnT>
-                      <a:noFill/>
-                    </a:lnT>
-                    <a:lnB>
-                      <a:noFill/>
-                    </a:lnB>
-                    <a:noFill/>
-                  </a:tcPr>
-                </a:tc>
-                <a:tc>
-                  <a:txBody>
-                    <a:bodyPr/>
-                    <a:lstStyle/>
-                    <a:p>
-                      <a:pPr algn="r" fontAlgn="ctr">
-                        <a:buNone/>
-                      </a:pPr>
-                      <a:r>
-                        <a:rPr lang="sk-SK" sz="1200" b="0" i="0" u="none" strike="noStrike">
-                          <a:effectLst/>
-                          <a:latin typeface="Arial" panose="020B0604020202020204" pitchFamily="34" charset="0"/>
-                        </a:rPr>
-                        <a:t>8.11331</a:t>
-                      </a:r>
-                    </a:p>
-                  </a:txBody>
-                  <a:tcPr marL="62943" marR="62943" marT="31472" marB="31472" anchor="ctr">
-                    <a:lnL>
-                      <a:noFill/>
-                    </a:lnL>
-                    <a:lnR>
-                      <a:noFill/>
-                    </a:lnR>
-                    <a:lnT>
-                      <a:noFill/>
-                    </a:lnT>
-                    <a:lnB>
-                      <a:noFill/>
-                    </a:lnB>
-                    <a:noFill/>
-                  </a:tcPr>
-                </a:tc>
-                <a:tc>
-                  <a:txBody>
-                    <a:bodyPr/>
-                    <a:lstStyle/>
-                    <a:p>
-                      <a:pPr algn="r" fontAlgn="ctr">
-                        <a:buNone/>
-                      </a:pPr>
-                      <a:r>
-                        <a:rPr lang="sk-SK" sz="1200" b="0" i="0" u="none" strike="noStrike">
-                          <a:effectLst/>
-                          <a:latin typeface="Arial" panose="020B0604020202020204" pitchFamily="34" charset="0"/>
-                        </a:rPr>
-                        <a:t>9.12446</a:t>
-                      </a:r>
-                    </a:p>
-                  </a:txBody>
-                  <a:tcPr marL="62943" marR="62943" marT="31472" marB="31472" anchor="ctr">
-                    <a:lnL>
-                      <a:noFill/>
-                    </a:lnL>
-                    <a:lnR>
-                      <a:noFill/>
-                    </a:lnR>
-                    <a:lnT>
-                      <a:noFill/>
-                    </a:lnT>
-                    <a:lnB>
-                      <a:noFill/>
-                    </a:lnB>
-                    <a:noFill/>
-                  </a:tcPr>
-                </a:tc>
-                <a:extLst>
-                  <a:ext uri="{0D108BD9-81ED-4DB2-BD59-A6C34878D82A}">
-                    <a16:rowId xmlns:a16="http://schemas.microsoft.com/office/drawing/2014/main" val="1446945445"/>
-                  </a:ext>
-                </a:extLst>
-              </a:tr>
-              <a:tr h="276951">
-                <a:tc>
-                  <a:txBody>
-                    <a:bodyPr/>
-                    <a:lstStyle/>
-                    <a:p>
-                      <a:pPr algn="l" fontAlgn="ctr">
-                        <a:buNone/>
-                      </a:pPr>
-                      <a:r>
-                        <a:rPr lang="sk-SK" sz="1200" b="0" i="0" u="none" strike="noStrike">
-                          <a:effectLst/>
-                          <a:latin typeface="Arial" panose="020B0604020202020204" pitchFamily="34" charset="0"/>
-                        </a:rPr>
-                        <a:t>Network density</a:t>
-                      </a:r>
-                    </a:p>
-                  </a:txBody>
-                  <a:tcPr marL="62943" marR="62943" marT="31472" marB="31472" anchor="ctr">
-                    <a:lnL>
-                      <a:noFill/>
-                    </a:lnL>
-                    <a:lnR>
-                      <a:noFill/>
-                    </a:lnR>
-                    <a:lnT>
-                      <a:noFill/>
-                    </a:lnT>
-                    <a:lnB>
-                      <a:noFill/>
-                    </a:lnB>
-                    <a:noFill/>
-                  </a:tcPr>
-                </a:tc>
-                <a:tc>
-                  <a:txBody>
-                    <a:bodyPr/>
-                    <a:lstStyle/>
-                    <a:p>
-                      <a:pPr algn="r" fontAlgn="ctr">
-                        <a:buNone/>
-                      </a:pPr>
-                      <a:r>
-                        <a:rPr lang="sk-SK" sz="1200" b="0" i="0" u="none" strike="noStrike">
-                          <a:effectLst/>
-                          <a:latin typeface="Arial" panose="020B0604020202020204" pitchFamily="34" charset="0"/>
-                        </a:rPr>
-                        <a:t>0.00251</a:t>
-                      </a:r>
-                    </a:p>
-                  </a:txBody>
-                  <a:tcPr marL="62943" marR="62943" marT="31472" marB="31472" anchor="ctr">
-                    <a:lnL>
-                      <a:noFill/>
-                    </a:lnL>
-                    <a:lnR>
-                      <a:noFill/>
-                    </a:lnR>
-                    <a:lnT>
-                      <a:noFill/>
-                    </a:lnT>
-                    <a:lnB>
-                      <a:noFill/>
-                    </a:lnB>
-                    <a:noFill/>
-                  </a:tcPr>
-                </a:tc>
-                <a:tc>
-                  <a:txBody>
-                    <a:bodyPr/>
-                    <a:lstStyle/>
-                    <a:p>
-                      <a:pPr algn="r" fontAlgn="ctr">
-                        <a:buNone/>
-                      </a:pPr>
-                      <a:r>
-                        <a:rPr lang="sk-SK" sz="1200" b="0" i="0" u="none" strike="noStrike">
-                          <a:effectLst/>
-                          <a:latin typeface="Arial" panose="020B0604020202020204" pitchFamily="34" charset="0"/>
-                        </a:rPr>
-                        <a:t>0.00251</a:t>
-                      </a:r>
-                    </a:p>
-                  </a:txBody>
-                  <a:tcPr marL="62943" marR="62943" marT="31472" marB="31472" anchor="ctr">
-                    <a:lnL>
-                      <a:noFill/>
-                    </a:lnL>
-                    <a:lnR>
-                      <a:noFill/>
-                    </a:lnR>
-                    <a:lnT>
-                      <a:noFill/>
-                    </a:lnT>
-                    <a:lnB>
-                      <a:noFill/>
-                    </a:lnB>
-                    <a:noFill/>
-                  </a:tcPr>
-                </a:tc>
-                <a:tc>
-                  <a:txBody>
-                    <a:bodyPr/>
-                    <a:lstStyle/>
-                    <a:p>
-                      <a:pPr algn="r" fontAlgn="ctr">
-                        <a:buNone/>
-                      </a:pPr>
-                      <a:r>
-                        <a:rPr lang="sk-SK" sz="1200" b="0" i="0" u="none" strike="noStrike">
-                          <a:effectLst/>
-                          <a:latin typeface="Arial" panose="020B0604020202020204" pitchFamily="34" charset="0"/>
-                        </a:rPr>
-                        <a:t>0.00283</a:t>
-                      </a:r>
-                    </a:p>
-                  </a:txBody>
-                  <a:tcPr marL="62943" marR="62943" marT="31472" marB="31472" anchor="ctr">
-                    <a:lnL>
-                      <a:noFill/>
-                    </a:lnL>
-                    <a:lnR>
-                      <a:noFill/>
-                    </a:lnR>
-                    <a:lnT>
-                      <a:noFill/>
-                    </a:lnT>
-                    <a:lnB>
-                      <a:noFill/>
-                    </a:lnB>
-                    <a:noFill/>
-                  </a:tcPr>
-                </a:tc>
-                <a:extLst>
-                  <a:ext uri="{0D108BD9-81ED-4DB2-BD59-A6C34878D82A}">
-                    <a16:rowId xmlns:a16="http://schemas.microsoft.com/office/drawing/2014/main" val="3762362253"/>
-                  </a:ext>
-                </a:extLst>
-              </a:tr>
-              <a:tr h="276951">
-                <a:tc>
-                  <a:txBody>
-                    <a:bodyPr/>
-                    <a:lstStyle/>
-                    <a:p>
-                      <a:pPr algn="l" fontAlgn="ctr">
-                        <a:buNone/>
-                      </a:pPr>
-                      <a:r>
-                        <a:rPr lang="sk-SK" sz="1200" b="0" i="0" u="none" strike="noStrike">
-                          <a:effectLst/>
-                          <a:latin typeface="Arial" panose="020B0604020202020204" pitchFamily="34" charset="0"/>
-                        </a:rPr>
-                        <a:t>Clustering coefficient</a:t>
-                      </a:r>
-                    </a:p>
-                  </a:txBody>
-                  <a:tcPr marL="62943" marR="62943" marT="31472" marB="31472" anchor="ctr">
-                    <a:lnL>
-                      <a:noFill/>
-                    </a:lnL>
-                    <a:lnR>
-                      <a:noFill/>
-                    </a:lnR>
-                    <a:lnT>
-                      <a:noFill/>
-                    </a:lnT>
-                    <a:lnB>
-                      <a:noFill/>
-                    </a:lnB>
-                    <a:noFill/>
-                  </a:tcPr>
-                </a:tc>
-                <a:tc>
-                  <a:txBody>
-                    <a:bodyPr/>
-                    <a:lstStyle/>
-                    <a:p>
-                      <a:pPr algn="r" fontAlgn="ctr">
-                        <a:buNone/>
-                      </a:pPr>
-                      <a:r>
-                        <a:rPr lang="sk-SK" sz="1200" b="0" i="0" u="none" strike="noStrike">
-                          <a:effectLst/>
-                          <a:latin typeface="Arial" panose="020B0604020202020204" pitchFamily="34" charset="0"/>
-                        </a:rPr>
-                        <a:t>0.40852</a:t>
-                      </a:r>
-                    </a:p>
-                  </a:txBody>
-                  <a:tcPr marL="62943" marR="62943" marT="31472" marB="31472" anchor="ctr">
-                    <a:lnL>
-                      <a:noFill/>
-                    </a:lnL>
-                    <a:lnR>
-                      <a:noFill/>
-                    </a:lnR>
-                    <a:lnT>
-                      <a:noFill/>
-                    </a:lnT>
-                    <a:lnB>
-                      <a:noFill/>
-                    </a:lnB>
-                    <a:noFill/>
-                  </a:tcPr>
-                </a:tc>
-                <a:tc>
-                  <a:txBody>
-                    <a:bodyPr/>
-                    <a:lstStyle/>
-                    <a:p>
-                      <a:pPr algn="r" fontAlgn="ctr">
-                        <a:buNone/>
-                      </a:pPr>
-                      <a:r>
-                        <a:rPr lang="sk-SK" sz="1200" b="0" i="0" u="none" strike="noStrike">
-                          <a:effectLst/>
-                          <a:latin typeface="Arial" panose="020B0604020202020204" pitchFamily="34" charset="0"/>
-                        </a:rPr>
-                        <a:t>0.40772</a:t>
-                      </a:r>
-                    </a:p>
-                  </a:txBody>
-                  <a:tcPr marL="62943" marR="62943" marT="31472" marB="31472" anchor="ctr">
-                    <a:lnL>
-                      <a:noFill/>
-                    </a:lnL>
-                    <a:lnR>
-                      <a:noFill/>
-                    </a:lnR>
-                    <a:lnT>
-                      <a:noFill/>
-                    </a:lnT>
-                    <a:lnB>
-                      <a:noFill/>
-                    </a:lnB>
-                    <a:noFill/>
-                  </a:tcPr>
-                </a:tc>
-                <a:tc>
-                  <a:txBody>
-                    <a:bodyPr/>
-                    <a:lstStyle/>
-                    <a:p>
-                      <a:pPr algn="r" fontAlgn="ctr">
-                        <a:buNone/>
-                      </a:pPr>
-                      <a:r>
-                        <a:rPr lang="sk-SK" sz="1200" b="0" i="0" u="none" strike="noStrike">
-                          <a:effectLst/>
-                          <a:latin typeface="Arial" panose="020B0604020202020204" pitchFamily="34" charset="0"/>
-                        </a:rPr>
-                        <a:t>0.39859</a:t>
-                      </a:r>
-                    </a:p>
-                  </a:txBody>
-                  <a:tcPr marL="62943" marR="62943" marT="31472" marB="31472" anchor="ctr">
-                    <a:lnL>
-                      <a:noFill/>
-                    </a:lnL>
-                    <a:lnR>
-                      <a:noFill/>
-                    </a:lnR>
-                    <a:lnT>
-                      <a:noFill/>
-                    </a:lnT>
-                    <a:lnB>
-                      <a:noFill/>
-                    </a:lnB>
-                    <a:noFill/>
-                  </a:tcPr>
-                </a:tc>
-                <a:extLst>
-                  <a:ext uri="{0D108BD9-81ED-4DB2-BD59-A6C34878D82A}">
-                    <a16:rowId xmlns:a16="http://schemas.microsoft.com/office/drawing/2014/main" val="82755411"/>
-                  </a:ext>
-                </a:extLst>
-              </a:tr>
-              <a:tr h="276951">
-                <a:tc>
-                  <a:txBody>
-                    <a:bodyPr/>
-                    <a:lstStyle/>
-                    <a:p>
-                      <a:pPr algn="l" fontAlgn="ctr">
-                        <a:buNone/>
-                      </a:pPr>
-                      <a:r>
-                        <a:rPr lang="sk-SK" sz="1200" b="0" i="0" u="none" strike="noStrike" dirty="0" err="1">
-                          <a:effectLst/>
-                          <a:latin typeface="Arial" panose="020B0604020202020204" pitchFamily="34" charset="0"/>
-                        </a:rPr>
-                        <a:t>Avg</a:t>
-                      </a:r>
-                      <a:r>
-                        <a:rPr lang="sk-SK" sz="1200" b="0" i="0" u="none" strike="noStrike" dirty="0">
-                          <a:effectLst/>
-                          <a:latin typeface="Arial" panose="020B0604020202020204" pitchFamily="34" charset="0"/>
-                        </a:rPr>
-                        <a:t> </a:t>
-                      </a:r>
-                      <a:r>
-                        <a:rPr lang="sk-SK" sz="1200" b="0" i="0" u="none" strike="noStrike" dirty="0" err="1">
-                          <a:effectLst/>
-                          <a:latin typeface="Arial" panose="020B0604020202020204" pitchFamily="34" charset="0"/>
-                        </a:rPr>
-                        <a:t>shortest</a:t>
-                      </a:r>
-                      <a:r>
-                        <a:rPr lang="sk-SK" sz="1200" b="0" i="0" u="none" strike="noStrike" dirty="0">
-                          <a:effectLst/>
-                          <a:latin typeface="Arial" panose="020B0604020202020204" pitchFamily="34" charset="0"/>
-                        </a:rPr>
-                        <a:t> </a:t>
-                      </a:r>
-                      <a:r>
-                        <a:rPr lang="sk-SK" sz="1200" b="0" i="0" u="none" strike="noStrike" dirty="0" err="1">
-                          <a:effectLst/>
-                          <a:latin typeface="Arial" panose="020B0604020202020204" pitchFamily="34" charset="0"/>
-                        </a:rPr>
-                        <a:t>path</a:t>
-                      </a:r>
-                      <a:r>
-                        <a:rPr lang="sk-SK" sz="1200" b="0" i="0" u="none" strike="noStrike" dirty="0">
-                          <a:effectLst/>
-                          <a:latin typeface="Arial" panose="020B0604020202020204" pitchFamily="34" charset="0"/>
-                        </a:rPr>
-                        <a:t> </a:t>
-                      </a:r>
-                      <a:r>
-                        <a:rPr lang="sk-SK" sz="1200" b="0" i="0" u="none" strike="noStrike" dirty="0" err="1">
-                          <a:effectLst/>
-                          <a:latin typeface="Arial" panose="020B0604020202020204" pitchFamily="34" charset="0"/>
-                        </a:rPr>
-                        <a:t>length</a:t>
-                      </a:r>
-                      <a:endParaRPr lang="sk-SK" sz="1200" b="0" i="0" u="none" strike="noStrike" dirty="0">
-                        <a:effectLst/>
-                        <a:latin typeface="Arial" panose="020B0604020202020204" pitchFamily="34" charset="0"/>
-                      </a:endParaRPr>
-                    </a:p>
-                  </a:txBody>
-                  <a:tcPr marL="62943" marR="62943" marT="31472" marB="31472" anchor="ctr">
-                    <a:lnL>
-                      <a:noFill/>
-                    </a:lnL>
-                    <a:lnR>
-                      <a:noFill/>
-                    </a:lnR>
-                    <a:lnT>
-                      <a:noFill/>
-                    </a:lnT>
-                    <a:lnB>
-                      <a:noFill/>
-                    </a:lnB>
-                    <a:noFill/>
-                  </a:tcPr>
-                </a:tc>
-                <a:tc>
-                  <a:txBody>
-                    <a:bodyPr/>
-                    <a:lstStyle/>
-                    <a:p>
-                      <a:pPr algn="r" fontAlgn="ctr">
-                        <a:buNone/>
-                      </a:pPr>
-                      <a:r>
-                        <a:rPr lang="sk-SK" sz="1200" b="0" i="0" u="none" strike="noStrike">
-                          <a:effectLst/>
-                          <a:latin typeface="Arial" panose="020B0604020202020204" pitchFamily="34" charset="0"/>
-                        </a:rPr>
-                        <a:t>2.82903</a:t>
-                      </a:r>
-                    </a:p>
-                  </a:txBody>
-                  <a:tcPr marL="62943" marR="62943" marT="31472" marB="31472" anchor="ctr">
-                    <a:lnL>
-                      <a:noFill/>
-                    </a:lnL>
-                    <a:lnR>
-                      <a:noFill/>
-                    </a:lnR>
-                    <a:lnT>
-                      <a:noFill/>
-                    </a:lnT>
-                    <a:lnB>
-                      <a:noFill/>
-                    </a:lnB>
-                    <a:noFill/>
-                  </a:tcPr>
-                </a:tc>
-                <a:tc>
-                  <a:txBody>
-                    <a:bodyPr/>
-                    <a:lstStyle/>
-                    <a:p>
-                      <a:pPr algn="r" fontAlgn="ctr">
-                        <a:buNone/>
-                      </a:pPr>
-                      <a:r>
-                        <a:rPr lang="sk-SK" sz="1200" b="0" i="0" u="none" strike="noStrike">
-                          <a:effectLst/>
-                          <a:latin typeface="Arial" panose="020B0604020202020204" pitchFamily="34" charset="0"/>
-                        </a:rPr>
-                        <a:t>2.82374</a:t>
-                      </a:r>
-                    </a:p>
-                  </a:txBody>
-                  <a:tcPr marL="62943" marR="62943" marT="31472" marB="31472" anchor="ctr">
-                    <a:lnL>
-                      <a:noFill/>
-                    </a:lnL>
-                    <a:lnR>
-                      <a:noFill/>
-                    </a:lnR>
-                    <a:lnT>
-                      <a:noFill/>
-                    </a:lnT>
-                    <a:lnB>
-                      <a:noFill/>
-                    </a:lnB>
-                    <a:noFill/>
-                  </a:tcPr>
-                </a:tc>
-                <a:tc>
-                  <a:txBody>
-                    <a:bodyPr/>
-                    <a:lstStyle/>
-                    <a:p>
-                      <a:pPr algn="r" fontAlgn="ctr">
-                        <a:buNone/>
-                      </a:pPr>
-                      <a:r>
-                        <a:rPr lang="sk-SK" sz="1200" b="0" i="0" u="none" strike="noStrike">
-                          <a:effectLst/>
-                          <a:latin typeface="Arial" panose="020B0604020202020204" pitchFamily="34" charset="0"/>
-                        </a:rPr>
-                        <a:t>2.88044</a:t>
-                      </a:r>
-                    </a:p>
-                  </a:txBody>
-                  <a:tcPr marL="62943" marR="62943" marT="31472" marB="31472" anchor="ctr">
-                    <a:lnL>
-                      <a:noFill/>
-                    </a:lnL>
-                    <a:lnR>
-                      <a:noFill/>
-                    </a:lnR>
-                    <a:lnT>
-                      <a:noFill/>
-                    </a:lnT>
-                    <a:lnB>
-                      <a:noFill/>
-                    </a:lnB>
-                    <a:noFill/>
-                  </a:tcPr>
-                </a:tc>
-                <a:extLst>
-                  <a:ext uri="{0D108BD9-81ED-4DB2-BD59-A6C34878D82A}">
-                    <a16:rowId xmlns:a16="http://schemas.microsoft.com/office/drawing/2014/main" val="3080671462"/>
-                  </a:ext>
-                </a:extLst>
-              </a:tr>
-              <a:tr h="276951">
-                <a:tc>
-                  <a:txBody>
-                    <a:bodyPr/>
-                    <a:lstStyle/>
-                    <a:p>
-                      <a:pPr algn="l" fontAlgn="ctr">
-                        <a:buNone/>
-                      </a:pPr>
-                      <a:r>
-                        <a:rPr lang="sk-SK" sz="1200" b="0" i="0" u="none" strike="noStrike">
-                          <a:effectLst/>
-                          <a:latin typeface="Arial" panose="020B0604020202020204" pitchFamily="34" charset="0"/>
-                        </a:rPr>
-                        <a:t>Diameter</a:t>
-                      </a:r>
-                    </a:p>
-                  </a:txBody>
-                  <a:tcPr marL="62943" marR="62943" marT="31472" marB="31472" anchor="ctr">
-                    <a:lnL>
-                      <a:noFill/>
-                    </a:lnL>
-                    <a:lnR>
-                      <a:noFill/>
-                    </a:lnR>
-                    <a:lnT>
-                      <a:noFill/>
-                    </a:lnT>
-                    <a:lnB>
-                      <a:noFill/>
-                    </a:lnB>
-                    <a:noFill/>
-                  </a:tcPr>
-                </a:tc>
-                <a:tc>
-                  <a:txBody>
-                    <a:bodyPr/>
-                    <a:lstStyle/>
-                    <a:p>
-                      <a:pPr algn="r" fontAlgn="ctr">
-                        <a:buNone/>
-                      </a:pPr>
-                      <a:r>
-                        <a:rPr lang="sk-SK" sz="1200" b="0" i="0" u="none" strike="noStrike">
-                          <a:effectLst/>
-                          <a:latin typeface="Arial" panose="020B0604020202020204" pitchFamily="34" charset="0"/>
-                        </a:rPr>
-                        <a:t>6</a:t>
-                      </a:r>
-                    </a:p>
-                  </a:txBody>
-                  <a:tcPr marL="62943" marR="62943" marT="31472" marB="31472" anchor="ctr">
-                    <a:lnL>
-                      <a:noFill/>
-                    </a:lnL>
-                    <a:lnR>
-                      <a:noFill/>
-                    </a:lnR>
-                    <a:lnT>
-                      <a:noFill/>
-                    </a:lnT>
-                    <a:lnB>
-                      <a:noFill/>
-                    </a:lnB>
-                    <a:noFill/>
-                  </a:tcPr>
-                </a:tc>
-                <a:tc>
-                  <a:txBody>
-                    <a:bodyPr/>
-                    <a:lstStyle/>
-                    <a:p>
-                      <a:pPr algn="r" fontAlgn="ctr">
-                        <a:buNone/>
-                      </a:pPr>
-                      <a:r>
-                        <a:rPr lang="sk-SK" sz="1200" b="0" i="0" u="none" strike="noStrike">
-                          <a:effectLst/>
-                          <a:latin typeface="Arial" panose="020B0604020202020204" pitchFamily="34" charset="0"/>
-                        </a:rPr>
-                        <a:t>6</a:t>
-                      </a:r>
-                    </a:p>
-                  </a:txBody>
-                  <a:tcPr marL="62943" marR="62943" marT="31472" marB="31472" anchor="ctr">
-                    <a:lnL>
-                      <a:noFill/>
-                    </a:lnL>
-                    <a:lnR>
-                      <a:noFill/>
-                    </a:lnR>
-                    <a:lnT>
-                      <a:noFill/>
-                    </a:lnT>
-                    <a:lnB>
-                      <a:noFill/>
-                    </a:lnB>
-                    <a:noFill/>
-                  </a:tcPr>
-                </a:tc>
-                <a:tc>
-                  <a:txBody>
-                    <a:bodyPr/>
-                    <a:lstStyle/>
-                    <a:p>
-                      <a:pPr algn="r" fontAlgn="ctr">
-                        <a:buNone/>
-                      </a:pPr>
-                      <a:r>
-                        <a:rPr lang="sk-SK" sz="1200" b="0" i="0" u="none" strike="noStrike">
-                          <a:effectLst/>
-                          <a:latin typeface="Arial" panose="020B0604020202020204" pitchFamily="34" charset="0"/>
-                        </a:rPr>
-                        <a:t>6</a:t>
-                      </a:r>
-                    </a:p>
-                  </a:txBody>
-                  <a:tcPr marL="62943" marR="62943" marT="31472" marB="31472" anchor="ctr">
-                    <a:lnL>
-                      <a:noFill/>
-                    </a:lnL>
-                    <a:lnR>
-                      <a:noFill/>
-                    </a:lnR>
-                    <a:lnT>
-                      <a:noFill/>
-                    </a:lnT>
-                    <a:lnB>
-                      <a:noFill/>
-                    </a:lnB>
-                    <a:noFill/>
-                  </a:tcPr>
-                </a:tc>
-                <a:extLst>
-                  <a:ext uri="{0D108BD9-81ED-4DB2-BD59-A6C34878D82A}">
-                    <a16:rowId xmlns:a16="http://schemas.microsoft.com/office/drawing/2014/main" val="3251105919"/>
-                  </a:ext>
-                </a:extLst>
-              </a:tr>
-              <a:tr h="276951">
-                <a:tc>
-                  <a:txBody>
-                    <a:bodyPr/>
-                    <a:lstStyle/>
-                    <a:p>
-                      <a:pPr algn="l" fontAlgn="ctr">
-                        <a:buNone/>
-                      </a:pPr>
-                      <a:r>
-                        <a:rPr lang="sk-SK" sz="1200" b="0" i="0" u="none" strike="noStrike">
-                          <a:effectLst/>
-                          <a:latin typeface="Arial" panose="020B0604020202020204" pitchFamily="34" charset="0"/>
-                        </a:rPr>
-                        <a:t>Number of words</a:t>
-                      </a:r>
-                    </a:p>
-                  </a:txBody>
-                  <a:tcPr marL="62943" marR="62943" marT="31472" marB="31472" anchor="ctr">
-                    <a:lnL>
-                      <a:noFill/>
-                    </a:lnL>
-                    <a:lnR>
-                      <a:noFill/>
-                    </a:lnR>
-                    <a:lnT>
-                      <a:noFill/>
-                    </a:lnT>
-                    <a:lnB>
-                      <a:noFill/>
-                    </a:lnB>
-                    <a:noFill/>
-                  </a:tcPr>
-                </a:tc>
-                <a:tc>
-                  <a:txBody>
-                    <a:bodyPr/>
-                    <a:lstStyle/>
-                    <a:p>
-                      <a:pPr algn="r" fontAlgn="ctr">
-                        <a:buNone/>
-                      </a:pPr>
-                      <a:r>
-                        <a:rPr lang="sk-SK" sz="1200" b="0" i="0" u="none" strike="noStrike">
-                          <a:effectLst/>
-                          <a:latin typeface="Arial" panose="020B0604020202020204" pitchFamily="34" charset="0"/>
-                        </a:rPr>
-                        <a:t>3230</a:t>
-                      </a:r>
-                    </a:p>
-                  </a:txBody>
-                  <a:tcPr marL="62943" marR="62943" marT="31472" marB="31472" anchor="ctr">
-                    <a:lnL>
-                      <a:noFill/>
-                    </a:lnL>
-                    <a:lnR>
-                      <a:noFill/>
-                    </a:lnR>
-                    <a:lnT>
-                      <a:noFill/>
-                    </a:lnT>
-                    <a:lnB>
-                      <a:noFill/>
-                    </a:lnB>
-                    <a:noFill/>
-                  </a:tcPr>
-                </a:tc>
-                <a:tc>
-                  <a:txBody>
-                    <a:bodyPr/>
-                    <a:lstStyle/>
-                    <a:p>
-                      <a:pPr algn="r" fontAlgn="ctr">
-                        <a:buNone/>
-                      </a:pPr>
-                      <a:r>
-                        <a:rPr lang="sk-SK" sz="1200" b="0" i="0" u="none" strike="noStrike">
-                          <a:effectLst/>
-                          <a:latin typeface="Arial" panose="020B0604020202020204" pitchFamily="34" charset="0"/>
-                        </a:rPr>
-                        <a:t>3230</a:t>
-                      </a:r>
-                    </a:p>
-                  </a:txBody>
-                  <a:tcPr marL="62943" marR="62943" marT="31472" marB="31472" anchor="ctr">
-                    <a:lnL>
-                      <a:noFill/>
-                    </a:lnL>
-                    <a:lnR>
-                      <a:noFill/>
-                    </a:lnR>
-                    <a:lnT>
-                      <a:noFill/>
-                    </a:lnT>
-                    <a:lnB>
-                      <a:noFill/>
-                    </a:lnB>
-                    <a:noFill/>
-                  </a:tcPr>
-                </a:tc>
-                <a:tc>
-                  <a:txBody>
-                    <a:bodyPr/>
-                    <a:lstStyle/>
-                    <a:p>
-                      <a:pPr algn="r" fontAlgn="ctr">
-                        <a:buNone/>
-                      </a:pPr>
-                      <a:r>
-                        <a:rPr lang="sk-SK" sz="1200" b="0" i="0" u="none" strike="noStrike">
-                          <a:effectLst/>
-                          <a:latin typeface="Arial" panose="020B0604020202020204" pitchFamily="34" charset="0"/>
-                        </a:rPr>
-                        <a:t>3230</a:t>
-                      </a:r>
-                    </a:p>
-                  </a:txBody>
-                  <a:tcPr marL="62943" marR="62943" marT="31472" marB="31472" anchor="ctr">
-                    <a:lnL>
-                      <a:noFill/>
-                    </a:lnL>
-                    <a:lnR>
-                      <a:noFill/>
-                    </a:lnR>
-                    <a:lnT>
-                      <a:noFill/>
-                    </a:lnT>
-                    <a:lnB>
-                      <a:noFill/>
-                    </a:lnB>
-                    <a:noFill/>
-                  </a:tcPr>
-                </a:tc>
-                <a:extLst>
-                  <a:ext uri="{0D108BD9-81ED-4DB2-BD59-A6C34878D82A}">
-                    <a16:rowId xmlns:a16="http://schemas.microsoft.com/office/drawing/2014/main" val="3296565507"/>
-                  </a:ext>
-                </a:extLst>
-              </a:tr>
-              <a:tr h="276951">
-                <a:tc>
-                  <a:txBody>
-                    <a:bodyPr/>
-                    <a:lstStyle/>
-                    <a:p>
-                      <a:pPr algn="l" fontAlgn="ctr">
-                        <a:buNone/>
-                      </a:pPr>
-                      <a:r>
-                        <a:rPr lang="sk-SK" sz="1200" b="0" i="0" u="none" strike="noStrike">
-                          <a:effectLst/>
-                          <a:latin typeface="Arial" panose="020B0604020202020204" pitchFamily="34" charset="0"/>
-                        </a:rPr>
-                        <a:t>Average word length</a:t>
-                      </a:r>
-                    </a:p>
-                  </a:txBody>
-                  <a:tcPr marL="62943" marR="62943" marT="31472" marB="31472" anchor="ctr">
-                    <a:lnL>
-                      <a:noFill/>
-                    </a:lnL>
-                    <a:lnR>
-                      <a:noFill/>
-                    </a:lnR>
-                    <a:lnT>
-                      <a:noFill/>
-                    </a:lnT>
-                    <a:lnB>
-                      <a:noFill/>
-                    </a:lnB>
-                    <a:noFill/>
-                  </a:tcPr>
-                </a:tc>
-                <a:tc>
-                  <a:txBody>
-                    <a:bodyPr/>
-                    <a:lstStyle/>
-                    <a:p>
-                      <a:pPr algn="r" fontAlgn="ctr">
-                        <a:buNone/>
-                      </a:pPr>
-                      <a:r>
-                        <a:rPr lang="sk-SK" sz="1200" b="0" i="0" u="none" strike="noStrike">
-                          <a:effectLst/>
-                          <a:latin typeface="Arial" panose="020B0604020202020204" pitchFamily="34" charset="0"/>
-                        </a:rPr>
-                        <a:t>6.18762</a:t>
-                      </a:r>
-                    </a:p>
-                  </a:txBody>
-                  <a:tcPr marL="62943" marR="62943" marT="31472" marB="31472" anchor="ctr">
-                    <a:lnL>
-                      <a:noFill/>
-                    </a:lnL>
-                    <a:lnR>
-                      <a:noFill/>
-                    </a:lnR>
-                    <a:lnT>
-                      <a:noFill/>
-                    </a:lnT>
-                    <a:lnB>
-                      <a:noFill/>
-                    </a:lnB>
-                    <a:noFill/>
-                  </a:tcPr>
-                </a:tc>
-                <a:tc>
-                  <a:txBody>
-                    <a:bodyPr/>
-                    <a:lstStyle/>
-                    <a:p>
-                      <a:pPr algn="r" fontAlgn="ctr">
-                        <a:buNone/>
-                      </a:pPr>
-                      <a:r>
-                        <a:rPr lang="sk-SK" sz="1200" b="0" i="0" u="none" strike="noStrike">
-                          <a:effectLst/>
-                          <a:latin typeface="Arial" panose="020B0604020202020204" pitchFamily="34" charset="0"/>
-                        </a:rPr>
-                        <a:t>6.18762</a:t>
-                      </a:r>
-                    </a:p>
-                  </a:txBody>
-                  <a:tcPr marL="62943" marR="62943" marT="31472" marB="31472" anchor="ctr">
-                    <a:lnL>
-                      <a:noFill/>
-                    </a:lnL>
-                    <a:lnR>
-                      <a:noFill/>
-                    </a:lnR>
-                    <a:lnT>
-                      <a:noFill/>
-                    </a:lnT>
-                    <a:lnB>
-                      <a:noFill/>
-                    </a:lnB>
-                    <a:noFill/>
-                  </a:tcPr>
-                </a:tc>
-                <a:tc>
-                  <a:txBody>
-                    <a:bodyPr/>
-                    <a:lstStyle/>
-                    <a:p>
-                      <a:pPr algn="r" fontAlgn="ctr">
-                        <a:buNone/>
-                      </a:pPr>
-                      <a:r>
-                        <a:rPr lang="sk-SK" sz="1200" b="0" i="0" u="none" strike="noStrike">
-                          <a:effectLst/>
-                          <a:latin typeface="Arial" panose="020B0604020202020204" pitchFamily="34" charset="0"/>
-                        </a:rPr>
-                        <a:t>6.18762</a:t>
-                      </a:r>
-                    </a:p>
-                  </a:txBody>
-                  <a:tcPr marL="62943" marR="62943" marT="31472" marB="31472" anchor="ctr">
-                    <a:lnL>
-                      <a:noFill/>
-                    </a:lnL>
-                    <a:lnR>
-                      <a:noFill/>
-                    </a:lnR>
-                    <a:lnT>
-                      <a:noFill/>
-                    </a:lnT>
-                    <a:lnB>
-                      <a:noFill/>
-                    </a:lnB>
-                    <a:noFill/>
-                  </a:tcPr>
-                </a:tc>
-                <a:extLst>
-                  <a:ext uri="{0D108BD9-81ED-4DB2-BD59-A6C34878D82A}">
-                    <a16:rowId xmlns:a16="http://schemas.microsoft.com/office/drawing/2014/main" val="3807933848"/>
-                  </a:ext>
-                </a:extLst>
-              </a:tr>
-              <a:tr h="276951">
-                <a:tc>
-                  <a:txBody>
-                    <a:bodyPr/>
-                    <a:lstStyle/>
-                    <a:p>
-                      <a:pPr algn="l" fontAlgn="ctr">
-                        <a:buNone/>
-                      </a:pPr>
-                      <a:r>
-                        <a:rPr lang="sk-SK" sz="1200" b="0" i="0" u="none" strike="noStrike">
-                          <a:effectLst/>
-                          <a:latin typeface="Arial" panose="020B0604020202020204" pitchFamily="34" charset="0"/>
-                        </a:rPr>
-                        <a:t>Number of sentences</a:t>
-                      </a:r>
-                    </a:p>
-                  </a:txBody>
-                  <a:tcPr marL="62943" marR="62943" marT="31472" marB="31472" anchor="ctr">
-                    <a:lnL>
-                      <a:noFill/>
-                    </a:lnL>
-                    <a:lnR>
-                      <a:noFill/>
-                    </a:lnR>
-                    <a:lnT>
-                      <a:noFill/>
-                    </a:lnT>
-                    <a:lnB>
-                      <a:noFill/>
-                    </a:lnB>
-                    <a:noFill/>
-                  </a:tcPr>
-                </a:tc>
-                <a:tc>
-                  <a:txBody>
-                    <a:bodyPr/>
-                    <a:lstStyle/>
-                    <a:p>
-                      <a:pPr algn="r" fontAlgn="ctr">
-                        <a:buNone/>
-                      </a:pPr>
-                      <a:r>
-                        <a:rPr lang="sk-SK" sz="1200" b="0" i="0" u="none" strike="noStrike">
-                          <a:effectLst/>
-                          <a:latin typeface="Arial" panose="020B0604020202020204" pitchFamily="34" charset="0"/>
-                        </a:rPr>
-                        <a:t>1288</a:t>
-                      </a:r>
-                    </a:p>
-                  </a:txBody>
-                  <a:tcPr marL="62943" marR="62943" marT="31472" marB="31472" anchor="ctr">
-                    <a:lnL>
-                      <a:noFill/>
-                    </a:lnL>
-                    <a:lnR>
-                      <a:noFill/>
-                    </a:lnR>
-                    <a:lnT>
-                      <a:noFill/>
-                    </a:lnT>
-                    <a:lnB>
-                      <a:noFill/>
-                    </a:lnB>
-                    <a:noFill/>
-                  </a:tcPr>
-                </a:tc>
-                <a:tc>
-                  <a:txBody>
-                    <a:bodyPr/>
-                    <a:lstStyle/>
-                    <a:p>
-                      <a:pPr algn="r" fontAlgn="ctr">
-                        <a:buNone/>
-                      </a:pPr>
-                      <a:r>
-                        <a:rPr lang="sk-SK" sz="1200" b="0" i="0" u="none" strike="noStrike">
-                          <a:effectLst/>
-                          <a:latin typeface="Arial" panose="020B0604020202020204" pitchFamily="34" charset="0"/>
-                        </a:rPr>
-                        <a:t>1288</a:t>
-                      </a:r>
-                    </a:p>
-                  </a:txBody>
-                  <a:tcPr marL="62943" marR="62943" marT="31472" marB="31472" anchor="ctr">
-                    <a:lnL>
-                      <a:noFill/>
-                    </a:lnL>
-                    <a:lnR>
-                      <a:noFill/>
-                    </a:lnR>
-                    <a:lnT>
-                      <a:noFill/>
-                    </a:lnT>
-                    <a:lnB>
-                      <a:noFill/>
-                    </a:lnB>
-                    <a:noFill/>
-                  </a:tcPr>
-                </a:tc>
-                <a:tc>
-                  <a:txBody>
-                    <a:bodyPr/>
-                    <a:lstStyle/>
-                    <a:p>
-                      <a:pPr algn="r" fontAlgn="ctr">
-                        <a:buNone/>
-                      </a:pPr>
-                      <a:r>
-                        <a:rPr lang="sk-SK" sz="1200" b="0" i="0" u="none" strike="noStrike">
-                          <a:effectLst/>
-                          <a:latin typeface="Arial" panose="020B0604020202020204" pitchFamily="34" charset="0"/>
-                        </a:rPr>
-                        <a:t>1228</a:t>
-                      </a:r>
-                    </a:p>
-                  </a:txBody>
-                  <a:tcPr marL="62943" marR="62943" marT="31472" marB="31472" anchor="ctr">
-                    <a:lnL>
-                      <a:noFill/>
-                    </a:lnL>
-                    <a:lnR>
-                      <a:noFill/>
-                    </a:lnR>
-                    <a:lnT>
-                      <a:noFill/>
-                    </a:lnT>
-                    <a:lnB>
-                      <a:noFill/>
-                    </a:lnB>
-                    <a:noFill/>
-                  </a:tcPr>
-                </a:tc>
-                <a:extLst>
-                  <a:ext uri="{0D108BD9-81ED-4DB2-BD59-A6C34878D82A}">
-                    <a16:rowId xmlns:a16="http://schemas.microsoft.com/office/drawing/2014/main" val="3215404076"/>
-                  </a:ext>
-                </a:extLst>
-              </a:tr>
-              <a:tr h="276951">
-                <a:tc>
-                  <a:txBody>
-                    <a:bodyPr/>
-                    <a:lstStyle/>
-                    <a:p>
-                      <a:pPr algn="l" fontAlgn="ctr">
-                        <a:buNone/>
-                      </a:pPr>
-                      <a:r>
-                        <a:rPr lang="sk-SK" sz="1200" b="0" i="0" u="none" strike="noStrike">
-                          <a:effectLst/>
-                          <a:latin typeface="Arial" panose="020B0604020202020204" pitchFamily="34" charset="0"/>
-                        </a:rPr>
-                        <a:t>Average sentence length</a:t>
-                      </a:r>
-                    </a:p>
-                  </a:txBody>
-                  <a:tcPr marL="62943" marR="62943" marT="31472" marB="31472" anchor="ctr">
-                    <a:lnL>
-                      <a:noFill/>
-                    </a:lnL>
-                    <a:lnR>
-                      <a:noFill/>
-                    </a:lnR>
-                    <a:lnT>
-                      <a:noFill/>
-                    </a:lnT>
-                    <a:lnB>
-                      <a:noFill/>
-                    </a:lnB>
-                    <a:noFill/>
-                  </a:tcPr>
-                </a:tc>
-                <a:tc>
-                  <a:txBody>
-                    <a:bodyPr/>
-                    <a:lstStyle/>
-                    <a:p>
-                      <a:pPr algn="r" fontAlgn="ctr">
-                        <a:buNone/>
-                      </a:pPr>
-                      <a:r>
-                        <a:rPr lang="sk-SK" sz="1200" b="0" i="0" u="none" strike="noStrike">
-                          <a:effectLst/>
-                          <a:latin typeface="Arial" panose="020B0604020202020204" pitchFamily="34" charset="0"/>
-                        </a:rPr>
-                        <a:t>16.73137</a:t>
-                      </a:r>
-                    </a:p>
-                  </a:txBody>
-                  <a:tcPr marL="62943" marR="62943" marT="31472" marB="31472" anchor="ctr">
-                    <a:lnL>
-                      <a:noFill/>
-                    </a:lnL>
-                    <a:lnR>
-                      <a:noFill/>
-                    </a:lnR>
-                    <a:lnT>
-                      <a:noFill/>
-                    </a:lnT>
-                    <a:lnB>
-                      <a:noFill/>
-                    </a:lnB>
-                    <a:noFill/>
-                  </a:tcPr>
-                </a:tc>
-                <a:tc>
-                  <a:txBody>
-                    <a:bodyPr/>
-                    <a:lstStyle/>
-                    <a:p>
-                      <a:pPr algn="r" fontAlgn="ctr">
-                        <a:buNone/>
-                      </a:pPr>
-                      <a:r>
-                        <a:rPr lang="sk-SK" sz="1200" b="0" i="0" u="none" strike="noStrike">
-                          <a:effectLst/>
-                          <a:latin typeface="Arial" panose="020B0604020202020204" pitchFamily="34" charset="0"/>
-                        </a:rPr>
-                        <a:t>16.73758</a:t>
-                      </a:r>
-                    </a:p>
-                  </a:txBody>
-                  <a:tcPr marL="62943" marR="62943" marT="31472" marB="31472" anchor="ctr">
-                    <a:lnL>
-                      <a:noFill/>
-                    </a:lnL>
-                    <a:lnR>
-                      <a:noFill/>
-                    </a:lnR>
-                    <a:lnT>
-                      <a:noFill/>
-                    </a:lnT>
-                    <a:lnB>
-                      <a:noFill/>
-                    </a:lnB>
-                    <a:noFill/>
-                  </a:tcPr>
-                </a:tc>
-                <a:tc>
-                  <a:txBody>
-                    <a:bodyPr/>
-                    <a:lstStyle/>
-                    <a:p>
-                      <a:pPr algn="r" fontAlgn="ctr">
-                        <a:buNone/>
-                      </a:pPr>
-                      <a:r>
-                        <a:rPr lang="sk-SK" sz="1200" b="0" i="0" u="none" strike="noStrike">
-                          <a:effectLst/>
-                          <a:latin typeface="Arial" panose="020B0604020202020204" pitchFamily="34" charset="0"/>
-                        </a:rPr>
-                        <a:t>17.58795</a:t>
-                      </a:r>
-                    </a:p>
-                  </a:txBody>
-                  <a:tcPr marL="62943" marR="62943" marT="31472" marB="31472" anchor="ctr">
-                    <a:lnL>
-                      <a:noFill/>
-                    </a:lnL>
-                    <a:lnR>
-                      <a:noFill/>
-                    </a:lnR>
-                    <a:lnT>
-                      <a:noFill/>
-                    </a:lnT>
-                    <a:lnB>
-                      <a:noFill/>
-                    </a:lnB>
-                    <a:noFill/>
-                  </a:tcPr>
-                </a:tc>
-                <a:extLst>
-                  <a:ext uri="{0D108BD9-81ED-4DB2-BD59-A6C34878D82A}">
-                    <a16:rowId xmlns:a16="http://schemas.microsoft.com/office/drawing/2014/main" val="326454180"/>
-                  </a:ext>
-                </a:extLst>
-              </a:tr>
-              <a:tr h="276951">
-                <a:tc>
-                  <a:txBody>
-                    <a:bodyPr/>
-                    <a:lstStyle/>
-                    <a:p>
-                      <a:pPr algn="l" fontAlgn="ctr">
-                        <a:buNone/>
-                      </a:pPr>
-                      <a:r>
-                        <a:rPr lang="sk-SK" sz="1200" b="0" i="0" u="none" strike="noStrike">
-                          <a:effectLst/>
-                          <a:latin typeface="Arial" panose="020B0604020202020204" pitchFamily="34" charset="0"/>
-                        </a:rPr>
-                        <a:t>Number of bigrams</a:t>
-                      </a:r>
-                    </a:p>
-                  </a:txBody>
-                  <a:tcPr marL="62943" marR="62943" marT="31472" marB="31472" anchor="ctr">
-                    <a:lnL>
-                      <a:noFill/>
-                    </a:lnL>
-                    <a:lnR>
-                      <a:noFill/>
-                    </a:lnR>
-                    <a:lnT>
-                      <a:noFill/>
-                    </a:lnT>
-                    <a:lnB>
-                      <a:noFill/>
-                    </a:lnB>
-                    <a:noFill/>
-                  </a:tcPr>
-                </a:tc>
-                <a:tc>
-                  <a:txBody>
-                    <a:bodyPr/>
-                    <a:lstStyle/>
-                    <a:p>
-                      <a:pPr algn="r" fontAlgn="ctr">
-                        <a:buNone/>
-                      </a:pPr>
-                      <a:r>
-                        <a:rPr lang="sk-SK" sz="1200" b="0" i="0" u="none" strike="noStrike">
-                          <a:effectLst/>
-                          <a:latin typeface="Arial" panose="020B0604020202020204" pitchFamily="34" charset="0"/>
-                        </a:rPr>
-                        <a:t>13857</a:t>
-                      </a:r>
-                    </a:p>
-                  </a:txBody>
-                  <a:tcPr marL="62943" marR="62943" marT="31472" marB="31472" anchor="ctr">
-                    <a:lnL>
-                      <a:noFill/>
-                    </a:lnL>
-                    <a:lnR>
-                      <a:noFill/>
-                    </a:lnR>
-                    <a:lnT>
-                      <a:noFill/>
-                    </a:lnT>
-                    <a:lnB>
-                      <a:noFill/>
-                    </a:lnB>
-                    <a:noFill/>
-                  </a:tcPr>
-                </a:tc>
-                <a:tc>
-                  <a:txBody>
-                    <a:bodyPr/>
-                    <a:lstStyle/>
-                    <a:p>
-                      <a:pPr algn="r" fontAlgn="ctr">
-                        <a:buNone/>
-                      </a:pPr>
-                      <a:r>
-                        <a:rPr lang="sk-SK" sz="1200" b="0" i="0" u="none" strike="noStrike">
-                          <a:effectLst/>
-                          <a:latin typeface="Arial" panose="020B0604020202020204" pitchFamily="34" charset="0"/>
-                        </a:rPr>
-                        <a:t>13865</a:t>
-                      </a:r>
-                    </a:p>
-                  </a:txBody>
-                  <a:tcPr marL="62943" marR="62943" marT="31472" marB="31472" anchor="ctr">
-                    <a:lnL>
-                      <a:noFill/>
-                    </a:lnL>
-                    <a:lnR>
-                      <a:noFill/>
-                    </a:lnR>
-                    <a:lnT>
-                      <a:noFill/>
-                    </a:lnT>
-                    <a:lnB>
-                      <a:noFill/>
-                    </a:lnB>
-                    <a:noFill/>
-                  </a:tcPr>
-                </a:tc>
-                <a:tc>
-                  <a:txBody>
-                    <a:bodyPr/>
-                    <a:lstStyle/>
-                    <a:p>
-                      <a:pPr algn="r" fontAlgn="ctr">
-                        <a:buNone/>
-                      </a:pPr>
-                      <a:r>
-                        <a:rPr lang="sk-SK" sz="1200" b="0" i="0" u="none" strike="noStrike">
-                          <a:effectLst/>
-                          <a:latin typeface="Arial" panose="020B0604020202020204" pitchFamily="34" charset="0"/>
-                        </a:rPr>
-                        <a:t>16175</a:t>
-                      </a:r>
-                    </a:p>
-                  </a:txBody>
-                  <a:tcPr marL="62943" marR="62943" marT="31472" marB="31472" anchor="ctr">
-                    <a:lnL>
-                      <a:noFill/>
-                    </a:lnL>
-                    <a:lnR>
-                      <a:noFill/>
-                    </a:lnR>
-                    <a:lnT>
-                      <a:noFill/>
-                    </a:lnT>
-                    <a:lnB>
-                      <a:noFill/>
-                    </a:lnB>
-                    <a:noFill/>
-                  </a:tcPr>
-                </a:tc>
-                <a:extLst>
-                  <a:ext uri="{0D108BD9-81ED-4DB2-BD59-A6C34878D82A}">
-                    <a16:rowId xmlns:a16="http://schemas.microsoft.com/office/drawing/2014/main" val="361719652"/>
-                  </a:ext>
-                </a:extLst>
-              </a:tr>
-              <a:tr h="276951">
-                <a:tc>
-                  <a:txBody>
-                    <a:bodyPr/>
-                    <a:lstStyle/>
-                    <a:p>
-                      <a:pPr algn="l" fontAlgn="ctr">
-                        <a:buNone/>
-                      </a:pPr>
-                      <a:r>
-                        <a:rPr lang="sk-SK" sz="1200" b="0" i="0" u="none" strike="noStrike">
-                          <a:effectLst/>
-                          <a:latin typeface="Arial" panose="020B0604020202020204" pitchFamily="34" charset="0"/>
-                        </a:rPr>
-                        <a:t>Max bigram frequency</a:t>
-                      </a:r>
-                    </a:p>
-                  </a:txBody>
-                  <a:tcPr marL="62943" marR="62943" marT="31472" marB="31472" anchor="ctr">
-                    <a:lnL>
-                      <a:noFill/>
-                    </a:lnL>
-                    <a:lnR>
-                      <a:noFill/>
-                    </a:lnR>
-                    <a:lnT>
-                      <a:noFill/>
-                    </a:lnT>
-                    <a:lnB>
-                      <a:noFill/>
-                    </a:lnB>
-                    <a:noFill/>
-                  </a:tcPr>
-                </a:tc>
-                <a:tc>
-                  <a:txBody>
-                    <a:bodyPr/>
-                    <a:lstStyle/>
-                    <a:p>
-                      <a:pPr algn="r" fontAlgn="ctr">
-                        <a:buNone/>
-                      </a:pPr>
-                      <a:r>
-                        <a:rPr lang="sk-SK" sz="1200" b="0" i="0" u="none" strike="noStrike">
-                          <a:effectLst/>
-                          <a:latin typeface="Arial" panose="020B0604020202020204" pitchFamily="34" charset="0"/>
-                        </a:rPr>
-                        <a:t>155</a:t>
-                      </a:r>
-                    </a:p>
-                  </a:txBody>
-                  <a:tcPr marL="62943" marR="62943" marT="31472" marB="31472" anchor="ctr">
-                    <a:lnL>
-                      <a:noFill/>
-                    </a:lnL>
-                    <a:lnR>
-                      <a:noFill/>
-                    </a:lnR>
-                    <a:lnT>
-                      <a:noFill/>
-                    </a:lnT>
-                    <a:lnB>
-                      <a:noFill/>
-                    </a:lnB>
-                    <a:noFill/>
-                  </a:tcPr>
-                </a:tc>
-                <a:tc>
-                  <a:txBody>
-                    <a:bodyPr/>
-                    <a:lstStyle/>
-                    <a:p>
-                      <a:pPr algn="r" fontAlgn="ctr">
-                        <a:buNone/>
-                      </a:pPr>
-                      <a:r>
-                        <a:rPr lang="sk-SK" sz="1200" b="0" i="0" u="none" strike="noStrike">
-                          <a:effectLst/>
-                          <a:latin typeface="Arial" panose="020B0604020202020204" pitchFamily="34" charset="0"/>
-                        </a:rPr>
-                        <a:t>155</a:t>
-                      </a:r>
-                    </a:p>
-                  </a:txBody>
-                  <a:tcPr marL="62943" marR="62943" marT="31472" marB="31472" anchor="ctr">
-                    <a:lnL>
-                      <a:noFill/>
-                    </a:lnL>
-                    <a:lnR>
-                      <a:noFill/>
-                    </a:lnR>
-                    <a:lnT>
-                      <a:noFill/>
-                    </a:lnT>
-                    <a:lnB>
-                      <a:noFill/>
-                    </a:lnB>
-                    <a:noFill/>
-                  </a:tcPr>
-                </a:tc>
-                <a:tc>
-                  <a:txBody>
-                    <a:bodyPr/>
-                    <a:lstStyle/>
-                    <a:p>
-                      <a:pPr algn="r" fontAlgn="ctr">
-                        <a:buNone/>
-                      </a:pPr>
-                      <a:r>
-                        <a:rPr lang="sk-SK" sz="1200" b="0" i="0" u="none" strike="noStrike">
-                          <a:effectLst/>
-                          <a:latin typeface="Arial" panose="020B0604020202020204" pitchFamily="34" charset="0"/>
-                        </a:rPr>
-                        <a:t>58</a:t>
-                      </a:r>
-                    </a:p>
-                  </a:txBody>
-                  <a:tcPr marL="62943" marR="62943" marT="31472" marB="31472" anchor="ctr">
-                    <a:lnL>
-                      <a:noFill/>
-                    </a:lnL>
-                    <a:lnR>
-                      <a:noFill/>
-                    </a:lnR>
-                    <a:lnT>
-                      <a:noFill/>
-                    </a:lnT>
-                    <a:lnB>
-                      <a:noFill/>
-                    </a:lnB>
-                    <a:noFill/>
-                  </a:tcPr>
-                </a:tc>
-                <a:extLst>
-                  <a:ext uri="{0D108BD9-81ED-4DB2-BD59-A6C34878D82A}">
-                    <a16:rowId xmlns:a16="http://schemas.microsoft.com/office/drawing/2014/main" val="2985211117"/>
-                  </a:ext>
-                </a:extLst>
-              </a:tr>
-              <a:tr h="276951">
-                <a:tc>
-                  <a:txBody>
-                    <a:bodyPr/>
-                    <a:lstStyle/>
-                    <a:p>
-                      <a:pPr algn="l" fontAlgn="ctr">
-                        <a:buNone/>
-                      </a:pPr>
-                      <a:r>
-                        <a:rPr lang="sk-SK" sz="1200" b="0" i="0" u="none" strike="noStrike">
-                          <a:effectLst/>
-                          <a:latin typeface="Arial" panose="020B0604020202020204" pitchFamily="34" charset="0"/>
-                        </a:rPr>
-                        <a:t>Average bigram frequency</a:t>
-                      </a:r>
-                    </a:p>
-                  </a:txBody>
-                  <a:tcPr marL="62943" marR="62943" marT="31472" marB="31472" anchor="ctr">
-                    <a:lnL>
-                      <a:noFill/>
-                    </a:lnL>
-                    <a:lnR>
-                      <a:noFill/>
-                    </a:lnR>
-                    <a:lnT>
-                      <a:noFill/>
-                    </a:lnT>
-                    <a:lnB>
-                      <a:noFill/>
-                    </a:lnB>
-                    <a:noFill/>
-                  </a:tcPr>
-                </a:tc>
-                <a:tc>
-                  <a:txBody>
-                    <a:bodyPr/>
-                    <a:lstStyle/>
-                    <a:p>
-                      <a:pPr algn="r" fontAlgn="ctr">
-                        <a:buNone/>
-                      </a:pPr>
-                      <a:r>
-                        <a:rPr lang="sk-SK" sz="1200" b="0" i="0" u="none" strike="noStrike">
-                          <a:effectLst/>
-                          <a:latin typeface="Arial" panose="020B0604020202020204" pitchFamily="34" charset="0"/>
-                        </a:rPr>
-                        <a:t>1.55676</a:t>
-                      </a:r>
-                    </a:p>
-                  </a:txBody>
-                  <a:tcPr marL="62943" marR="62943" marT="31472" marB="31472" anchor="ctr">
-                    <a:lnL>
-                      <a:noFill/>
-                    </a:lnL>
-                    <a:lnR>
-                      <a:noFill/>
-                    </a:lnR>
-                    <a:lnT>
-                      <a:noFill/>
-                    </a:lnT>
-                    <a:lnB>
-                      <a:noFill/>
-                    </a:lnB>
-                    <a:noFill/>
-                  </a:tcPr>
-                </a:tc>
-                <a:tc>
-                  <a:txBody>
-                    <a:bodyPr/>
-                    <a:lstStyle/>
-                    <a:p>
-                      <a:pPr algn="r" fontAlgn="ctr">
-                        <a:buNone/>
-                      </a:pPr>
-                      <a:r>
-                        <a:rPr lang="sk-SK" sz="1200" b="0" i="0" u="none" strike="noStrike">
-                          <a:effectLst/>
-                          <a:latin typeface="Arial" panose="020B0604020202020204" pitchFamily="34" charset="0"/>
-                        </a:rPr>
-                        <a:t>1.55586</a:t>
-                      </a:r>
-                    </a:p>
-                  </a:txBody>
-                  <a:tcPr marL="62943" marR="62943" marT="31472" marB="31472" anchor="ctr">
-                    <a:lnL>
-                      <a:noFill/>
-                    </a:lnL>
-                    <a:lnR>
-                      <a:noFill/>
-                    </a:lnR>
-                    <a:lnT>
-                      <a:noFill/>
-                    </a:lnT>
-                    <a:lnB>
-                      <a:noFill/>
-                    </a:lnB>
-                    <a:noFill/>
-                  </a:tcPr>
-                </a:tc>
-                <a:tc>
-                  <a:txBody>
-                    <a:bodyPr/>
-                    <a:lstStyle/>
-                    <a:p>
-                      <a:pPr algn="r" fontAlgn="ctr">
-                        <a:buNone/>
-                      </a:pPr>
-                      <a:r>
-                        <a:rPr lang="sk-SK" sz="1200" b="0" i="0" u="none" strike="noStrike">
-                          <a:effectLst/>
-                          <a:latin typeface="Arial" panose="020B0604020202020204" pitchFamily="34" charset="0"/>
-                        </a:rPr>
-                        <a:t>1.33366</a:t>
-                      </a:r>
-                    </a:p>
-                  </a:txBody>
-                  <a:tcPr marL="62943" marR="62943" marT="31472" marB="31472" anchor="ctr">
-                    <a:lnL>
-                      <a:noFill/>
-                    </a:lnL>
-                    <a:lnR>
-                      <a:noFill/>
-                    </a:lnR>
-                    <a:lnT>
-                      <a:noFill/>
-                    </a:lnT>
-                    <a:lnB>
-                      <a:noFill/>
-                    </a:lnB>
-                    <a:noFill/>
-                  </a:tcPr>
-                </a:tc>
-                <a:extLst>
-                  <a:ext uri="{0D108BD9-81ED-4DB2-BD59-A6C34878D82A}">
-                    <a16:rowId xmlns:a16="http://schemas.microsoft.com/office/drawing/2014/main" val="2637520913"/>
-                  </a:ext>
-                </a:extLst>
-              </a:tr>
-              <a:tr h="276951">
-                <a:tc>
-                  <a:txBody>
-                    <a:bodyPr/>
-                    <a:lstStyle/>
-                    <a:p>
-                      <a:pPr algn="l" fontAlgn="ctr">
-                        <a:buNone/>
-                      </a:pPr>
-                      <a:r>
-                        <a:rPr lang="sk-SK" sz="1200" b="0" i="0" u="none" strike="noStrike">
-                          <a:effectLst/>
-                          <a:latin typeface="Arial" panose="020B0604020202020204" pitchFamily="34" charset="0"/>
-                        </a:rPr>
-                        <a:t>Number of trigrams</a:t>
-                      </a:r>
-                    </a:p>
-                  </a:txBody>
-                  <a:tcPr marL="62943" marR="62943" marT="31472" marB="31472" anchor="ctr">
-                    <a:lnL>
-                      <a:noFill/>
-                    </a:lnL>
-                    <a:lnR>
-                      <a:noFill/>
-                    </a:lnR>
-                    <a:lnT>
-                      <a:noFill/>
-                    </a:lnT>
-                    <a:lnB>
-                      <a:noFill/>
-                    </a:lnB>
-                    <a:noFill/>
-                  </a:tcPr>
-                </a:tc>
-                <a:tc>
-                  <a:txBody>
-                    <a:bodyPr/>
-                    <a:lstStyle/>
-                    <a:p>
-                      <a:pPr algn="r" fontAlgn="ctr">
-                        <a:buNone/>
-                      </a:pPr>
-                      <a:r>
-                        <a:rPr lang="sk-SK" sz="1200" b="0" i="0" u="none" strike="noStrike">
-                          <a:effectLst/>
-                          <a:latin typeface="Arial" panose="020B0604020202020204" pitchFamily="34" charset="0"/>
-                        </a:rPr>
-                        <a:t>20016</a:t>
-                      </a:r>
-                    </a:p>
-                  </a:txBody>
-                  <a:tcPr marL="62943" marR="62943" marT="31472" marB="31472" anchor="ctr">
-                    <a:lnL>
-                      <a:noFill/>
-                    </a:lnL>
-                    <a:lnR>
-                      <a:noFill/>
-                    </a:lnR>
-                    <a:lnT>
-                      <a:noFill/>
-                    </a:lnT>
-                    <a:lnB>
-                      <a:noFill/>
-                    </a:lnB>
-                    <a:noFill/>
-                  </a:tcPr>
-                </a:tc>
-                <a:tc>
-                  <a:txBody>
-                    <a:bodyPr/>
-                    <a:lstStyle/>
-                    <a:p>
-                      <a:pPr algn="r" fontAlgn="ctr">
-                        <a:buNone/>
-                      </a:pPr>
-                      <a:r>
-                        <a:rPr lang="sk-SK" sz="1200" b="0" i="0" u="none" strike="noStrike">
-                          <a:effectLst/>
-                          <a:latin typeface="Arial" panose="020B0604020202020204" pitchFamily="34" charset="0"/>
-                        </a:rPr>
-                        <a:t>20022</a:t>
-                      </a:r>
-                    </a:p>
-                  </a:txBody>
-                  <a:tcPr marL="62943" marR="62943" marT="31472" marB="31472" anchor="ctr">
-                    <a:lnL>
-                      <a:noFill/>
-                    </a:lnL>
-                    <a:lnR>
-                      <a:noFill/>
-                    </a:lnR>
-                    <a:lnT>
-                      <a:noFill/>
-                    </a:lnT>
-                    <a:lnB>
-                      <a:noFill/>
-                    </a:lnB>
-                    <a:noFill/>
-                  </a:tcPr>
-                </a:tc>
-                <a:tc>
-                  <a:txBody>
-                    <a:bodyPr/>
-                    <a:lstStyle/>
-                    <a:p>
-                      <a:pPr algn="r" fontAlgn="ctr">
-                        <a:buNone/>
-                      </a:pPr>
-                      <a:r>
-                        <a:rPr lang="sk-SK" sz="1200" b="0" i="0" u="none" strike="noStrike">
-                          <a:effectLst/>
-                          <a:latin typeface="Arial" panose="020B0604020202020204" pitchFamily="34" charset="0"/>
-                        </a:rPr>
-                        <a:t>21288</a:t>
-                      </a:r>
-                    </a:p>
-                  </a:txBody>
-                  <a:tcPr marL="62943" marR="62943" marT="31472" marB="31472" anchor="ctr">
-                    <a:lnL>
-                      <a:noFill/>
-                    </a:lnL>
-                    <a:lnR>
-                      <a:noFill/>
-                    </a:lnR>
-                    <a:lnT>
-                      <a:noFill/>
-                    </a:lnT>
-                    <a:lnB>
-                      <a:noFill/>
-                    </a:lnB>
-                    <a:noFill/>
-                  </a:tcPr>
-                </a:tc>
-                <a:extLst>
-                  <a:ext uri="{0D108BD9-81ED-4DB2-BD59-A6C34878D82A}">
-                    <a16:rowId xmlns:a16="http://schemas.microsoft.com/office/drawing/2014/main" val="2871366551"/>
-                  </a:ext>
-                </a:extLst>
-              </a:tr>
-              <a:tr h="276951">
-                <a:tc>
-                  <a:txBody>
-                    <a:bodyPr/>
-                    <a:lstStyle/>
-                    <a:p>
-                      <a:pPr algn="l" fontAlgn="ctr">
-                        <a:buNone/>
-                      </a:pPr>
-                      <a:r>
-                        <a:rPr lang="sk-SK" sz="1200" b="0" i="0" u="none" strike="noStrike">
-                          <a:effectLst/>
-                          <a:latin typeface="Arial" panose="020B0604020202020204" pitchFamily="34" charset="0"/>
-                        </a:rPr>
-                        <a:t>Max trigram frequency</a:t>
-                      </a:r>
-                    </a:p>
-                  </a:txBody>
-                  <a:tcPr marL="62943" marR="62943" marT="31472" marB="31472" anchor="ctr">
-                    <a:lnL>
-                      <a:noFill/>
-                    </a:lnL>
-                    <a:lnR>
-                      <a:noFill/>
-                    </a:lnR>
-                    <a:lnT>
-                      <a:noFill/>
-                    </a:lnT>
-                    <a:lnB>
-                      <a:noFill/>
-                    </a:lnB>
-                    <a:noFill/>
-                  </a:tcPr>
-                </a:tc>
-                <a:tc>
-                  <a:txBody>
-                    <a:bodyPr/>
-                    <a:lstStyle/>
-                    <a:p>
-                      <a:pPr algn="r" fontAlgn="ctr">
-                        <a:buNone/>
-                      </a:pPr>
-                      <a:r>
-                        <a:rPr lang="sk-SK" sz="1200" b="0" i="0" u="none" strike="noStrike">
-                          <a:effectLst/>
-                          <a:latin typeface="Arial" panose="020B0604020202020204" pitchFamily="34" charset="0"/>
-                        </a:rPr>
-                        <a:t>22</a:t>
-                      </a:r>
-                    </a:p>
-                  </a:txBody>
-                  <a:tcPr marL="62943" marR="62943" marT="31472" marB="31472" anchor="ctr">
-                    <a:lnL>
-                      <a:noFill/>
-                    </a:lnL>
-                    <a:lnR>
-                      <a:noFill/>
-                    </a:lnR>
-                    <a:lnT>
-                      <a:noFill/>
-                    </a:lnT>
-                    <a:lnB>
-                      <a:noFill/>
-                    </a:lnB>
-                    <a:noFill/>
-                  </a:tcPr>
-                </a:tc>
-                <a:tc>
-                  <a:txBody>
-                    <a:bodyPr/>
-                    <a:lstStyle/>
-                    <a:p>
-                      <a:pPr algn="r" fontAlgn="ctr">
-                        <a:buNone/>
-                      </a:pPr>
-                      <a:r>
-                        <a:rPr lang="sk-SK" sz="1200" b="0" i="0" u="none" strike="noStrike">
-                          <a:effectLst/>
-                          <a:latin typeface="Arial" panose="020B0604020202020204" pitchFamily="34" charset="0"/>
-                        </a:rPr>
-                        <a:t>22</a:t>
-                      </a:r>
-                    </a:p>
-                  </a:txBody>
-                  <a:tcPr marL="62943" marR="62943" marT="31472" marB="31472" anchor="ctr">
-                    <a:lnL>
-                      <a:noFill/>
-                    </a:lnL>
-                    <a:lnR>
-                      <a:noFill/>
-                    </a:lnR>
-                    <a:lnT>
-                      <a:noFill/>
-                    </a:lnT>
-                    <a:lnB>
-                      <a:noFill/>
-                    </a:lnB>
-                    <a:noFill/>
-                  </a:tcPr>
-                </a:tc>
-                <a:tc>
-                  <a:txBody>
-                    <a:bodyPr/>
-                    <a:lstStyle/>
-                    <a:p>
-                      <a:pPr algn="r" fontAlgn="ctr">
-                        <a:buNone/>
-                      </a:pPr>
-                      <a:r>
-                        <a:rPr lang="sk-SK" sz="1200" b="0" i="0" u="none" strike="noStrike">
-                          <a:effectLst/>
-                          <a:latin typeface="Arial" panose="020B0604020202020204" pitchFamily="34" charset="0"/>
-                        </a:rPr>
-                        <a:t>5</a:t>
-                      </a:r>
-                    </a:p>
-                  </a:txBody>
-                  <a:tcPr marL="62943" marR="62943" marT="31472" marB="31472" anchor="ctr">
-                    <a:lnL>
-                      <a:noFill/>
-                    </a:lnL>
-                    <a:lnR>
-                      <a:noFill/>
-                    </a:lnR>
-                    <a:lnT>
-                      <a:noFill/>
-                    </a:lnT>
-                    <a:lnB>
-                      <a:noFill/>
-                    </a:lnB>
-                    <a:noFill/>
-                  </a:tcPr>
-                </a:tc>
-                <a:extLst>
-                  <a:ext uri="{0D108BD9-81ED-4DB2-BD59-A6C34878D82A}">
-                    <a16:rowId xmlns:a16="http://schemas.microsoft.com/office/drawing/2014/main" val="4141693908"/>
-                  </a:ext>
-                </a:extLst>
-              </a:tr>
-              <a:tr h="276951">
-                <a:tc>
-                  <a:txBody>
-                    <a:bodyPr/>
-                    <a:lstStyle/>
-                    <a:p>
-                      <a:pPr algn="l" fontAlgn="ctr">
-                        <a:buNone/>
-                      </a:pPr>
-                      <a:r>
-                        <a:rPr lang="sk-SK" sz="1200" b="0" i="0" u="none" strike="noStrike">
-                          <a:effectLst/>
-                          <a:latin typeface="Arial" panose="020B0604020202020204" pitchFamily="34" charset="0"/>
-                        </a:rPr>
-                        <a:t>Average trigram frequency</a:t>
-                      </a:r>
-                    </a:p>
-                  </a:txBody>
-                  <a:tcPr marL="62943" marR="62943" marT="31472" marB="31472" anchor="ctr">
-                    <a:lnL>
-                      <a:noFill/>
-                    </a:lnL>
-                    <a:lnR>
-                      <a:noFill/>
-                    </a:lnR>
-                    <a:lnT>
-                      <a:noFill/>
-                    </a:lnT>
-                    <a:lnB>
-                      <a:noFill/>
-                    </a:lnB>
-                    <a:noFill/>
-                  </a:tcPr>
-                </a:tc>
-                <a:tc>
-                  <a:txBody>
-                    <a:bodyPr/>
-                    <a:lstStyle/>
-                    <a:p>
-                      <a:pPr algn="r" fontAlgn="ctr">
-                        <a:buNone/>
-                      </a:pPr>
-                      <a:r>
-                        <a:rPr lang="sk-SK" sz="1200" b="0" i="0" u="none" strike="noStrike">
-                          <a:effectLst/>
-                          <a:latin typeface="Arial" panose="020B0604020202020204" pitchFamily="34" charset="0"/>
-                        </a:rPr>
-                        <a:t>1.07769</a:t>
-                      </a:r>
-                    </a:p>
-                  </a:txBody>
-                  <a:tcPr marL="62943" marR="62943" marT="31472" marB="31472" anchor="ctr">
-                    <a:lnL>
-                      <a:noFill/>
-                    </a:lnL>
-                    <a:lnR>
-                      <a:noFill/>
-                    </a:lnR>
-                    <a:lnT>
-                      <a:noFill/>
-                    </a:lnT>
-                    <a:lnB>
-                      <a:noFill/>
-                    </a:lnB>
-                    <a:noFill/>
-                  </a:tcPr>
-                </a:tc>
-                <a:tc>
-                  <a:txBody>
-                    <a:bodyPr/>
-                    <a:lstStyle/>
-                    <a:p>
-                      <a:pPr algn="r" fontAlgn="ctr">
-                        <a:buNone/>
-                      </a:pPr>
-                      <a:r>
-                        <a:rPr lang="sk-SK" sz="1200" b="0" i="0" u="none" strike="noStrike">
-                          <a:effectLst/>
-                          <a:latin typeface="Arial" panose="020B0604020202020204" pitchFamily="34" charset="0"/>
-                        </a:rPr>
-                        <a:t>1.07736</a:t>
-                      </a:r>
-                    </a:p>
-                  </a:txBody>
-                  <a:tcPr marL="62943" marR="62943" marT="31472" marB="31472" anchor="ctr">
-                    <a:lnL>
-                      <a:noFill/>
-                    </a:lnL>
-                    <a:lnR>
-                      <a:noFill/>
-                    </a:lnR>
-                    <a:lnT>
-                      <a:noFill/>
-                    </a:lnT>
-                    <a:lnB>
-                      <a:noFill/>
-                    </a:lnB>
-                    <a:noFill/>
-                  </a:tcPr>
-                </a:tc>
-                <a:tc>
-                  <a:txBody>
-                    <a:bodyPr/>
-                    <a:lstStyle/>
-                    <a:p>
-                      <a:pPr algn="r" fontAlgn="ctr">
-                        <a:buNone/>
-                      </a:pPr>
-                      <a:r>
-                        <a:rPr lang="sk-SK" sz="1200" b="0" i="0" u="none" strike="noStrike" dirty="0">
-                          <a:effectLst/>
-                          <a:latin typeface="Arial" panose="020B0604020202020204" pitchFamily="34" charset="0"/>
-                        </a:rPr>
-                        <a:t>1.01329</a:t>
-                      </a:r>
-                    </a:p>
-                  </a:txBody>
-                  <a:tcPr marL="62943" marR="62943" marT="31472" marB="31472" anchor="ctr">
-                    <a:lnL>
-                      <a:noFill/>
-                    </a:lnL>
-                    <a:lnR>
-                      <a:noFill/>
-                    </a:lnR>
-                    <a:lnT>
-                      <a:noFill/>
-                    </a:lnT>
-                    <a:lnB>
-                      <a:noFill/>
-                    </a:lnB>
-                    <a:noFill/>
-                  </a:tcPr>
-                </a:tc>
-                <a:extLst>
-                  <a:ext uri="{0D108BD9-81ED-4DB2-BD59-A6C34878D82A}">
-                    <a16:rowId xmlns:a16="http://schemas.microsoft.com/office/drawing/2014/main" val="3000250927"/>
-                  </a:ext>
-                </a:extLst>
-              </a:tr>
-            </a:tbl>
-          </a:graphicData>
-        </a:graphic>
-      </p:graphicFrame>
     </p:spTree>
     <p:extLst>
       <p:ext uri="{BB962C8B-B14F-4D97-AF65-F5344CB8AC3E}">
-        <p14:creationId xmlns:p14="http://schemas.microsoft.com/office/powerpoint/2010/main" val="3452004405"/>
+        <p14:creationId xmlns:p14="http://schemas.microsoft.com/office/powerpoint/2010/main" val="4030174028"/>
       </p:ext>
     </p:extLst>
   </p:cSld>
   <p:clrMapOvr>
-    <a:masterClrMapping/>
+    <a:overrideClrMapping bg1="dk1" tx1="lt1" bg2="dk2" tx2="lt2" accent1="accent1" accent2="accent2" accent3="accent3" accent4="accent4" accent5="accent5" accent6="accent6" hlink="hlink" folHlink="folHlink"/>
   </p:clrMapOvr>
 </p:sld>
 </file>
